--- a/docs/受付システム_保守引き継ぎ.pptx
+++ b/docs/受付システム_保守引き継ぎ.pptx
@@ -513,7 +513,7 @@
           <a:p>
             <a:r>
               <a:rPr lang="en-US" dirty="0"/>
-              <a:t>受付システムの保守引き継ぎ会用スライド（ドラフト）。本体の詳細は docs/maintenance-handover.md を参照。</a:t>
+              <a:t/>
             </a:r>
             <a:endParaRPr lang="en-US" dirty="0"/>
           </a:p>
@@ -777,7 +777,7 @@
           <a:p>
             <a:r>
               <a:rPr lang="en-US" dirty="0"/>
-              <a:t>3つの運用リスク（ドメインPOST・GASアカウント依存・スキーマdrift）を強調して締める。</a:t>
+              <a:t/>
             </a:r>
             <a:endParaRPr lang="en-US" dirty="0"/>
           </a:p>
@@ -865,7 +865,7 @@
           <a:p>
             <a:r>
               <a:rPr lang="en-US" dirty="0"/>
-              <a:t>9番目の『ドキュメント一覧』は最後にまとめて紹介します。</a:t>
+              <a:t/>
             </a:r>
             <a:endParaRPr lang="en-US" dirty="0"/>
           </a:p>
@@ -2098,7 +2098,7 @@
         </p:nvSpPr>
         <p:spPr>
           <a:xfrm>
-            <a:off x="11430000" y="6355080"/>
+            <a:off x="11430000" y="6382512"/>
             <a:ext cx="457200" cy="274320"/>
           </a:xfrm>
           <a:prstGeom prst="rect">
@@ -2137,7 +2137,7 @@
         </p:nvSpPr>
         <p:spPr>
           <a:xfrm>
-            <a:off x="548640" y="6355080"/>
+            <a:off x="548640" y="6382512"/>
             <a:ext cx="5486400" cy="274320"/>
           </a:xfrm>
           <a:prstGeom prst="rect">
@@ -2247,7 +2247,7 @@
         </p:nvSpPr>
         <p:spPr>
           <a:xfrm>
-            <a:off x="548640" y="640080"/>
+            <a:off x="548640" y="658368"/>
             <a:ext cx="11064240" cy="640080"/>
           </a:xfrm>
           <a:prstGeom prst="rect">
@@ -2272,7 +2272,7 @@
                 <a:ea typeface="Cambria" pitchFamily="34" charset="-122"/>
                 <a:cs typeface="Cambria" pitchFamily="34" charset="-120"/>
               </a:rPr>
-              <a:t>引き継ぎチェックリスト（アクセス移管）</a:t>
+              <a:t>引き継ぎと AI保守</a:t>
             </a:r>
             <a:endParaRPr lang="en-US" sz="3000" dirty="0"/>
           </a:p>
@@ -2286,12 +2286,12 @@
         </p:nvSpPr>
         <p:spPr>
           <a:xfrm>
-            <a:off x="548640" y="1600200"/>
-            <a:ext cx="5440680" cy="960120"/>
+            <a:off x="548640" y="1554480"/>
+            <a:ext cx="5486400" cy="4206240"/>
           </a:xfrm>
           <a:prstGeom prst="roundRect">
             <a:avLst>
-              <a:gd name="adj" fmla="val 8571"/>
+              <a:gd name="adj" fmla="val 1957"/>
             </a:avLst>
           </a:prstGeom>
           <a:solidFill>
@@ -2314,127 +2314,226 @@
       </p:sp>
       <p:sp>
         <p:nvSpPr>
-          <p:cNvPr id="5" name="Shape 3"/>
+          <p:cNvPr id="5" name="Text 3"/>
+          <p:cNvSpPr txBox="1"/>
+          <p:nvPr/>
+        </p:nvSpPr>
+        <p:spPr>
+          <a:xfrm>
+            <a:off x="841248" y="1737360"/>
+            <a:ext cx="4937760" cy="365760"/>
+          </a:xfrm>
+          <a:prstGeom prst="rect">
+            <a:avLst/>
+          </a:prstGeom>
+          <a:noFill/>
+          <a:ln/>
+        </p:spPr>
+        <p:txBody>
+          <a:bodyPr wrap="square" lIns="0" tIns="0" rIns="0" bIns="0" rtlCol="0" anchor="ctr"/>
+          <a:lstStyle/>
+          <a:p>
+            <a:pPr indent="0" marL="0">
+              <a:buNone/>
+            </a:pPr>
+            <a:r>
+              <a:rPr lang="en-US" sz="1500" b="1" dirty="0">
+                <a:solidFill>
+                  <a:srgbClr val="1E2761"/>
+                </a:solidFill>
+                <a:latin typeface="Calibri" pitchFamily="34" charset="0"/>
+                <a:ea typeface="Calibri" pitchFamily="34" charset="-122"/>
+                <a:cs typeface="Calibri" pitchFamily="34" charset="-120"/>
+              </a:rPr>
+              <a:t>アクセス移管チェックリスト</a:t>
+            </a:r>
+            <a:endParaRPr lang="en-US" sz="1500" dirty="0"/>
+          </a:p>
+        </p:txBody>
+      </p:sp>
+      <p:sp>
+        <p:nvSpPr>
+          <p:cNvPr id="6" name="Text 4"/>
+          <p:cNvSpPr txBox="1"/>
+          <p:nvPr/>
+        </p:nvSpPr>
+        <p:spPr>
+          <a:xfrm>
+            <a:off x="896112" y="2240280"/>
+            <a:ext cx="4937760" cy="3474720"/>
+          </a:xfrm>
+          <a:prstGeom prst="rect">
+            <a:avLst/>
+          </a:prstGeom>
+          <a:noFill/>
+          <a:ln/>
+        </p:spPr>
+        <p:txBody>
+          <a:bodyPr wrap="square" lIns="0" tIns="0" rIns="0" bIns="0" rtlCol="0" anchor="t"/>
+          <a:lstStyle/>
+          <a:p>
+            <a:pPr indent="0" marL="0">
+              <a:lnSpc>
+                <a:spcPct val="108000"/>
+              </a:lnSpc>
+              <a:spcAft>
+                <a:spcPts val="800"/>
+              </a:spcAft>
+              <a:buNone/>
+            </a:pPr>
+            <a:r>
+              <a:rPr lang="en-US" sz="1300" dirty="0">
+                <a:solidFill>
+                  <a:srgbClr val="2A2E45"/>
+                </a:solidFill>
+                <a:latin typeface="Calibri" pitchFamily="34" charset="0"/>
+                <a:ea typeface="Calibri" pitchFamily="34" charset="-122"/>
+                <a:cs typeface="Calibri" pitchFamily="34" charset="-120"/>
+              </a:rPr>
+              <a:t>GitHub リポジトリ権限</a:t>
+            </a:r>
+            <a:pPr indent="0" marL="0">
+              <a:lnSpc>
+                <a:spcPct val="108000"/>
+              </a:lnSpc>
+              <a:spcAft>
+                <a:spcPts val="800"/>
+              </a:spcAft>
+              <a:buNone/>
+            </a:pPr>
+            <a:r>
+              <a:rPr lang="en-US" sz="1300" dirty="0">
+                <a:solidFill>
+                  <a:srgbClr val="2A2E45"/>
+                </a:solidFill>
+                <a:latin typeface="Calibri" pitchFamily="34" charset="0"/>
+                <a:ea typeface="Calibri" pitchFamily="34" charset="-122"/>
+                <a:cs typeface="Calibri" pitchFamily="34" charset="-120"/>
+              </a:rPr>
+              <a:t>Vercel（デプロイ・環境変数）</a:t>
+            </a:r>
+            <a:pPr indent="0" marL="0">
+              <a:lnSpc>
+                <a:spcPct val="108000"/>
+              </a:lnSpc>
+              <a:spcAft>
+                <a:spcPts val="800"/>
+              </a:spcAft>
+              <a:buNone/>
+            </a:pPr>
+            <a:r>
+              <a:rPr lang="en-US" sz="1300" dirty="0">
+                <a:solidFill>
+                  <a:srgbClr val="2A2E45"/>
+                </a:solidFill>
+                <a:latin typeface="Calibri" pitchFamily="34" charset="0"/>
+                <a:ea typeface="Calibri" pitchFamily="34" charset="-122"/>
+                <a:cs typeface="Calibri" pitchFamily="34" charset="-120"/>
+              </a:rPr>
+              <a:t>Supabase（DB・バックアップ）</a:t>
+            </a:r>
+            <a:pPr indent="0" marL="0">
+              <a:lnSpc>
+                <a:spcPct val="108000"/>
+              </a:lnSpc>
+              <a:spcAft>
+                <a:spcPts val="800"/>
+              </a:spcAft>
+              <a:buNone/>
+            </a:pPr>
+            <a:r>
+              <a:rPr lang="en-US" sz="1300" dirty="0">
+                <a:solidFill>
+                  <a:srgbClr val="2A2E45"/>
+                </a:solidFill>
+                <a:latin typeface="Calibri" pitchFamily="34" charset="0"/>
+                <a:ea typeface="Calibri" pitchFamily="34" charset="-122"/>
+                <a:cs typeface="Calibri" pitchFamily="34" charset="-120"/>
+              </a:rPr>
+              <a:t>Google Apps Script（トリガー実行者）</a:t>
+            </a:r>
+            <a:pPr indent="0" marL="0">
+              <a:lnSpc>
+                <a:spcPct val="108000"/>
+              </a:lnSpc>
+              <a:spcAft>
+                <a:spcPts val="800"/>
+              </a:spcAft>
+              <a:buNone/>
+            </a:pPr>
+            <a:r>
+              <a:rPr lang="en-US" sz="1300" dirty="0">
+                <a:solidFill>
+                  <a:srgbClr val="2A2E45"/>
+                </a:solidFill>
+                <a:latin typeface="Calibri" pitchFamily="34" charset="0"/>
+                <a:ea typeface="Calibri" pitchFamily="34" charset="-122"/>
+                <a:cs typeface="Calibri" pitchFamily="34" charset="-120"/>
+              </a:rPr>
+              <a:t>Google Chat / OAuth 管理権限</a:t>
+            </a:r>
+            <a:pPr indent="0" marL="0">
+              <a:lnSpc>
+                <a:spcPct val="108000"/>
+              </a:lnSpc>
+              <a:spcAft>
+                <a:spcPts val="800"/>
+              </a:spcAft>
+              <a:buNone/>
+            </a:pPr>
+            <a:r>
+              <a:rPr lang="en-US" sz="1300" dirty="0">
+                <a:solidFill>
+                  <a:srgbClr val="2A2E45"/>
+                </a:solidFill>
+                <a:latin typeface="Calibri" pitchFamily="34" charset="0"/>
+                <a:ea typeface="Calibri" pitchFamily="34" charset="-122"/>
+                <a:cs typeface="Calibri" pitchFamily="34" charset="-120"/>
+              </a:rPr>
+              <a:t>独自ドメイン DNS/Vercel 設定</a:t>
+            </a:r>
+            <a:pPr indent="0" marL="0">
+              <a:lnSpc>
+                <a:spcPct val="108000"/>
+              </a:lnSpc>
+              <a:spcAft>
+                <a:spcPts val="800"/>
+              </a:spcAft>
+              <a:buNone/>
+            </a:pPr>
+            <a:r>
+              <a:rPr lang="en-US" sz="1300" dirty="0">
+                <a:solidFill>
+                  <a:srgbClr val="2A2E45"/>
+                </a:solidFill>
+                <a:latin typeface="Calibri" pitchFamily="34" charset="0"/>
+                <a:ea typeface="Calibri" pitchFamily="34" charset="-122"/>
+                <a:cs typeface="Calibri" pitchFamily="34" charset="-120"/>
+              </a:rPr>
+              <a:t>本番スキーマのダンプ保管</a:t>
+            </a:r>
+            <a:endParaRPr lang="en-US" sz="1300" dirty="0"/>
+          </a:p>
+        </p:txBody>
+      </p:sp>
+      <p:sp>
+        <p:nvSpPr>
+          <p:cNvPr id="7" name="Shape 5"/>
           <p:cNvSpPr/>
           <p:nvPr/>
         </p:nvSpPr>
         <p:spPr>
           <a:xfrm>
-            <a:off x="777240" y="1901952"/>
-            <a:ext cx="365760" cy="365760"/>
+            <a:off x="6309360" y="1554480"/>
+            <a:ext cx="5303520" cy="4206240"/>
           </a:xfrm>
           <a:prstGeom prst="roundRect">
             <a:avLst>
-              <a:gd name="adj" fmla="val 12500"/>
+              <a:gd name="adj" fmla="val 1957"/>
             </a:avLst>
           </a:prstGeom>
           <a:solidFill>
             <a:srgbClr val="FFFFFF"/>
-          </a:solidFill>
-          <a:ln w="19050">
-            <a:solidFill>
-              <a:srgbClr val="1E2761"/>
-            </a:solidFill>
-            <a:prstDash val="solid"/>
-          </a:ln>
-        </p:spPr>
-      </p:sp>
-      <p:sp>
-        <p:nvSpPr>
-          <p:cNvPr id="6" name="Text 4"/>
-          <p:cNvSpPr txBox="1"/>
-          <p:nvPr/>
-        </p:nvSpPr>
-        <p:spPr>
-          <a:xfrm>
-            <a:off x="1325880" y="1728216"/>
-            <a:ext cx="4526280" cy="365760"/>
-          </a:xfrm>
-          <a:prstGeom prst="rect">
-            <a:avLst/>
-          </a:prstGeom>
-          <a:noFill/>
-          <a:ln/>
-        </p:spPr>
-        <p:txBody>
-          <a:bodyPr wrap="square" lIns="0" tIns="0" rIns="0" bIns="0" rtlCol="0" anchor="ctr"/>
-          <a:lstStyle/>
-          <a:p>
-            <a:pPr indent="0" marL="0">
-              <a:buNone/>
-            </a:pPr>
-            <a:r>
-              <a:rPr lang="en-US" sz="1400" b="1" dirty="0">
-                <a:solidFill>
-                  <a:srgbClr val="1E2761"/>
-                </a:solidFill>
-                <a:latin typeface="Calibri" pitchFamily="34" charset="0"/>
-                <a:ea typeface="Calibri" pitchFamily="34" charset="-122"/>
-                <a:cs typeface="Calibri" pitchFamily="34" charset="-120"/>
-              </a:rPr>
-              <a:t>Vercel</a:t>
-            </a:r>
-            <a:endParaRPr lang="en-US" sz="1400" dirty="0"/>
-          </a:p>
-        </p:txBody>
-      </p:sp>
-      <p:sp>
-        <p:nvSpPr>
-          <p:cNvPr id="7" name="Text 5"/>
-          <p:cNvSpPr txBox="1"/>
-          <p:nvPr/>
-        </p:nvSpPr>
-        <p:spPr>
-          <a:xfrm>
-            <a:off x="1325880" y="2103120"/>
-            <a:ext cx="4526280" cy="365760"/>
-          </a:xfrm>
-          <a:prstGeom prst="rect">
-            <a:avLst/>
-          </a:prstGeom>
-          <a:noFill/>
-          <a:ln/>
-        </p:spPr>
-        <p:txBody>
-          <a:bodyPr wrap="square" lIns="0" tIns="0" rIns="0" bIns="0" rtlCol="0" anchor="ctr"/>
-          <a:lstStyle/>
-          <a:p>
-            <a:pPr indent="0" marL="0">
-              <a:buNone/>
-            </a:pPr>
-            <a:r>
-              <a:rPr lang="en-US" sz="1050" dirty="0">
-                <a:solidFill>
-                  <a:srgbClr val="6B7280"/>
-                </a:solidFill>
-                <a:latin typeface="Calibri" pitchFamily="34" charset="0"/>
-                <a:ea typeface="Calibri" pitchFamily="34" charset="-122"/>
-                <a:cs typeface="Calibri" pitchFamily="34" charset="-120"/>
-              </a:rPr>
-              <a:t>プロジェクトのメンバー追加（デプロイ・環境変数）</a:t>
-            </a:r>
-            <a:endParaRPr lang="en-US" sz="1050" dirty="0"/>
-          </a:p>
-        </p:txBody>
-      </p:sp>
-      <p:sp>
-        <p:nvSpPr>
-          <p:cNvPr id="8" name="Shape 6"/>
-          <p:cNvSpPr/>
-          <p:nvPr/>
-        </p:nvSpPr>
-        <p:spPr>
-          <a:xfrm>
-            <a:off x="6355080" y="1600200"/>
-            <a:ext cx="5440680" cy="960120"/>
-          </a:xfrm>
-          <a:prstGeom prst="roundRect">
-            <a:avLst>
-              <a:gd name="adj" fmla="val 8571"/>
-            </a:avLst>
-          </a:prstGeom>
-          <a:solidFill>
-            <a:srgbClr val="F4F7FC"/>
           </a:solidFill>
           <a:ln w="12700">
             <a:solidFill>
@@ -2453,30 +2552,187 @@
       </p:sp>
       <p:sp>
         <p:nvSpPr>
-          <p:cNvPr id="9" name="Shape 7"/>
-          <p:cNvSpPr/>
-          <p:nvPr/>
-        </p:nvSpPr>
-        <p:spPr>
-          <a:xfrm>
-            <a:off x="6583680" y="1901952"/>
-            <a:ext cx="365760" cy="365760"/>
-          </a:xfrm>
-          <a:prstGeom prst="roundRect">
-            <a:avLst>
-              <a:gd name="adj" fmla="val 12500"/>
-            </a:avLst>
-          </a:prstGeom>
-          <a:solidFill>
-            <a:srgbClr val="FFFFFF"/>
-          </a:solidFill>
-          <a:ln w="19050">
-            <a:solidFill>
-              <a:srgbClr val="1E2761"/>
-            </a:solidFill>
-            <a:prstDash val="solid"/>
-          </a:ln>
-        </p:spPr>
+          <p:cNvPr id="8" name="Text 6"/>
+          <p:cNvSpPr txBox="1"/>
+          <p:nvPr/>
+        </p:nvSpPr>
+        <p:spPr>
+          <a:xfrm>
+            <a:off x="6583680" y="1737360"/>
+            <a:ext cx="4754880" cy="365760"/>
+          </a:xfrm>
+          <a:prstGeom prst="rect">
+            <a:avLst/>
+          </a:prstGeom>
+          <a:noFill/>
+          <a:ln/>
+        </p:spPr>
+        <p:txBody>
+          <a:bodyPr wrap="square" lIns="0" tIns="0" rIns="0" bIns="0" rtlCol="0" anchor="ctr"/>
+          <a:lstStyle/>
+          <a:p>
+            <a:pPr indent="0" marL="0">
+              <a:buNone/>
+            </a:pPr>
+            <a:r>
+              <a:rPr lang="en-US" sz="1500" b="1" dirty="0">
+                <a:solidFill>
+                  <a:srgbClr val="1E2761"/>
+                </a:solidFill>
+                <a:latin typeface="Calibri" pitchFamily="34" charset="0"/>
+                <a:ea typeface="Calibri" pitchFamily="34" charset="-122"/>
+                <a:cs typeface="Calibri" pitchFamily="34" charset="-120"/>
+              </a:rPr>
+              <a:t>AIエージェントで保守する</a:t>
+            </a:r>
+            <a:endParaRPr lang="en-US" sz="1500" dirty="0"/>
+          </a:p>
+        </p:txBody>
+      </p:sp>
+      <p:sp>
+        <p:nvSpPr>
+          <p:cNvPr id="9" name="Text 7"/>
+          <p:cNvSpPr txBox="1"/>
+          <p:nvPr/>
+        </p:nvSpPr>
+        <p:spPr>
+          <a:xfrm>
+            <a:off x="6629400" y="2240280"/>
+            <a:ext cx="4754880" cy="3474720"/>
+          </a:xfrm>
+          <a:prstGeom prst="rect">
+            <a:avLst/>
+          </a:prstGeom>
+          <a:noFill/>
+          <a:ln/>
+        </p:spPr>
+        <p:txBody>
+          <a:bodyPr wrap="square" lIns="0" tIns="0" rIns="0" bIns="0" rtlCol="0" anchor="t"/>
+          <a:lstStyle/>
+          <a:p>
+            <a:pPr indent="0" marL="0">
+              <a:lnSpc>
+                <a:spcPct val="108000"/>
+              </a:lnSpc>
+              <a:spcAft>
+                <a:spcPts val="800"/>
+              </a:spcAft>
+              <a:buNone/>
+            </a:pPr>
+            <a:r>
+              <a:rPr lang="en-US" sz="1300" dirty="0">
+                <a:solidFill>
+                  <a:srgbClr val="2A2E45"/>
+                </a:solidFill>
+                <a:latin typeface="Calibri" pitchFamily="34" charset="0"/>
+                <a:ea typeface="Calibri" pitchFamily="34" charset="-122"/>
+                <a:cs typeface="Calibri" pitchFamily="34" charset="-120"/>
+              </a:rPr>
+              <a:t>各自が好みのAIエージェントでOK</a:t>
+            </a:r>
+            <a:pPr indent="0" marL="0">
+              <a:lnSpc>
+                <a:spcPct val="108000"/>
+              </a:lnSpc>
+              <a:spcAft>
+                <a:spcPts val="800"/>
+              </a:spcAft>
+              <a:buNone/>
+            </a:pPr>
+            <a:r>
+              <a:rPr lang="en-US" sz="1300" dirty="0">
+                <a:solidFill>
+                  <a:srgbClr val="2A2E45"/>
+                </a:solidFill>
+                <a:latin typeface="Calibri" pitchFamily="34" charset="0"/>
+                <a:ea typeface="Calibri" pitchFamily="34" charset="-122"/>
+                <a:cs typeface="Calibri" pitchFamily="34" charset="-120"/>
+              </a:rPr>
+              <a:t>作業前に docs/ を読ませる（前提共有）</a:t>
+            </a:r>
+            <a:pPr indent="0" marL="0">
+              <a:lnSpc>
+                <a:spcPct val="108000"/>
+              </a:lnSpc>
+              <a:spcAft>
+                <a:spcPts val="800"/>
+              </a:spcAft>
+              <a:buNone/>
+            </a:pPr>
+            <a:r>
+              <a:rPr lang="en-US" sz="1300" dirty="0">
+                <a:solidFill>
+                  <a:srgbClr val="2A2E45"/>
+                </a:solidFill>
+                <a:latin typeface="Calibri" pitchFamily="34" charset="0"/>
+                <a:ea typeface="Calibri" pitchFamily="34" charset="-122"/>
+                <a:cs typeface="Calibri" pitchFamily="34" charset="-120"/>
+              </a:rPr>
+              <a:t>変更は ブランチ→PR→プレビュー確認→マージ</a:t>
+            </a:r>
+            <a:pPr indent="0" marL="0">
+              <a:lnSpc>
+                <a:spcPct val="108000"/>
+              </a:lnSpc>
+              <a:spcAft>
+                <a:spcPts val="800"/>
+              </a:spcAft>
+              <a:buNone/>
+            </a:pPr>
+            <a:r>
+              <a:rPr lang="en-US" sz="1300" dirty="0">
+                <a:solidFill>
+                  <a:srgbClr val="2A2E45"/>
+                </a:solidFill>
+                <a:latin typeface="Calibri" pitchFamily="34" charset="0"/>
+                <a:ea typeface="Calibri" pitchFamily="34" charset="-122"/>
+                <a:cs typeface="Calibri" pitchFamily="34" charset="-120"/>
+              </a:rPr>
+              <a:t>秘密情報（キー値）は書かせない</a:t>
+            </a:r>
+            <a:pPr indent="0" marL="0">
+              <a:lnSpc>
+                <a:spcPct val="108000"/>
+              </a:lnSpc>
+              <a:spcAft>
+                <a:spcPts val="800"/>
+              </a:spcAft>
+              <a:buNone/>
+            </a:pPr>
+            <a:r>
+              <a:rPr lang="en-US" sz="1300" dirty="0">
+                <a:solidFill>
+                  <a:srgbClr val="2A2E45"/>
+                </a:solidFill>
+                <a:latin typeface="Calibri" pitchFamily="34" charset="0"/>
+                <a:ea typeface="Calibri" pitchFamily="34" charset="-122"/>
+                <a:cs typeface="Calibri" pitchFamily="34" charset="-120"/>
+              </a:rPr>
+              <a:t>スキーマ変更は migration 化（drift防止）</a:t>
+            </a:r>
+            <a:pPr indent="0" marL="0">
+              <a:lnSpc>
+                <a:spcPct val="108000"/>
+              </a:lnSpc>
+              <a:spcAft>
+                <a:spcPts val="800"/>
+              </a:spcAft>
+              <a:buNone/>
+            </a:pPr>
+            <a:r>
+              <a:rPr lang="en-US" sz="1300" dirty="0">
+                <a:solidFill>
+                  <a:srgbClr val="2A2E45"/>
+                </a:solidFill>
+                <a:latin typeface="Calibri" pitchFamily="34" charset="0"/>
+                <a:ea typeface="Calibri" pitchFamily="34" charset="-122"/>
+                <a:cs typeface="Calibri" pitchFamily="34" charset="-120"/>
+              </a:rPr>
+              <a:t>手順は docs/ai-agent-maintenance.md</a:t>
+            </a:r>
+            <a:endParaRPr lang="en-US" sz="1300" dirty="0"/>
+          </a:p>
+        </p:txBody>
       </p:sp>
       <p:sp>
         <p:nvSpPr>
@@ -2486,34 +2742,34 @@
         </p:nvSpPr>
         <p:spPr>
           <a:xfrm>
-            <a:off x="7132320" y="1728216"/>
-            <a:ext cx="4526280" cy="365760"/>
-          </a:xfrm>
-          <a:prstGeom prst="rect">
-            <a:avLst/>
-          </a:prstGeom>
-          <a:noFill/>
-          <a:ln/>
-        </p:spPr>
-        <p:txBody>
-          <a:bodyPr wrap="square" lIns="0" tIns="0" rIns="0" bIns="0" rtlCol="0" anchor="ctr"/>
-          <a:lstStyle/>
-          <a:p>
-            <a:pPr indent="0" marL="0">
-              <a:buNone/>
-            </a:pPr>
-            <a:r>
-              <a:rPr lang="en-US" sz="1400" b="1" dirty="0">
-                <a:solidFill>
-                  <a:srgbClr val="1E2761"/>
-                </a:solidFill>
-                <a:latin typeface="Calibri" pitchFamily="34" charset="0"/>
-                <a:ea typeface="Calibri" pitchFamily="34" charset="-122"/>
-                <a:cs typeface="Calibri" pitchFamily="34" charset="-120"/>
-              </a:rPr>
-              <a:t>Supabase</a:t>
-            </a:r>
-            <a:endParaRPr lang="en-US" sz="1400" dirty="0"/>
+            <a:off x="11430000" y="6382512"/>
+            <a:ext cx="457200" cy="274320"/>
+          </a:xfrm>
+          <a:prstGeom prst="rect">
+            <a:avLst/>
+          </a:prstGeom>
+          <a:noFill/>
+          <a:ln/>
+        </p:spPr>
+        <p:txBody>
+          <a:bodyPr wrap="square" lIns="0" tIns="0" rIns="0" bIns="0" rtlCol="0" anchor="ctr"/>
+          <a:lstStyle/>
+          <a:p>
+            <a:pPr algn="r" indent="0" marL="0">
+              <a:buNone/>
+            </a:pPr>
+            <a:r>
+              <a:rPr lang="en-US" sz="1000" dirty="0">
+                <a:solidFill>
+                  <a:srgbClr val="6B7280"/>
+                </a:solidFill>
+                <a:latin typeface="Calibri" pitchFamily="34" charset="0"/>
+                <a:ea typeface="Calibri" pitchFamily="34" charset="-122"/>
+                <a:cs typeface="Calibri" pitchFamily="34" charset="-120"/>
+              </a:rPr>
+              <a:t>10</a:t>
+            </a:r>
+            <a:endParaRPr lang="en-US" sz="1000" dirty="0"/>
           </a:p>
         </p:txBody>
       </p:sp>
@@ -2525,919 +2781,7 @@
         </p:nvSpPr>
         <p:spPr>
           <a:xfrm>
-            <a:off x="7132320" y="2103120"/>
-            <a:ext cx="4526280" cy="365760"/>
-          </a:xfrm>
-          <a:prstGeom prst="rect">
-            <a:avLst/>
-          </a:prstGeom>
-          <a:noFill/>
-          <a:ln/>
-        </p:spPr>
-        <p:txBody>
-          <a:bodyPr wrap="square" lIns="0" tIns="0" rIns="0" bIns="0" rtlCol="0" anchor="ctr"/>
-          <a:lstStyle/>
-          <a:p>
-            <a:pPr indent="0" marL="0">
-              <a:buNone/>
-            </a:pPr>
-            <a:r>
-              <a:rPr lang="en-US" sz="1050" dirty="0">
-                <a:solidFill>
-                  <a:srgbClr val="6B7280"/>
-                </a:solidFill>
-                <a:latin typeface="Calibri" pitchFamily="34" charset="0"/>
-                <a:ea typeface="Calibri" pitchFamily="34" charset="-122"/>
-                <a:cs typeface="Calibri" pitchFamily="34" charset="-120"/>
-              </a:rPr>
-              <a:t>メンバー追加（DB・RLS・バックアップ）</a:t>
-            </a:r>
-            <a:endParaRPr lang="en-US" sz="1050" dirty="0"/>
-          </a:p>
-        </p:txBody>
-      </p:sp>
-      <p:sp>
-        <p:nvSpPr>
-          <p:cNvPr id="12" name="Shape 10"/>
-          <p:cNvSpPr/>
-          <p:nvPr/>
-        </p:nvSpPr>
-        <p:spPr>
-          <a:xfrm>
-            <a:off x="548640" y="2743200"/>
-            <a:ext cx="5440680" cy="960120"/>
-          </a:xfrm>
-          <a:prstGeom prst="roundRect">
-            <a:avLst>
-              <a:gd name="adj" fmla="val 8571"/>
-            </a:avLst>
-          </a:prstGeom>
-          <a:solidFill>
-            <a:srgbClr val="F4F7FC"/>
-          </a:solidFill>
-          <a:ln w="12700">
-            <a:solidFill>
-              <a:srgbClr val="D9E1F2"/>
-            </a:solidFill>
-            <a:prstDash val="solid"/>
-          </a:ln>
-          <a:effectLst>
-            <a:outerShdw sx="100000" sy="100000" kx="0" ky="0" algn="bl" rotWithShape="0" blurRad="76200" dist="25400" dir="5400000">
-              <a:srgbClr val="9AA6C0">
-                <a:alpha val="28000"/>
-              </a:srgbClr>
-            </a:outerShdw>
-          </a:effectLst>
-        </p:spPr>
-      </p:sp>
-      <p:sp>
-        <p:nvSpPr>
-          <p:cNvPr id="13" name="Shape 11"/>
-          <p:cNvSpPr/>
-          <p:nvPr/>
-        </p:nvSpPr>
-        <p:spPr>
-          <a:xfrm>
-            <a:off x="777240" y="3044952"/>
-            <a:ext cx="365760" cy="365760"/>
-          </a:xfrm>
-          <a:prstGeom prst="roundRect">
-            <a:avLst>
-              <a:gd name="adj" fmla="val 12500"/>
-            </a:avLst>
-          </a:prstGeom>
-          <a:solidFill>
-            <a:srgbClr val="FFFFFF"/>
-          </a:solidFill>
-          <a:ln w="19050">
-            <a:solidFill>
-              <a:srgbClr val="1E2761"/>
-            </a:solidFill>
-            <a:prstDash val="solid"/>
-          </a:ln>
-        </p:spPr>
-      </p:sp>
-      <p:sp>
-        <p:nvSpPr>
-          <p:cNvPr id="14" name="Text 12"/>
-          <p:cNvSpPr txBox="1"/>
-          <p:nvPr/>
-        </p:nvSpPr>
-        <p:spPr>
-          <a:xfrm>
-            <a:off x="1325880" y="2871216"/>
-            <a:ext cx="4526280" cy="365760"/>
-          </a:xfrm>
-          <a:prstGeom prst="rect">
-            <a:avLst/>
-          </a:prstGeom>
-          <a:noFill/>
-          <a:ln/>
-        </p:spPr>
-        <p:txBody>
-          <a:bodyPr wrap="square" lIns="0" tIns="0" rIns="0" bIns="0" rtlCol="0" anchor="ctr"/>
-          <a:lstStyle/>
-          <a:p>
-            <a:pPr indent="0" marL="0">
-              <a:buNone/>
-            </a:pPr>
-            <a:r>
-              <a:rPr lang="en-US" sz="1400" b="1" dirty="0">
-                <a:solidFill>
-                  <a:srgbClr val="1E2761"/>
-                </a:solidFill>
-                <a:latin typeface="Calibri" pitchFamily="34" charset="0"/>
-                <a:ea typeface="Calibri" pitchFamily="34" charset="-122"/>
-                <a:cs typeface="Calibri" pitchFamily="34" charset="-120"/>
-              </a:rPr>
-              <a:t>GitHub</a:t>
-            </a:r>
-            <a:endParaRPr lang="en-US" sz="1400" dirty="0"/>
-          </a:p>
-        </p:txBody>
-      </p:sp>
-      <p:sp>
-        <p:nvSpPr>
-          <p:cNvPr id="15" name="Text 13"/>
-          <p:cNvSpPr txBox="1"/>
-          <p:nvPr/>
-        </p:nvSpPr>
-        <p:spPr>
-          <a:xfrm>
-            <a:off x="1325880" y="3246120"/>
-            <a:ext cx="4526280" cy="365760"/>
-          </a:xfrm>
-          <a:prstGeom prst="rect">
-            <a:avLst/>
-          </a:prstGeom>
-          <a:noFill/>
-          <a:ln/>
-        </p:spPr>
-        <p:txBody>
-          <a:bodyPr wrap="square" lIns="0" tIns="0" rIns="0" bIns="0" rtlCol="0" anchor="ctr"/>
-          <a:lstStyle/>
-          <a:p>
-            <a:pPr indent="0" marL="0">
-              <a:buNone/>
-            </a:pPr>
-            <a:r>
-              <a:rPr lang="en-US" sz="1050" dirty="0">
-                <a:solidFill>
-                  <a:srgbClr val="6B7280"/>
-                </a:solidFill>
-                <a:latin typeface="Calibri" pitchFamily="34" charset="0"/>
-                <a:ea typeface="Calibri" pitchFamily="34" charset="-122"/>
-                <a:cs typeface="Calibri" pitchFamily="34" charset="-120"/>
-              </a:rPr>
-              <a:t>リポジトリ権限付与</a:t>
-            </a:r>
-            <a:endParaRPr lang="en-US" sz="1050" dirty="0"/>
-          </a:p>
-        </p:txBody>
-      </p:sp>
-      <p:sp>
-        <p:nvSpPr>
-          <p:cNvPr id="16" name="Shape 14"/>
-          <p:cNvSpPr/>
-          <p:nvPr/>
-        </p:nvSpPr>
-        <p:spPr>
-          <a:xfrm>
-            <a:off x="6355080" y="2743200"/>
-            <a:ext cx="5440680" cy="960120"/>
-          </a:xfrm>
-          <a:prstGeom prst="roundRect">
-            <a:avLst>
-              <a:gd name="adj" fmla="val 8571"/>
-            </a:avLst>
-          </a:prstGeom>
-          <a:solidFill>
-            <a:srgbClr val="F4F7FC"/>
-          </a:solidFill>
-          <a:ln w="12700">
-            <a:solidFill>
-              <a:srgbClr val="D9E1F2"/>
-            </a:solidFill>
-            <a:prstDash val="solid"/>
-          </a:ln>
-          <a:effectLst>
-            <a:outerShdw sx="100000" sy="100000" kx="0" ky="0" algn="bl" rotWithShape="0" blurRad="76200" dist="25400" dir="5400000">
-              <a:srgbClr val="9AA6C0">
-                <a:alpha val="28000"/>
-              </a:srgbClr>
-            </a:outerShdw>
-          </a:effectLst>
-        </p:spPr>
-      </p:sp>
-      <p:sp>
-        <p:nvSpPr>
-          <p:cNvPr id="17" name="Shape 15"/>
-          <p:cNvSpPr/>
-          <p:nvPr/>
-        </p:nvSpPr>
-        <p:spPr>
-          <a:xfrm>
-            <a:off x="6583680" y="3044952"/>
-            <a:ext cx="365760" cy="365760"/>
-          </a:xfrm>
-          <a:prstGeom prst="roundRect">
-            <a:avLst>
-              <a:gd name="adj" fmla="val 12500"/>
-            </a:avLst>
-          </a:prstGeom>
-          <a:solidFill>
-            <a:srgbClr val="FFFFFF"/>
-          </a:solidFill>
-          <a:ln w="19050">
-            <a:solidFill>
-              <a:srgbClr val="1E2761"/>
-            </a:solidFill>
-            <a:prstDash val="solid"/>
-          </a:ln>
-        </p:spPr>
-      </p:sp>
-      <p:sp>
-        <p:nvSpPr>
-          <p:cNvPr id="18" name="Text 16"/>
-          <p:cNvSpPr txBox="1"/>
-          <p:nvPr/>
-        </p:nvSpPr>
-        <p:spPr>
-          <a:xfrm>
-            <a:off x="7132320" y="2871216"/>
-            <a:ext cx="4526280" cy="365760"/>
-          </a:xfrm>
-          <a:prstGeom prst="rect">
-            <a:avLst/>
-          </a:prstGeom>
-          <a:noFill/>
-          <a:ln/>
-        </p:spPr>
-        <p:txBody>
-          <a:bodyPr wrap="square" lIns="0" tIns="0" rIns="0" bIns="0" rtlCol="0" anchor="ctr"/>
-          <a:lstStyle/>
-          <a:p>
-            <a:pPr indent="0" marL="0">
-              <a:buNone/>
-            </a:pPr>
-            <a:r>
-              <a:rPr lang="en-US" sz="1400" b="1" dirty="0">
-                <a:solidFill>
-                  <a:srgbClr val="1E2761"/>
-                </a:solidFill>
-                <a:latin typeface="Calibri" pitchFamily="34" charset="0"/>
-                <a:ea typeface="Calibri" pitchFamily="34" charset="-122"/>
-                <a:cs typeface="Calibri" pitchFamily="34" charset="-120"/>
-              </a:rPr>
-              <a:t>Google Apps Script</a:t>
-            </a:r>
-            <a:endParaRPr lang="en-US" sz="1400" dirty="0"/>
-          </a:p>
-        </p:txBody>
-      </p:sp>
-      <p:sp>
-        <p:nvSpPr>
-          <p:cNvPr id="19" name="Text 17"/>
-          <p:cNvSpPr txBox="1"/>
-          <p:nvPr/>
-        </p:nvSpPr>
-        <p:spPr>
-          <a:xfrm>
-            <a:off x="7132320" y="3246120"/>
-            <a:ext cx="4526280" cy="365760"/>
-          </a:xfrm>
-          <a:prstGeom prst="rect">
-            <a:avLst/>
-          </a:prstGeom>
-          <a:noFill/>
-          <a:ln/>
-        </p:spPr>
-        <p:txBody>
-          <a:bodyPr wrap="square" lIns="0" tIns="0" rIns="0" bIns="0" rtlCol="0" anchor="ctr"/>
-          <a:lstStyle/>
-          <a:p>
-            <a:pPr indent="0" marL="0">
-              <a:buNone/>
-            </a:pPr>
-            <a:r>
-              <a:rPr lang="en-US" sz="1050" dirty="0">
-                <a:solidFill>
-                  <a:srgbClr val="6B7280"/>
-                </a:solidFill>
-                <a:latin typeface="Calibri" pitchFamily="34" charset="0"/>
-                <a:ea typeface="Calibri" pitchFamily="34" charset="-122"/>
-                <a:cs typeface="Calibri" pitchFamily="34" charset="-120"/>
-              </a:rPr>
-              <a:t>プロジェクト共有／トリガー実行者の引き継ぎ</a:t>
-            </a:r>
-            <a:endParaRPr lang="en-US" sz="1050" dirty="0"/>
-          </a:p>
-        </p:txBody>
-      </p:sp>
-      <p:sp>
-        <p:nvSpPr>
-          <p:cNvPr id="20" name="Shape 18"/>
-          <p:cNvSpPr/>
-          <p:nvPr/>
-        </p:nvSpPr>
-        <p:spPr>
-          <a:xfrm>
-            <a:off x="548640" y="3886200"/>
-            <a:ext cx="5440680" cy="960120"/>
-          </a:xfrm>
-          <a:prstGeom prst="roundRect">
-            <a:avLst>
-              <a:gd name="adj" fmla="val 8571"/>
-            </a:avLst>
-          </a:prstGeom>
-          <a:solidFill>
-            <a:srgbClr val="F4F7FC"/>
-          </a:solidFill>
-          <a:ln w="12700">
-            <a:solidFill>
-              <a:srgbClr val="D9E1F2"/>
-            </a:solidFill>
-            <a:prstDash val="solid"/>
-          </a:ln>
-          <a:effectLst>
-            <a:outerShdw sx="100000" sy="100000" kx="0" ky="0" algn="bl" rotWithShape="0" blurRad="76200" dist="25400" dir="5400000">
-              <a:srgbClr val="9AA6C0">
-                <a:alpha val="28000"/>
-              </a:srgbClr>
-            </a:outerShdw>
-          </a:effectLst>
-        </p:spPr>
-      </p:sp>
-      <p:sp>
-        <p:nvSpPr>
-          <p:cNvPr id="21" name="Shape 19"/>
-          <p:cNvSpPr/>
-          <p:nvPr/>
-        </p:nvSpPr>
-        <p:spPr>
-          <a:xfrm>
-            <a:off x="777240" y="4187952"/>
-            <a:ext cx="365760" cy="365760"/>
-          </a:xfrm>
-          <a:prstGeom prst="roundRect">
-            <a:avLst>
-              <a:gd name="adj" fmla="val 12500"/>
-            </a:avLst>
-          </a:prstGeom>
-          <a:solidFill>
-            <a:srgbClr val="FFFFFF"/>
-          </a:solidFill>
-          <a:ln w="19050">
-            <a:solidFill>
-              <a:srgbClr val="1E2761"/>
-            </a:solidFill>
-            <a:prstDash val="solid"/>
-          </a:ln>
-        </p:spPr>
-      </p:sp>
-      <p:sp>
-        <p:nvSpPr>
-          <p:cNvPr id="22" name="Text 20"/>
-          <p:cNvSpPr txBox="1"/>
-          <p:nvPr/>
-        </p:nvSpPr>
-        <p:spPr>
-          <a:xfrm>
-            <a:off x="1325880" y="4014216"/>
-            <a:ext cx="4526280" cy="365760"/>
-          </a:xfrm>
-          <a:prstGeom prst="rect">
-            <a:avLst/>
-          </a:prstGeom>
-          <a:noFill/>
-          <a:ln/>
-        </p:spPr>
-        <p:txBody>
-          <a:bodyPr wrap="square" lIns="0" tIns="0" rIns="0" bIns="0" rtlCol="0" anchor="ctr"/>
-          <a:lstStyle/>
-          <a:p>
-            <a:pPr indent="0" marL="0">
-              <a:buNone/>
-            </a:pPr>
-            <a:r>
-              <a:rPr lang="en-US" sz="1400" b="1" dirty="0">
-                <a:solidFill>
-                  <a:srgbClr val="1E2761"/>
-                </a:solidFill>
-                <a:latin typeface="Calibri" pitchFamily="34" charset="0"/>
-                <a:ea typeface="Calibri" pitchFamily="34" charset="-122"/>
-                <a:cs typeface="Calibri" pitchFamily="34" charset="-120"/>
-              </a:rPr>
-              <a:t>Google Chat / OAuth</a:t>
-            </a:r>
-            <a:endParaRPr lang="en-US" sz="1400" dirty="0"/>
-          </a:p>
-        </p:txBody>
-      </p:sp>
-      <p:sp>
-        <p:nvSpPr>
-          <p:cNvPr id="23" name="Text 21"/>
-          <p:cNvSpPr txBox="1"/>
-          <p:nvPr/>
-        </p:nvSpPr>
-        <p:spPr>
-          <a:xfrm>
-            <a:off x="1325880" y="4389120"/>
-            <a:ext cx="4526280" cy="365760"/>
-          </a:xfrm>
-          <a:prstGeom prst="rect">
-            <a:avLst/>
-          </a:prstGeom>
-          <a:noFill/>
-          <a:ln/>
-        </p:spPr>
-        <p:txBody>
-          <a:bodyPr wrap="square" lIns="0" tIns="0" rIns="0" bIns="0" rtlCol="0" anchor="ctr"/>
-          <a:lstStyle/>
-          <a:p>
-            <a:pPr indent="0" marL="0">
-              <a:buNone/>
-            </a:pPr>
-            <a:r>
-              <a:rPr lang="en-US" sz="1050" dirty="0">
-                <a:solidFill>
-                  <a:srgbClr val="6B7280"/>
-                </a:solidFill>
-                <a:latin typeface="Calibri" pitchFamily="34" charset="0"/>
-                <a:ea typeface="Calibri" pitchFamily="34" charset="-122"/>
-                <a:cs typeface="Calibri" pitchFamily="34" charset="-120"/>
-              </a:rPr>
-              <a:t>Webhook・スペース／OAuthクライアント管理権限</a:t>
-            </a:r>
-            <a:endParaRPr lang="en-US" sz="1050" dirty="0"/>
-          </a:p>
-        </p:txBody>
-      </p:sp>
-      <p:sp>
-        <p:nvSpPr>
-          <p:cNvPr id="24" name="Shape 22"/>
-          <p:cNvSpPr/>
-          <p:nvPr/>
-        </p:nvSpPr>
-        <p:spPr>
-          <a:xfrm>
-            <a:off x="6355080" y="3886200"/>
-            <a:ext cx="5440680" cy="960120"/>
-          </a:xfrm>
-          <a:prstGeom prst="roundRect">
-            <a:avLst>
-              <a:gd name="adj" fmla="val 8571"/>
-            </a:avLst>
-          </a:prstGeom>
-          <a:solidFill>
-            <a:srgbClr val="F4F7FC"/>
-          </a:solidFill>
-          <a:ln w="12700">
-            <a:solidFill>
-              <a:srgbClr val="D9E1F2"/>
-            </a:solidFill>
-            <a:prstDash val="solid"/>
-          </a:ln>
-          <a:effectLst>
-            <a:outerShdw sx="100000" sy="100000" kx="0" ky="0" algn="bl" rotWithShape="0" blurRad="76200" dist="25400" dir="5400000">
-              <a:srgbClr val="9AA6C0">
-                <a:alpha val="28000"/>
-              </a:srgbClr>
-            </a:outerShdw>
-          </a:effectLst>
-        </p:spPr>
-      </p:sp>
-      <p:sp>
-        <p:nvSpPr>
-          <p:cNvPr id="25" name="Shape 23"/>
-          <p:cNvSpPr/>
-          <p:nvPr/>
-        </p:nvSpPr>
-        <p:spPr>
-          <a:xfrm>
-            <a:off x="6583680" y="4187952"/>
-            <a:ext cx="365760" cy="365760"/>
-          </a:xfrm>
-          <a:prstGeom prst="roundRect">
-            <a:avLst>
-              <a:gd name="adj" fmla="val 12500"/>
-            </a:avLst>
-          </a:prstGeom>
-          <a:solidFill>
-            <a:srgbClr val="FFFFFF"/>
-          </a:solidFill>
-          <a:ln w="19050">
-            <a:solidFill>
-              <a:srgbClr val="1E2761"/>
-            </a:solidFill>
-            <a:prstDash val="solid"/>
-          </a:ln>
-        </p:spPr>
-      </p:sp>
-      <p:sp>
-        <p:nvSpPr>
-          <p:cNvPr id="26" name="Text 24"/>
-          <p:cNvSpPr txBox="1"/>
-          <p:nvPr/>
-        </p:nvSpPr>
-        <p:spPr>
-          <a:xfrm>
-            <a:off x="7132320" y="4014216"/>
-            <a:ext cx="4526280" cy="365760"/>
-          </a:xfrm>
-          <a:prstGeom prst="rect">
-            <a:avLst/>
-          </a:prstGeom>
-          <a:noFill/>
-          <a:ln/>
-        </p:spPr>
-        <p:txBody>
-          <a:bodyPr wrap="square" lIns="0" tIns="0" rIns="0" bIns="0" rtlCol="0" anchor="ctr"/>
-          <a:lstStyle/>
-          <a:p>
-            <a:pPr indent="0" marL="0">
-              <a:buNone/>
-            </a:pPr>
-            <a:r>
-              <a:rPr lang="en-US" sz="1400" b="1" dirty="0">
-                <a:solidFill>
-                  <a:srgbClr val="1E2761"/>
-                </a:solidFill>
-                <a:latin typeface="Calibri" pitchFamily="34" charset="0"/>
-                <a:ea typeface="Calibri" pitchFamily="34" charset="-122"/>
-                <a:cs typeface="Calibri" pitchFamily="34" charset="-120"/>
-              </a:rPr>
-              <a:t>独自ドメイン</a:t>
-            </a:r>
-            <a:endParaRPr lang="en-US" sz="1400" dirty="0"/>
-          </a:p>
-        </p:txBody>
-      </p:sp>
-      <p:sp>
-        <p:nvSpPr>
-          <p:cNvPr id="27" name="Text 25"/>
-          <p:cNvSpPr txBox="1"/>
-          <p:nvPr/>
-        </p:nvSpPr>
-        <p:spPr>
-          <a:xfrm>
-            <a:off x="7132320" y="4389120"/>
-            <a:ext cx="4526280" cy="365760"/>
-          </a:xfrm>
-          <a:prstGeom prst="rect">
-            <a:avLst/>
-          </a:prstGeom>
-          <a:noFill/>
-          <a:ln/>
-        </p:spPr>
-        <p:txBody>
-          <a:bodyPr wrap="square" lIns="0" tIns="0" rIns="0" bIns="0" rtlCol="0" anchor="ctr"/>
-          <a:lstStyle/>
-          <a:p>
-            <a:pPr indent="0" marL="0">
-              <a:buNone/>
-            </a:pPr>
-            <a:r>
-              <a:rPr lang="en-US" sz="1050" dirty="0">
-                <a:solidFill>
-                  <a:srgbClr val="6B7280"/>
-                </a:solidFill>
-                <a:latin typeface="Calibri" pitchFamily="34" charset="0"/>
-                <a:ea typeface="Calibri" pitchFamily="34" charset="-122"/>
-                <a:cs typeface="Calibri" pitchFamily="34" charset="-120"/>
-              </a:rPr>
-              <a:t>reception-eureka.com のDNS/Vercel設定</a:t>
-            </a:r>
-            <a:endParaRPr lang="en-US" sz="1050" dirty="0"/>
-          </a:p>
-        </p:txBody>
-      </p:sp>
-      <p:sp>
-        <p:nvSpPr>
-          <p:cNvPr id="28" name="Shape 26"/>
-          <p:cNvSpPr/>
-          <p:nvPr/>
-        </p:nvSpPr>
-        <p:spPr>
-          <a:xfrm>
-            <a:off x="548640" y="5029200"/>
-            <a:ext cx="5440680" cy="960120"/>
-          </a:xfrm>
-          <a:prstGeom prst="roundRect">
-            <a:avLst>
-              <a:gd name="adj" fmla="val 8571"/>
-            </a:avLst>
-          </a:prstGeom>
-          <a:solidFill>
-            <a:srgbClr val="F4F7FC"/>
-          </a:solidFill>
-          <a:ln w="12700">
-            <a:solidFill>
-              <a:srgbClr val="D9E1F2"/>
-            </a:solidFill>
-            <a:prstDash val="solid"/>
-          </a:ln>
-          <a:effectLst>
-            <a:outerShdw sx="100000" sy="100000" kx="0" ky="0" algn="bl" rotWithShape="0" blurRad="76200" dist="25400" dir="5400000">
-              <a:srgbClr val="9AA6C0">
-                <a:alpha val="28000"/>
-              </a:srgbClr>
-            </a:outerShdw>
-          </a:effectLst>
-        </p:spPr>
-      </p:sp>
-      <p:sp>
-        <p:nvSpPr>
-          <p:cNvPr id="29" name="Shape 27"/>
-          <p:cNvSpPr/>
-          <p:nvPr/>
-        </p:nvSpPr>
-        <p:spPr>
-          <a:xfrm>
-            <a:off x="777240" y="5330952"/>
-            <a:ext cx="365760" cy="365760"/>
-          </a:xfrm>
-          <a:prstGeom prst="roundRect">
-            <a:avLst>
-              <a:gd name="adj" fmla="val 12500"/>
-            </a:avLst>
-          </a:prstGeom>
-          <a:solidFill>
-            <a:srgbClr val="FFFFFF"/>
-          </a:solidFill>
-          <a:ln w="19050">
-            <a:solidFill>
-              <a:srgbClr val="1E2761"/>
-            </a:solidFill>
-            <a:prstDash val="solid"/>
-          </a:ln>
-        </p:spPr>
-      </p:sp>
-      <p:sp>
-        <p:nvSpPr>
-          <p:cNvPr id="30" name="Text 28"/>
-          <p:cNvSpPr txBox="1"/>
-          <p:nvPr/>
-        </p:nvSpPr>
-        <p:spPr>
-          <a:xfrm>
-            <a:off x="1325880" y="5157216"/>
-            <a:ext cx="4526280" cy="365760"/>
-          </a:xfrm>
-          <a:prstGeom prst="rect">
-            <a:avLst/>
-          </a:prstGeom>
-          <a:noFill/>
-          <a:ln/>
-        </p:spPr>
-        <p:txBody>
-          <a:bodyPr wrap="square" lIns="0" tIns="0" rIns="0" bIns="0" rtlCol="0" anchor="ctr"/>
-          <a:lstStyle/>
-          <a:p>
-            <a:pPr indent="0" marL="0">
-              <a:buNone/>
-            </a:pPr>
-            <a:r>
-              <a:rPr lang="en-US" sz="1400" b="1" dirty="0">
-                <a:solidFill>
-                  <a:srgbClr val="1E2761"/>
-                </a:solidFill>
-                <a:latin typeface="Calibri" pitchFamily="34" charset="0"/>
-                <a:ea typeface="Calibri" pitchFamily="34" charset="-122"/>
-                <a:cs typeface="Calibri" pitchFamily="34" charset="-120"/>
-              </a:rPr>
-              <a:t>Resend / Anthropic</a:t>
-            </a:r>
-            <a:endParaRPr lang="en-US" sz="1400" dirty="0"/>
-          </a:p>
-        </p:txBody>
-      </p:sp>
-      <p:sp>
-        <p:nvSpPr>
-          <p:cNvPr id="31" name="Text 29"/>
-          <p:cNvSpPr txBox="1"/>
-          <p:nvPr/>
-        </p:nvSpPr>
-        <p:spPr>
-          <a:xfrm>
-            <a:off x="1325880" y="5532120"/>
-            <a:ext cx="4526280" cy="365760"/>
-          </a:xfrm>
-          <a:prstGeom prst="rect">
-            <a:avLst/>
-          </a:prstGeom>
-          <a:noFill/>
-          <a:ln/>
-        </p:spPr>
-        <p:txBody>
-          <a:bodyPr wrap="square" lIns="0" tIns="0" rIns="0" bIns="0" rtlCol="0" anchor="ctr"/>
-          <a:lstStyle/>
-          <a:p>
-            <a:pPr indent="0" marL="0">
-              <a:buNone/>
-            </a:pPr>
-            <a:r>
-              <a:rPr lang="en-US" sz="1050" dirty="0">
-                <a:solidFill>
-                  <a:srgbClr val="6B7280"/>
-                </a:solidFill>
-                <a:latin typeface="Calibri" pitchFamily="34" charset="0"/>
-                <a:ea typeface="Calibri" pitchFamily="34" charset="-122"/>
-                <a:cs typeface="Calibri" pitchFamily="34" charset="-120"/>
-              </a:rPr>
-              <a:t>APIキー管理（利用時）</a:t>
-            </a:r>
-            <a:endParaRPr lang="en-US" sz="1050" dirty="0"/>
-          </a:p>
-        </p:txBody>
-      </p:sp>
-      <p:sp>
-        <p:nvSpPr>
-          <p:cNvPr id="32" name="Shape 30"/>
-          <p:cNvSpPr/>
-          <p:nvPr/>
-        </p:nvSpPr>
-        <p:spPr>
-          <a:xfrm>
-            <a:off x="6355080" y="5029200"/>
-            <a:ext cx="5440680" cy="960120"/>
-          </a:xfrm>
-          <a:prstGeom prst="roundRect">
-            <a:avLst>
-              <a:gd name="adj" fmla="val 8571"/>
-            </a:avLst>
-          </a:prstGeom>
-          <a:solidFill>
-            <a:srgbClr val="F4F7FC"/>
-          </a:solidFill>
-          <a:ln w="12700">
-            <a:solidFill>
-              <a:srgbClr val="D9E1F2"/>
-            </a:solidFill>
-            <a:prstDash val="solid"/>
-          </a:ln>
-          <a:effectLst>
-            <a:outerShdw sx="100000" sy="100000" kx="0" ky="0" algn="bl" rotWithShape="0" blurRad="76200" dist="25400" dir="5400000">
-              <a:srgbClr val="9AA6C0">
-                <a:alpha val="28000"/>
-              </a:srgbClr>
-            </a:outerShdw>
-          </a:effectLst>
-        </p:spPr>
-      </p:sp>
-      <p:sp>
-        <p:nvSpPr>
-          <p:cNvPr id="33" name="Shape 31"/>
-          <p:cNvSpPr/>
-          <p:nvPr/>
-        </p:nvSpPr>
-        <p:spPr>
-          <a:xfrm>
-            <a:off x="6583680" y="5330952"/>
-            <a:ext cx="365760" cy="365760"/>
-          </a:xfrm>
-          <a:prstGeom prst="roundRect">
-            <a:avLst>
-              <a:gd name="adj" fmla="val 12500"/>
-            </a:avLst>
-          </a:prstGeom>
-          <a:solidFill>
-            <a:srgbClr val="FFFFFF"/>
-          </a:solidFill>
-          <a:ln w="19050">
-            <a:solidFill>
-              <a:srgbClr val="1E2761"/>
-            </a:solidFill>
-            <a:prstDash val="solid"/>
-          </a:ln>
-        </p:spPr>
-      </p:sp>
-      <p:sp>
-        <p:nvSpPr>
-          <p:cNvPr id="34" name="Text 32"/>
-          <p:cNvSpPr txBox="1"/>
-          <p:nvPr/>
-        </p:nvSpPr>
-        <p:spPr>
-          <a:xfrm>
-            <a:off x="7132320" y="5157216"/>
-            <a:ext cx="4526280" cy="365760"/>
-          </a:xfrm>
-          <a:prstGeom prst="rect">
-            <a:avLst/>
-          </a:prstGeom>
-          <a:noFill/>
-          <a:ln/>
-        </p:spPr>
-        <p:txBody>
-          <a:bodyPr wrap="square" lIns="0" tIns="0" rIns="0" bIns="0" rtlCol="0" anchor="ctr"/>
-          <a:lstStyle/>
-          <a:p>
-            <a:pPr indent="0" marL="0">
-              <a:buNone/>
-            </a:pPr>
-            <a:r>
-              <a:rPr lang="en-US" sz="1400" b="1" dirty="0">
-                <a:solidFill>
-                  <a:srgbClr val="1E2761"/>
-                </a:solidFill>
-                <a:latin typeface="Calibri" pitchFamily="34" charset="0"/>
-                <a:ea typeface="Calibri" pitchFamily="34" charset="-122"/>
-                <a:cs typeface="Calibri" pitchFamily="34" charset="-120"/>
-              </a:rPr>
-              <a:t>本番スキーマ</a:t>
-            </a:r>
-            <a:endParaRPr lang="en-US" sz="1400" dirty="0"/>
-          </a:p>
-        </p:txBody>
-      </p:sp>
-      <p:sp>
-        <p:nvSpPr>
-          <p:cNvPr id="35" name="Text 33"/>
-          <p:cNvSpPr txBox="1"/>
-          <p:nvPr/>
-        </p:nvSpPr>
-        <p:spPr>
-          <a:xfrm>
-            <a:off x="7132320" y="5532120"/>
-            <a:ext cx="4526280" cy="365760"/>
-          </a:xfrm>
-          <a:prstGeom prst="rect">
-            <a:avLst/>
-          </a:prstGeom>
-          <a:noFill/>
-          <a:ln/>
-        </p:spPr>
-        <p:txBody>
-          <a:bodyPr wrap="square" lIns="0" tIns="0" rIns="0" bIns="0" rtlCol="0" anchor="ctr"/>
-          <a:lstStyle/>
-          <a:p>
-            <a:pPr indent="0" marL="0">
-              <a:buNone/>
-            </a:pPr>
-            <a:r>
-              <a:rPr lang="en-US" sz="1050" dirty="0">
-                <a:solidFill>
-                  <a:srgbClr val="6B7280"/>
-                </a:solidFill>
-                <a:latin typeface="Calibri" pitchFamily="34" charset="0"/>
-                <a:ea typeface="Calibri" pitchFamily="34" charset="-122"/>
-                <a:cs typeface="Calibri" pitchFamily="34" charset="-120"/>
-              </a:rPr>
-              <a:t>Supabaseスキーマのダンプを保管（drift対策）</a:t>
-            </a:r>
-            <a:endParaRPr lang="en-US" sz="1050" dirty="0"/>
-          </a:p>
-        </p:txBody>
-      </p:sp>
-      <p:sp>
-        <p:nvSpPr>
-          <p:cNvPr id="36" name="Text 34"/>
-          <p:cNvSpPr txBox="1"/>
-          <p:nvPr/>
-        </p:nvSpPr>
-        <p:spPr>
-          <a:xfrm>
-            <a:off x="11430000" y="6355080"/>
-            <a:ext cx="457200" cy="274320"/>
-          </a:xfrm>
-          <a:prstGeom prst="rect">
-            <a:avLst/>
-          </a:prstGeom>
-          <a:noFill/>
-          <a:ln/>
-        </p:spPr>
-        <p:txBody>
-          <a:bodyPr wrap="square" lIns="0" tIns="0" rIns="0" bIns="0" rtlCol="0" anchor="ctr"/>
-          <a:lstStyle/>
-          <a:p>
-            <a:pPr algn="r" indent="0" marL="0">
-              <a:buNone/>
-            </a:pPr>
-            <a:r>
-              <a:rPr lang="en-US" sz="1000" dirty="0">
-                <a:solidFill>
-                  <a:srgbClr val="6B7280"/>
-                </a:solidFill>
-                <a:latin typeface="Calibri" pitchFamily="34" charset="0"/>
-                <a:ea typeface="Calibri" pitchFamily="34" charset="-122"/>
-                <a:cs typeface="Calibri" pitchFamily="34" charset="-120"/>
-              </a:rPr>
-              <a:t>10</a:t>
-            </a:r>
-            <a:endParaRPr lang="en-US" sz="1000" dirty="0"/>
-          </a:p>
-        </p:txBody>
-      </p:sp>
-      <p:sp>
-        <p:nvSpPr>
-          <p:cNvPr id="37" name="Text 35"/>
-          <p:cNvSpPr txBox="1"/>
-          <p:nvPr/>
-        </p:nvSpPr>
-        <p:spPr>
-          <a:xfrm>
-            <a:off x="548640" y="6355080"/>
+            <a:off x="548640" y="6382512"/>
             <a:ext cx="5486400" cy="274320"/>
           </a:xfrm>
           <a:prstGeom prst="rect">
@@ -3547,7 +2891,7 @@
         </p:nvSpPr>
         <p:spPr>
           <a:xfrm>
-            <a:off x="548640" y="640080"/>
+            <a:off x="548640" y="658368"/>
             <a:ext cx="11064240" cy="640080"/>
           </a:xfrm>
           <a:prstGeom prst="rect">
@@ -3572,7 +2916,7 @@
                 <a:ea typeface="Cambria" pitchFamily="34" charset="-122"/>
                 <a:cs typeface="Cambria" pitchFamily="34" charset="-120"/>
               </a:rPr>
-              <a:t>ドキュメント一覧（docs/）</a:t>
+              <a:t>ドキュメント（docs/）</a:t>
             </a:r>
             <a:endParaRPr lang="en-US" sz="3000" dirty="0"/>
           </a:p>
@@ -3586,8 +2930,8 @@
         </p:nvSpPr>
         <p:spPr>
           <a:xfrm>
-            <a:off x="548640" y="1463040"/>
-            <a:ext cx="10972800" cy="365760"/>
+            <a:off x="548640" y="1444752"/>
+            <a:ext cx="10972800" cy="320040"/>
           </a:xfrm>
           <a:prstGeom prst="rect">
             <a:avLst/>
@@ -3611,7 +2955,7 @@
                 <a:ea typeface="Calibri" pitchFamily="34" charset="-122"/>
                 <a:cs typeface="Calibri" pitchFamily="34" charset="-120"/>
               </a:rPr>
-              <a:t>成果物・経緯・保守情報はコードと同じGitで一元管理（docs/README.md が入口）。</a:t>
+              <a:t>正本は docs/ に集約（Git管理）。入口は docs/README.md。</a:t>
             </a:r>
             <a:endParaRPr lang="en-US" sz="1400" dirty="0"/>
           </a:p>
@@ -3625,12 +2969,12 @@
         </p:nvSpPr>
         <p:spPr>
           <a:xfrm>
-            <a:off x="548640" y="2011680"/>
-            <a:ext cx="5440680" cy="914400"/>
+            <a:off x="548640" y="1965960"/>
+            <a:ext cx="5440680" cy="896112"/>
           </a:xfrm>
           <a:prstGeom prst="roundRect">
             <a:avLst>
-              <a:gd name="adj" fmla="val 9000"/>
+              <a:gd name="adj" fmla="val 9184"/>
             </a:avLst>
           </a:prstGeom>
           <a:solidFill>
@@ -3659,8 +3003,8 @@
         </p:nvSpPr>
         <p:spPr>
           <a:xfrm>
-            <a:off x="804672" y="2139696"/>
-            <a:ext cx="4983480" cy="365760"/>
+            <a:off x="804672" y="2093976"/>
+            <a:ext cx="5029200" cy="365760"/>
           </a:xfrm>
           <a:prstGeom prst="rect">
             <a:avLst/>
@@ -3698,8 +3042,8 @@
         </p:nvSpPr>
         <p:spPr>
           <a:xfrm>
-            <a:off x="804672" y="2496312"/>
-            <a:ext cx="4983480" cy="365760"/>
+            <a:off x="804672" y="2441448"/>
+            <a:ext cx="5029200" cy="320040"/>
           </a:xfrm>
           <a:prstGeom prst="rect">
             <a:avLst/>
@@ -3723,7 +3067,7 @@
                 <a:ea typeface="Calibri" pitchFamily="34" charset="-122"/>
                 <a:cs typeface="Calibri" pitchFamily="34" charset="-120"/>
               </a:rPr>
-              <a:t>ドキュメント索引（目次ページ）</a:t>
+              <a:t>索引（目次）</a:t>
             </a:r>
             <a:endParaRPr lang="en-US" sz="1100" dirty="0"/>
           </a:p>
@@ -3737,12 +3081,12 @@
         </p:nvSpPr>
         <p:spPr>
           <a:xfrm>
-            <a:off x="6355080" y="2011680"/>
-            <a:ext cx="5440680" cy="914400"/>
+            <a:off x="6355080" y="1965960"/>
+            <a:ext cx="5440680" cy="896112"/>
           </a:xfrm>
           <a:prstGeom prst="roundRect">
             <a:avLst>
-              <a:gd name="adj" fmla="val 9000"/>
+              <a:gd name="adj" fmla="val 9184"/>
             </a:avLst>
           </a:prstGeom>
           <a:solidFill>
@@ -3771,8 +3115,8 @@
         </p:nvSpPr>
         <p:spPr>
           <a:xfrm>
-            <a:off x="6611112" y="2139696"/>
-            <a:ext cx="4983480" cy="365760"/>
+            <a:off x="6611112" y="2093976"/>
+            <a:ext cx="5029200" cy="365760"/>
           </a:xfrm>
           <a:prstGeom prst="rect">
             <a:avLst/>
@@ -3810,8 +3154,8 @@
         </p:nvSpPr>
         <p:spPr>
           <a:xfrm>
-            <a:off x="6611112" y="2496312"/>
-            <a:ext cx="4983480" cy="365760"/>
+            <a:off x="6611112" y="2441448"/>
+            <a:ext cx="5029200" cy="320040"/>
           </a:xfrm>
           <a:prstGeom prst="rect">
             <a:avLst/>
@@ -3835,7 +3179,7 @@
                 <a:ea typeface="Calibri" pitchFamily="34" charset="-122"/>
                 <a:cs typeface="Calibri" pitchFamily="34" charset="-120"/>
               </a:rPr>
-              <a:t>保守引き継ぎ資料（構成・ランブック・移管）</a:t>
+              <a:t>保守引き継ぎ・ランブック</a:t>
             </a:r>
             <a:endParaRPr lang="en-US" sz="1100" dirty="0"/>
           </a:p>
@@ -3849,12 +3193,12 @@
         </p:nvSpPr>
         <p:spPr>
           <a:xfrm>
-            <a:off x="548640" y="3090672"/>
-            <a:ext cx="5440680" cy="914400"/>
+            <a:off x="548640" y="2971800"/>
+            <a:ext cx="5440680" cy="896112"/>
           </a:xfrm>
           <a:prstGeom prst="roundRect">
             <a:avLst>
-              <a:gd name="adj" fmla="val 9000"/>
+              <a:gd name="adj" fmla="val 9184"/>
             </a:avLst>
           </a:prstGeom>
           <a:solidFill>
@@ -3883,8 +3227,8 @@
         </p:nvSpPr>
         <p:spPr>
           <a:xfrm>
-            <a:off x="804672" y="3218688"/>
-            <a:ext cx="4983480" cy="365760"/>
+            <a:off x="804672" y="3099816"/>
+            <a:ext cx="5029200" cy="365760"/>
           </a:xfrm>
           <a:prstGeom prst="rect">
             <a:avLst/>
@@ -3922,8 +3266,8 @@
         </p:nvSpPr>
         <p:spPr>
           <a:xfrm>
-            <a:off x="804672" y="3575304"/>
-            <a:ext cx="4983480" cy="365760"/>
+            <a:off x="804672" y="3447288"/>
+            <a:ext cx="5029200" cy="320040"/>
           </a:xfrm>
           <a:prstGeom prst="rect">
             <a:avLst/>
@@ -3947,7 +3291,7 @@
                 <a:ea typeface="Calibri" pitchFamily="34" charset="-122"/>
                 <a:cs typeface="Calibri" pitchFamily="34" charset="-120"/>
               </a:rPr>
-              <a:t>経緯・意思決定記録（なぜ今こうか）</a:t>
+              <a:t>経緯・意思決定</a:t>
             </a:r>
             <a:endParaRPr lang="en-US" sz="1100" dirty="0"/>
           </a:p>
@@ -3961,12 +3305,12 @@
         </p:nvSpPr>
         <p:spPr>
           <a:xfrm>
-            <a:off x="6355080" y="3090672"/>
-            <a:ext cx="5440680" cy="914400"/>
+            <a:off x="6355080" y="2971800"/>
+            <a:ext cx="5440680" cy="896112"/>
           </a:xfrm>
           <a:prstGeom prst="roundRect">
             <a:avLst>
-              <a:gd name="adj" fmla="val 9000"/>
+              <a:gd name="adj" fmla="val 9184"/>
             </a:avLst>
           </a:prstGeom>
           <a:solidFill>
@@ -3995,8 +3339,8 @@
         </p:nvSpPr>
         <p:spPr>
           <a:xfrm>
-            <a:off x="6611112" y="3218688"/>
-            <a:ext cx="4983480" cy="365760"/>
+            <a:off x="6611112" y="3099816"/>
+            <a:ext cx="5029200" cy="365760"/>
           </a:xfrm>
           <a:prstGeom prst="rect">
             <a:avLst/>
@@ -4020,7 +3364,7 @@
                 <a:ea typeface="Courier New" pitchFamily="34" charset="-122"/>
                 <a:cs typeface="Courier New" pitchFamily="34" charset="-120"/>
               </a:rPr>
-              <a:t>acceptance-test.md ＋ 比較表.xlsx</a:t>
+              <a:t>acceptance-test.md</a:t>
             </a:r>
             <a:endParaRPr lang="en-US" sz="1200" dirty="0"/>
           </a:p>
@@ -4034,8 +3378,8 @@
         </p:nvSpPr>
         <p:spPr>
           <a:xfrm>
-            <a:off x="6611112" y="3575304"/>
-            <a:ext cx="4983480" cy="365760"/>
+            <a:off x="6611112" y="3447288"/>
+            <a:ext cx="5029200" cy="320040"/>
           </a:xfrm>
           <a:prstGeom prst="rect">
             <a:avLst/>
@@ -4059,7 +3403,7 @@
                 <a:ea typeface="Calibri" pitchFamily="34" charset="-122"/>
                 <a:cs typeface="Calibri" pitchFamily="34" charset="-120"/>
               </a:rPr>
-              <a:t>受け入れテスト結果・原本</a:t>
+              <a:t>受け入れテスト結果</a:t>
             </a:r>
             <a:endParaRPr lang="en-US" sz="1100" dirty="0"/>
           </a:p>
@@ -4073,12 +3417,12 @@
         </p:nvSpPr>
         <p:spPr>
           <a:xfrm>
-            <a:off x="548640" y="4169664"/>
-            <a:ext cx="5440680" cy="914400"/>
+            <a:off x="548640" y="3977640"/>
+            <a:ext cx="5440680" cy="896112"/>
           </a:xfrm>
           <a:prstGeom prst="roundRect">
             <a:avLst>
-              <a:gd name="adj" fmla="val 9000"/>
+              <a:gd name="adj" fmla="val 9184"/>
             </a:avLst>
           </a:prstGeom>
           <a:solidFill>
@@ -4107,8 +3451,8 @@
         </p:nvSpPr>
         <p:spPr>
           <a:xfrm>
-            <a:off x="804672" y="4297680"/>
-            <a:ext cx="4983480" cy="365760"/>
+            <a:off x="804672" y="4105656"/>
+            <a:ext cx="5029200" cy="365760"/>
           </a:xfrm>
           <a:prstGeom prst="rect">
             <a:avLst/>
@@ -4132,7 +3476,7 @@
                 <a:ea typeface="Courier New" pitchFamily="34" charset="-122"/>
                 <a:cs typeface="Courier New" pitchFamily="34" charset="-120"/>
               </a:rPr>
-              <a:t>changelog.md</a:t>
+              <a:t>ai-agent-maintenance.md</a:t>
             </a:r>
             <a:endParaRPr lang="en-US" sz="1200" dirty="0"/>
           </a:p>
@@ -4146,8 +3490,8 @@
         </p:nvSpPr>
         <p:spPr>
           <a:xfrm>
-            <a:off x="804672" y="4654296"/>
-            <a:ext cx="4983480" cy="365760"/>
+            <a:off x="804672" y="4453128"/>
+            <a:ext cx="5029200" cy="320040"/>
           </a:xfrm>
           <a:prstGeom prst="rect">
             <a:avLst/>
@@ -4171,7 +3515,7 @@
                 <a:ea typeface="Calibri" pitchFamily="34" charset="-122"/>
                 <a:cs typeface="Calibri" pitchFamily="34" charset="-120"/>
               </a:rPr>
-              <a:t>リリースノート（v1.5.0）</a:t>
+              <a:t>AIエージェント保守手順</a:t>
             </a:r>
             <a:endParaRPr lang="en-US" sz="1100" dirty="0"/>
           </a:p>
@@ -4185,12 +3529,12 @@
         </p:nvSpPr>
         <p:spPr>
           <a:xfrm>
-            <a:off x="6355080" y="4169664"/>
-            <a:ext cx="5440680" cy="914400"/>
+            <a:off x="6355080" y="3977640"/>
+            <a:ext cx="5440680" cy="896112"/>
           </a:xfrm>
           <a:prstGeom prst="roundRect">
             <a:avLst>
-              <a:gd name="adj" fmla="val 9000"/>
+              <a:gd name="adj" fmla="val 9184"/>
             </a:avLst>
           </a:prstGeom>
           <a:solidFill>
@@ -4219,8 +3563,8 @@
         </p:nvSpPr>
         <p:spPr>
           <a:xfrm>
-            <a:off x="6611112" y="4297680"/>
-            <a:ext cx="4983480" cy="365760"/>
+            <a:off x="6611112" y="4105656"/>
+            <a:ext cx="5029200" cy="365760"/>
           </a:xfrm>
           <a:prstGeom prst="rect">
             <a:avLst/>
@@ -4244,7 +3588,7 @@
                 <a:ea typeface="Courier New" pitchFamily="34" charset="-122"/>
                 <a:cs typeface="Courier New" pitchFamily="34" charset="-120"/>
               </a:rPr>
-              <a:t>startup-guide-*.md</a:t>
+              <a:t>changelog.md</a:t>
             </a:r>
             <a:endParaRPr lang="en-US" sz="1200" dirty="0"/>
           </a:p>
@@ -4258,8 +3602,8 @@
         </p:nvSpPr>
         <p:spPr>
           <a:xfrm>
-            <a:off x="6611112" y="4654296"/>
-            <a:ext cx="4983480" cy="365760"/>
+            <a:off x="6611112" y="4453128"/>
+            <a:ext cx="5029200" cy="320040"/>
           </a:xfrm>
           <a:prstGeom prst="rect">
             <a:avLst/>
@@ -4283,7 +3627,7 @@
                 <a:ea typeface="Calibri" pitchFamily="34" charset="-122"/>
                 <a:cs typeface="Calibri" pitchFamily="34" charset="-120"/>
               </a:rPr>
-              <a:t>導入・カレンダー連携セットアップ</a:t>
+              <a:t>リリースノート</a:t>
             </a:r>
             <a:endParaRPr lang="en-US" sz="1100" dirty="0"/>
           </a:p>
@@ -4297,12 +3641,12 @@
         </p:nvSpPr>
         <p:spPr>
           <a:xfrm>
-            <a:off x="548640" y="5248656"/>
-            <a:ext cx="5440680" cy="914400"/>
+            <a:off x="548640" y="4983480"/>
+            <a:ext cx="5440680" cy="896112"/>
           </a:xfrm>
           <a:prstGeom prst="roundRect">
             <a:avLst>
-              <a:gd name="adj" fmla="val 9000"/>
+              <a:gd name="adj" fmla="val 9184"/>
             </a:avLst>
           </a:prstGeom>
           <a:solidFill>
@@ -4331,8 +3675,8 @@
         </p:nvSpPr>
         <p:spPr>
           <a:xfrm>
-            <a:off x="804672" y="5376672"/>
-            <a:ext cx="4983480" cy="365760"/>
+            <a:off x="804672" y="5111496"/>
+            <a:ext cx="5029200" cy="365760"/>
           </a:xfrm>
           <a:prstGeom prst="rect">
             <a:avLst/>
@@ -4356,7 +3700,7 @@
                 <a:ea typeface="Courier New" pitchFamily="34" charset="-122"/>
                 <a:cs typeface="Courier New" pitchFamily="34" charset="-120"/>
               </a:rPr>
-              <a:t>requirements.md / user-scenarios.md</a:t>
+              <a:t>startup-guide-*.md</a:t>
             </a:r>
             <a:endParaRPr lang="en-US" sz="1200" dirty="0"/>
           </a:p>
@@ -4370,8 +3714,8 @@
         </p:nvSpPr>
         <p:spPr>
           <a:xfrm>
-            <a:off x="804672" y="5733288"/>
-            <a:ext cx="4983480" cy="365760"/>
+            <a:off x="804672" y="5458968"/>
+            <a:ext cx="5029200" cy="320040"/>
           </a:xfrm>
           <a:prstGeom prst="rect">
             <a:avLst/>
@@ -4395,7 +3739,7 @@
                 <a:ea typeface="Calibri" pitchFamily="34" charset="-122"/>
                 <a:cs typeface="Calibri" pitchFamily="34" charset="-120"/>
               </a:rPr>
-              <a:t>要件・利用シナリオ</a:t>
+              <a:t>導入・連携セットアップ</a:t>
             </a:r>
             <a:endParaRPr lang="en-US" sz="1100" dirty="0"/>
           </a:p>
@@ -4409,12 +3753,12 @@
         </p:nvSpPr>
         <p:spPr>
           <a:xfrm>
-            <a:off x="6355080" y="5248656"/>
-            <a:ext cx="5440680" cy="914400"/>
+            <a:off x="6355080" y="4983480"/>
+            <a:ext cx="5440680" cy="896112"/>
           </a:xfrm>
           <a:prstGeom prst="roundRect">
             <a:avLst>
-              <a:gd name="adj" fmla="val 9000"/>
+              <a:gd name="adj" fmla="val 9184"/>
             </a:avLst>
           </a:prstGeom>
           <a:solidFill>
@@ -4443,8 +3787,8 @@
         </p:nvSpPr>
         <p:spPr>
           <a:xfrm>
-            <a:off x="6611112" y="5376672"/>
-            <a:ext cx="4983480" cy="365760"/>
+            <a:off x="6611112" y="5111496"/>
+            <a:ext cx="5029200" cy="365760"/>
           </a:xfrm>
           <a:prstGeom prst="rect">
             <a:avLst/>
@@ -4482,8 +3826,8 @@
         </p:nvSpPr>
         <p:spPr>
           <a:xfrm>
-            <a:off x="6611112" y="5733288"/>
-            <a:ext cx="4983480" cy="365760"/>
+            <a:off x="6611112" y="5458968"/>
+            <a:ext cx="5029200" cy="320040"/>
           </a:xfrm>
           <a:prstGeom prst="rect">
             <a:avLst/>
@@ -4507,7 +3851,7 @@
                 <a:ea typeface="Calibri" pitchFamily="34" charset="-122"/>
                 <a:cs typeface="Calibri" pitchFamily="34" charset="-120"/>
               </a:rPr>
-              <a:t>ヘルプ・Q&amp;A・Tips</a:t>
+              <a:t>ヘルプ・Q&amp;A</a:t>
             </a:r>
             <a:endParaRPr lang="en-US" sz="1100" dirty="0"/>
           </a:p>
@@ -4521,7 +3865,7 @@
         </p:nvSpPr>
         <p:spPr>
           <a:xfrm>
-            <a:off x="11430000" y="6355080"/>
+            <a:off x="11430000" y="6382512"/>
             <a:ext cx="457200" cy="274320"/>
           </a:xfrm>
           <a:prstGeom prst="rect">
@@ -4560,7 +3904,7 @@
         </p:nvSpPr>
         <p:spPr>
           <a:xfrm>
-            <a:off x="548640" y="6355080"/>
+            <a:off x="548640" y="6382512"/>
             <a:ext cx="5486400" cy="274320"/>
           </a:xfrm>
           <a:prstGeom prst="rect">
@@ -4729,8 +4073,8 @@
         </p:nvSpPr>
         <p:spPr>
           <a:xfrm>
-            <a:off x="868680" y="2286000"/>
-            <a:ext cx="548640" cy="548640"/>
+            <a:off x="868680" y="2240280"/>
+            <a:ext cx="502920" cy="502920"/>
           </a:xfrm>
           <a:prstGeom prst="ellipse">
             <a:avLst/>
@@ -4749,8 +4093,8 @@
         </p:nvSpPr>
         <p:spPr>
           <a:xfrm>
-            <a:off x="868680" y="2286000"/>
-            <a:ext cx="548640" cy="548640"/>
+            <a:off x="868680" y="2240280"/>
+            <a:ext cx="502920" cy="502920"/>
           </a:xfrm>
           <a:prstGeom prst="rect">
             <a:avLst/>
@@ -4788,8 +4132,8 @@
         </p:nvSpPr>
         <p:spPr>
           <a:xfrm>
-            <a:off x="1645920" y="2286000"/>
-            <a:ext cx="9692640" cy="548640"/>
+            <a:off x="1600200" y="2240280"/>
+            <a:ext cx="9784080" cy="502920"/>
           </a:xfrm>
           <a:prstGeom prst="rect">
             <a:avLst/>
@@ -4813,7 +4157,7 @@
                 <a:ea typeface="Calibri" pitchFamily="34" charset="-122"/>
                 <a:cs typeface="Calibri" pitchFamily="34" charset="-120"/>
               </a:rPr>
-              <a:t>独自ドメインのPOSTは405 … GASは *.vercel.app 直URLを使う</a:t>
+              <a:t>ドメインのPOSTは405 → GASは直URL</a:t>
             </a:r>
             <a:endParaRPr lang="en-US" sz="1550" dirty="0"/>
           </a:p>
@@ -4827,8 +4171,8 @@
         </p:nvSpPr>
         <p:spPr>
           <a:xfrm>
-            <a:off x="868680" y="3154680"/>
-            <a:ext cx="548640" cy="548640"/>
+            <a:off x="868680" y="3063240"/>
+            <a:ext cx="502920" cy="502920"/>
           </a:xfrm>
           <a:prstGeom prst="ellipse">
             <a:avLst/>
@@ -4847,8 +4191,8 @@
         </p:nvSpPr>
         <p:spPr>
           <a:xfrm>
-            <a:off x="868680" y="3154680"/>
-            <a:ext cx="548640" cy="548640"/>
+            <a:off x="868680" y="3063240"/>
+            <a:ext cx="502920" cy="502920"/>
           </a:xfrm>
           <a:prstGeom prst="rect">
             <a:avLst/>
@@ -4886,8 +4230,8 @@
         </p:nvSpPr>
         <p:spPr>
           <a:xfrm>
-            <a:off x="1645920" y="3154680"/>
-            <a:ext cx="9692640" cy="548640"/>
+            <a:off x="1600200" y="3063240"/>
+            <a:ext cx="9784080" cy="502920"/>
           </a:xfrm>
           <a:prstGeom prst="rect">
             <a:avLst/>
@@ -4911,7 +4255,7 @@
                 <a:ea typeface="Calibri" pitchFamily="34" charset="-122"/>
                 <a:cs typeface="Calibri" pitchFamily="34" charset="-120"/>
               </a:rPr>
-              <a:t>会議室同期は1名のアカウント依存 … 保守担当で再設定できるように</a:t>
+              <a:t>会議室同期は1名アカウント依存 → 再設定可に</a:t>
             </a:r>
             <a:endParaRPr lang="en-US" sz="1550" dirty="0"/>
           </a:p>
@@ -4925,8 +4269,8 @@
         </p:nvSpPr>
         <p:spPr>
           <a:xfrm>
-            <a:off x="868680" y="4023360"/>
-            <a:ext cx="548640" cy="548640"/>
+            <a:off x="868680" y="3886200"/>
+            <a:ext cx="502920" cy="502920"/>
           </a:xfrm>
           <a:prstGeom prst="ellipse">
             <a:avLst/>
@@ -4945,8 +4289,8 @@
         </p:nvSpPr>
         <p:spPr>
           <a:xfrm>
-            <a:off x="868680" y="4023360"/>
-            <a:ext cx="548640" cy="548640"/>
+            <a:off x="868680" y="3886200"/>
+            <a:ext cx="502920" cy="502920"/>
           </a:xfrm>
           <a:prstGeom prst="rect">
             <a:avLst/>
@@ -4984,8 +4328,8 @@
         </p:nvSpPr>
         <p:spPr>
           <a:xfrm>
-            <a:off x="1645920" y="4023360"/>
-            <a:ext cx="9692640" cy="548640"/>
+            <a:off x="1600200" y="3886200"/>
+            <a:ext cx="9784080" cy="502920"/>
           </a:xfrm>
           <a:prstGeom prst="rect">
             <a:avLst/>
@@ -5009,7 +4353,7 @@
                 <a:ea typeface="Calibri" pitchFamily="34" charset="-122"/>
                 <a:cs typeface="Calibri" pitchFamily="34" charset="-120"/>
               </a:rPr>
-              <a:t>スキーマは本番Supabaseが正 … 再構築は本番ダンプから（migration不足）</a:t>
+              <a:t>スキーマは本番が正 → 再構築は本番ダンプ</a:t>
             </a:r>
             <a:endParaRPr lang="en-US" sz="1550" dirty="0"/>
           </a:p>
@@ -5017,29 +4361,124 @@
       </p:sp>
       <p:sp>
         <p:nvSpPr>
-          <p:cNvPr id="14" name="Text 12"/>
-          <p:cNvSpPr txBox="1"/>
-          <p:nvPr/>
-        </p:nvSpPr>
-        <p:spPr>
-          <a:xfrm>
-            <a:off x="868680" y="5349240"/>
-            <a:ext cx="10424160" cy="731520"/>
-          </a:xfrm>
-          <a:prstGeom prst="rect">
-            <a:avLst/>
-          </a:prstGeom>
-          <a:noFill/>
-          <a:ln/>
-        </p:spPr>
-        <p:txBody>
-          <a:bodyPr wrap="square" lIns="0" tIns="0" rIns="0" bIns="0" rtlCol="0" anchor="ctr"/>
-          <a:lstStyle/>
-          <a:p>
-            <a:pPr indent="0" marL="0">
-              <a:lnSpc>
-                <a:spcPct val="125000"/>
-              </a:lnSpc>
+          <p:cNvPr id="14" name="Shape 12"/>
+          <p:cNvSpPr/>
+          <p:nvPr/>
+        </p:nvSpPr>
+        <p:spPr>
+          <a:xfrm>
+            <a:off x="868680" y="4709160"/>
+            <a:ext cx="502920" cy="502920"/>
+          </a:xfrm>
+          <a:prstGeom prst="ellipse">
+            <a:avLst/>
+          </a:prstGeom>
+          <a:solidFill>
+            <a:srgbClr val="1C7293"/>
+          </a:solidFill>
+          <a:ln/>
+        </p:spPr>
+      </p:sp>
+      <p:sp>
+        <p:nvSpPr>
+          <p:cNvPr id="15" name="Text 13"/>
+          <p:cNvSpPr txBox="1"/>
+          <p:nvPr/>
+        </p:nvSpPr>
+        <p:spPr>
+          <a:xfrm>
+            <a:off x="868680" y="4709160"/>
+            <a:ext cx="502920" cy="502920"/>
+          </a:xfrm>
+          <a:prstGeom prst="rect">
+            <a:avLst/>
+          </a:prstGeom>
+          <a:noFill/>
+          <a:ln/>
+        </p:spPr>
+        <p:txBody>
+          <a:bodyPr wrap="square" lIns="0" tIns="0" rIns="0" bIns="0" rtlCol="0" anchor="ctr"/>
+          <a:lstStyle/>
+          <a:p>
+            <a:pPr algn="ctr" indent="0" marL="0">
+              <a:buNone/>
+            </a:pPr>
+            <a:r>
+              <a:rPr lang="en-US" sz="1400" b="1" dirty="0">
+                <a:solidFill>
+                  <a:srgbClr val="FFFFFF"/>
+                </a:solidFill>
+                <a:latin typeface="Calibri" pitchFamily="34" charset="0"/>
+                <a:ea typeface="Calibri" pitchFamily="34" charset="-122"/>
+                <a:cs typeface="Calibri" pitchFamily="34" charset="-120"/>
+              </a:rPr>
+              <a:t>4</a:t>
+            </a:r>
+            <a:endParaRPr lang="en-US" sz="1400" dirty="0"/>
+          </a:p>
+        </p:txBody>
+      </p:sp>
+      <p:sp>
+        <p:nvSpPr>
+          <p:cNvPr id="16" name="Text 14"/>
+          <p:cNvSpPr txBox="1"/>
+          <p:nvPr/>
+        </p:nvSpPr>
+        <p:spPr>
+          <a:xfrm>
+            <a:off x="1600200" y="4709160"/>
+            <a:ext cx="9784080" cy="502920"/>
+          </a:xfrm>
+          <a:prstGeom prst="rect">
+            <a:avLst/>
+          </a:prstGeom>
+          <a:noFill/>
+          <a:ln/>
+        </p:spPr>
+        <p:txBody>
+          <a:bodyPr wrap="square" lIns="0" tIns="0" rIns="0" bIns="0" rtlCol="0" anchor="ctr"/>
+          <a:lstStyle/>
+          <a:p>
+            <a:pPr indent="0" marL="0">
+              <a:buNone/>
+            </a:pPr>
+            <a:r>
+              <a:rPr lang="en-US" sz="1550" dirty="0">
+                <a:solidFill>
+                  <a:srgbClr val="FFFFFF"/>
+                </a:solidFill>
+                <a:latin typeface="Calibri" pitchFamily="34" charset="0"/>
+                <a:ea typeface="Calibri" pitchFamily="34" charset="-122"/>
+                <a:cs typeface="Calibri" pitchFamily="34" charset="-120"/>
+              </a:rPr>
+              <a:t>AI保守は docs/ を読ませてPR運用</a:t>
+            </a:r>
+            <a:endParaRPr lang="en-US" sz="1550" dirty="0"/>
+          </a:p>
+        </p:txBody>
+      </p:sp>
+      <p:sp>
+        <p:nvSpPr>
+          <p:cNvPr id="17" name="Text 15"/>
+          <p:cNvSpPr txBox="1"/>
+          <p:nvPr/>
+        </p:nvSpPr>
+        <p:spPr>
+          <a:xfrm>
+            <a:off x="868680" y="5623560"/>
+            <a:ext cx="10424160" cy="457200"/>
+          </a:xfrm>
+          <a:prstGeom prst="rect">
+            <a:avLst/>
+          </a:prstGeom>
+          <a:noFill/>
+          <a:ln/>
+        </p:spPr>
+        <p:txBody>
+          <a:bodyPr wrap="square" lIns="0" tIns="0" rIns="0" bIns="0" rtlCol="0" anchor="ctr"/>
+          <a:lstStyle/>
+          <a:p>
+            <a:pPr indent="0" marL="0">
               <a:buNone/>
             </a:pPr>
             <a:r>
@@ -5051,7 +4490,7 @@
                 <a:ea typeface="Calibri" pitchFamily="34" charset="-122"/>
                 <a:cs typeface="Calibri" pitchFamily="34" charset="-120"/>
               </a:rPr>
-              <a:t>まず docs/README.md → maintenance-handover.md（障害対応ランブック）を参照。ご不明点はこの引き継ぎ会でお気軽に。</a:t>
+              <a:t>まず docs/README.md → maintenance-handover.md を参照。ご不明点はこの場で。</a:t>
             </a:r>
             <a:endParaRPr lang="en-US" sz="1300" dirty="0"/>
           </a:p>
@@ -5059,13 +4498,13 @@
       </p:sp>
       <p:sp>
         <p:nvSpPr>
-          <p:cNvPr id="15" name="Text 13"/>
-          <p:cNvSpPr txBox="1"/>
-          <p:nvPr/>
-        </p:nvSpPr>
-        <p:spPr>
-          <a:xfrm>
-            <a:off x="11430000" y="6355080"/>
+          <p:cNvPr id="18" name="Text 16"/>
+          <p:cNvSpPr txBox="1"/>
+          <p:nvPr/>
+        </p:nvSpPr>
+        <p:spPr>
+          <a:xfrm>
+            <a:off x="11430000" y="6382512"/>
             <a:ext cx="457200" cy="274320"/>
           </a:xfrm>
           <a:prstGeom prst="rect">
@@ -5098,13 +4537,13 @@
       </p:sp>
       <p:sp>
         <p:nvSpPr>
-          <p:cNvPr id="16" name="Text 14"/>
-          <p:cNvSpPr txBox="1"/>
-          <p:nvPr/>
-        </p:nvSpPr>
-        <p:spPr>
-          <a:xfrm>
-            <a:off x="548640" y="6355080"/>
+          <p:cNvPr id="19" name="Text 17"/>
+          <p:cNvSpPr txBox="1"/>
+          <p:nvPr/>
+        </p:nvSpPr>
+        <p:spPr>
+          <a:xfrm>
+            <a:off x="548640" y="6382512"/>
             <a:ext cx="5486400" cy="274320"/>
           </a:xfrm>
           <a:prstGeom prst="rect">
@@ -5214,7 +4653,7 @@
         </p:nvSpPr>
         <p:spPr>
           <a:xfrm>
-            <a:off x="548640" y="640080"/>
+            <a:off x="548640" y="658368"/>
             <a:ext cx="11064240" cy="640080"/>
           </a:xfrm>
           <a:prstGeom prst="rect">
@@ -5253,12 +4692,12 @@
         </p:nvSpPr>
         <p:spPr>
           <a:xfrm>
-            <a:off x="548640" y="1554480"/>
-            <a:ext cx="5394960" cy="960120"/>
+            <a:off x="548640" y="1600200"/>
+            <a:ext cx="5394960" cy="914400"/>
           </a:xfrm>
           <a:prstGeom prst="roundRect">
             <a:avLst>
-              <a:gd name="adj" fmla="val 8571"/>
+              <a:gd name="adj" fmla="val 9000"/>
             </a:avLst>
           </a:prstGeom>
           <a:solidFill>
@@ -5287,7 +4726,7 @@
         </p:nvSpPr>
         <p:spPr>
           <a:xfrm>
-            <a:off x="804672" y="1810512"/>
+            <a:off x="804672" y="1828800"/>
             <a:ext cx="457200" cy="457200"/>
           </a:xfrm>
           <a:prstGeom prst="ellipse">
@@ -5307,7 +4746,7 @@
         </p:nvSpPr>
         <p:spPr>
           <a:xfrm>
-            <a:off x="804672" y="1810512"/>
+            <a:off x="804672" y="1828800"/>
             <a:ext cx="457200" cy="457200"/>
           </a:xfrm>
           <a:prstGeom prst="rect">
@@ -5346,8 +4785,8 @@
         </p:nvSpPr>
         <p:spPr>
           <a:xfrm>
-            <a:off x="1463040" y="1554480"/>
-            <a:ext cx="4297680" cy="960120"/>
+            <a:off x="1463040" y="1600200"/>
+            <a:ext cx="4297680" cy="914400"/>
           </a:xfrm>
           <a:prstGeom prst="rect">
             <a:avLst/>
@@ -5385,12 +4824,12 @@
         </p:nvSpPr>
         <p:spPr>
           <a:xfrm>
-            <a:off x="6309360" y="1554480"/>
-            <a:ext cx="5394960" cy="960120"/>
+            <a:off x="6309360" y="1600200"/>
+            <a:ext cx="5394960" cy="914400"/>
           </a:xfrm>
           <a:prstGeom prst="roundRect">
             <a:avLst>
-              <a:gd name="adj" fmla="val 8571"/>
+              <a:gd name="adj" fmla="val 9000"/>
             </a:avLst>
           </a:prstGeom>
           <a:solidFill>
@@ -5419,7 +4858,7 @@
         </p:nvSpPr>
         <p:spPr>
           <a:xfrm>
-            <a:off x="6565392" y="1810512"/>
+            <a:off x="6565392" y="1828800"/>
             <a:ext cx="457200" cy="457200"/>
           </a:xfrm>
           <a:prstGeom prst="ellipse">
@@ -5439,7 +4878,7 @@
         </p:nvSpPr>
         <p:spPr>
           <a:xfrm>
-            <a:off x="6565392" y="1810512"/>
+            <a:off x="6565392" y="1828800"/>
             <a:ext cx="457200" cy="457200"/>
           </a:xfrm>
           <a:prstGeom prst="rect">
@@ -5478,8 +4917,8 @@
         </p:nvSpPr>
         <p:spPr>
           <a:xfrm>
-            <a:off x="7223760" y="1554480"/>
-            <a:ext cx="4297680" cy="960120"/>
+            <a:off x="7223760" y="1600200"/>
+            <a:ext cx="4297680" cy="914400"/>
           </a:xfrm>
           <a:prstGeom prst="rect">
             <a:avLst/>
@@ -5503,7 +4942,7 @@
                 <a:ea typeface="Calibri" pitchFamily="34" charset="-122"/>
                 <a:cs typeface="Calibri" pitchFamily="34" charset="-120"/>
               </a:rPr>
-              <a:t>全体構成（アーキテクチャ）</a:t>
+              <a:t>全体構成</a:t>
             </a:r>
             <a:endParaRPr lang="en-US" sz="1600" dirty="0"/>
           </a:p>
@@ -5517,12 +4956,12 @@
         </p:nvSpPr>
         <p:spPr>
           <a:xfrm>
-            <a:off x="548640" y="2743200"/>
-            <a:ext cx="5394960" cy="960120"/>
+            <a:off x="548640" y="2651760"/>
+            <a:ext cx="5394960" cy="914400"/>
           </a:xfrm>
           <a:prstGeom prst="roundRect">
             <a:avLst>
-              <a:gd name="adj" fmla="val 8571"/>
+              <a:gd name="adj" fmla="val 9000"/>
             </a:avLst>
           </a:prstGeom>
           <a:solidFill>
@@ -5551,7 +4990,7 @@
         </p:nvSpPr>
         <p:spPr>
           <a:xfrm>
-            <a:off x="804672" y="2999232"/>
+            <a:off x="804672" y="2880360"/>
             <a:ext cx="457200" cy="457200"/>
           </a:xfrm>
           <a:prstGeom prst="ellipse">
@@ -5571,7 +5010,7 @@
         </p:nvSpPr>
         <p:spPr>
           <a:xfrm>
-            <a:off x="804672" y="2999232"/>
+            <a:off x="804672" y="2880360"/>
             <a:ext cx="457200" cy="457200"/>
           </a:xfrm>
           <a:prstGeom prst="rect">
@@ -5610,8 +5049,8 @@
         </p:nvSpPr>
         <p:spPr>
           <a:xfrm>
-            <a:off x="1463040" y="2743200"/>
-            <a:ext cx="4297680" cy="960120"/>
+            <a:off x="1463040" y="2651760"/>
+            <a:ext cx="4297680" cy="914400"/>
           </a:xfrm>
           <a:prstGeom prst="rect">
             <a:avLst/>
@@ -5649,12 +5088,12 @@
         </p:nvSpPr>
         <p:spPr>
           <a:xfrm>
-            <a:off x="6309360" y="2743200"/>
-            <a:ext cx="5394960" cy="960120"/>
+            <a:off x="6309360" y="2651760"/>
+            <a:ext cx="5394960" cy="914400"/>
           </a:xfrm>
           <a:prstGeom prst="roundRect">
             <a:avLst>
-              <a:gd name="adj" fmla="val 8571"/>
+              <a:gd name="adj" fmla="val 9000"/>
             </a:avLst>
           </a:prstGeom>
           <a:solidFill>
@@ -5683,7 +5122,7 @@
         </p:nvSpPr>
         <p:spPr>
           <a:xfrm>
-            <a:off x="6565392" y="2999232"/>
+            <a:off x="6565392" y="2880360"/>
             <a:ext cx="457200" cy="457200"/>
           </a:xfrm>
           <a:prstGeom prst="ellipse">
@@ -5703,7 +5142,7 @@
         </p:nvSpPr>
         <p:spPr>
           <a:xfrm>
-            <a:off x="6565392" y="2999232"/>
+            <a:off x="6565392" y="2880360"/>
             <a:ext cx="457200" cy="457200"/>
           </a:xfrm>
           <a:prstGeom prst="rect">
@@ -5742,8 +5181,8 @@
         </p:nvSpPr>
         <p:spPr>
           <a:xfrm>
-            <a:off x="7223760" y="2743200"/>
-            <a:ext cx="4297680" cy="960120"/>
+            <a:off x="7223760" y="2651760"/>
+            <a:ext cx="4297680" cy="914400"/>
           </a:xfrm>
           <a:prstGeom prst="rect">
             <a:avLst/>
@@ -5767,7 +5206,7 @@
                 <a:ea typeface="Calibri" pitchFamily="34" charset="-122"/>
                 <a:cs typeface="Calibri" pitchFamily="34" charset="-120"/>
               </a:rPr>
-              <a:t>データベース（＋drift注意）</a:t>
+              <a:t>データベース（＋drift）</a:t>
             </a:r>
             <a:endParaRPr lang="en-US" sz="1600" dirty="0"/>
           </a:p>
@@ -5781,12 +5220,12 @@
         </p:nvSpPr>
         <p:spPr>
           <a:xfrm>
-            <a:off x="548640" y="3931920"/>
-            <a:ext cx="5394960" cy="960120"/>
+            <a:off x="548640" y="3703320"/>
+            <a:ext cx="5394960" cy="914400"/>
           </a:xfrm>
           <a:prstGeom prst="roundRect">
             <a:avLst>
-              <a:gd name="adj" fmla="val 8571"/>
+              <a:gd name="adj" fmla="val 9000"/>
             </a:avLst>
           </a:prstGeom>
           <a:solidFill>
@@ -5815,7 +5254,7 @@
         </p:nvSpPr>
         <p:spPr>
           <a:xfrm>
-            <a:off x="804672" y="4187952"/>
+            <a:off x="804672" y="3931920"/>
             <a:ext cx="457200" cy="457200"/>
           </a:xfrm>
           <a:prstGeom prst="ellipse">
@@ -5835,7 +5274,7 @@
         </p:nvSpPr>
         <p:spPr>
           <a:xfrm>
-            <a:off x="804672" y="4187952"/>
+            <a:off x="804672" y="3931920"/>
             <a:ext cx="457200" cy="457200"/>
           </a:xfrm>
           <a:prstGeom prst="rect">
@@ -5874,8 +5313,8 @@
         </p:nvSpPr>
         <p:spPr>
           <a:xfrm>
-            <a:off x="1463040" y="3931920"/>
-            <a:ext cx="4297680" cy="960120"/>
+            <a:off x="1463040" y="3703320"/>
+            <a:ext cx="4297680" cy="914400"/>
           </a:xfrm>
           <a:prstGeom prst="rect">
             <a:avLst/>
@@ -5913,12 +5352,12 @@
         </p:nvSpPr>
         <p:spPr>
           <a:xfrm>
-            <a:off x="6309360" y="3931920"/>
-            <a:ext cx="5394960" cy="960120"/>
+            <a:off x="6309360" y="3703320"/>
+            <a:ext cx="5394960" cy="914400"/>
           </a:xfrm>
           <a:prstGeom prst="roundRect">
             <a:avLst>
-              <a:gd name="adj" fmla="val 8571"/>
+              <a:gd name="adj" fmla="val 9000"/>
             </a:avLst>
           </a:prstGeom>
           <a:solidFill>
@@ -5947,7 +5386,7 @@
         </p:nvSpPr>
         <p:spPr>
           <a:xfrm>
-            <a:off x="6565392" y="4187952"/>
+            <a:off x="6565392" y="3931920"/>
             <a:ext cx="457200" cy="457200"/>
           </a:xfrm>
           <a:prstGeom prst="ellipse">
@@ -5967,7 +5406,7 @@
         </p:nvSpPr>
         <p:spPr>
           <a:xfrm>
-            <a:off x="6565392" y="4187952"/>
+            <a:off x="6565392" y="3931920"/>
             <a:ext cx="457200" cy="457200"/>
           </a:xfrm>
           <a:prstGeom prst="rect">
@@ -6006,8 +5445,8 @@
         </p:nvSpPr>
         <p:spPr>
           <a:xfrm>
-            <a:off x="7223760" y="3931920"/>
-            <a:ext cx="4297680" cy="960120"/>
+            <a:off x="7223760" y="3703320"/>
+            <a:ext cx="4297680" cy="914400"/>
           </a:xfrm>
           <a:prstGeom prst="rect">
             <a:avLst/>
@@ -6045,12 +5484,12 @@
         </p:nvSpPr>
         <p:spPr>
           <a:xfrm>
-            <a:off x="548640" y="5120640"/>
-            <a:ext cx="5394960" cy="960120"/>
+            <a:off x="548640" y="4754880"/>
+            <a:ext cx="5394960" cy="914400"/>
           </a:xfrm>
           <a:prstGeom prst="roundRect">
             <a:avLst>
-              <a:gd name="adj" fmla="val 8571"/>
+              <a:gd name="adj" fmla="val 9000"/>
             </a:avLst>
           </a:prstGeom>
           <a:solidFill>
@@ -6079,7 +5518,7 @@
         </p:nvSpPr>
         <p:spPr>
           <a:xfrm>
-            <a:off x="804672" y="5376672"/>
+            <a:off x="804672" y="4983480"/>
             <a:ext cx="457200" cy="457200"/>
           </a:xfrm>
           <a:prstGeom prst="ellipse">
@@ -6099,7 +5538,7 @@
         </p:nvSpPr>
         <p:spPr>
           <a:xfrm>
-            <a:off x="804672" y="5376672"/>
+            <a:off x="804672" y="4983480"/>
             <a:ext cx="457200" cy="457200"/>
           </a:xfrm>
           <a:prstGeom prst="rect">
@@ -6138,8 +5577,8 @@
         </p:nvSpPr>
         <p:spPr>
           <a:xfrm>
-            <a:off x="1463040" y="5120640"/>
-            <a:ext cx="4297680" cy="960120"/>
+            <a:off x="1463040" y="4754880"/>
+            <a:ext cx="4297680" cy="914400"/>
           </a:xfrm>
           <a:prstGeom prst="rect">
             <a:avLst/>
@@ -6177,12 +5616,12 @@
         </p:nvSpPr>
         <p:spPr>
           <a:xfrm>
-            <a:off x="6309360" y="5120640"/>
-            <a:ext cx="5394960" cy="960120"/>
+            <a:off x="6309360" y="4754880"/>
+            <a:ext cx="5394960" cy="914400"/>
           </a:xfrm>
           <a:prstGeom prst="roundRect">
             <a:avLst>
-              <a:gd name="adj" fmla="val 8571"/>
+              <a:gd name="adj" fmla="val 9000"/>
             </a:avLst>
           </a:prstGeom>
           <a:solidFill>
@@ -6211,7 +5650,7 @@
         </p:nvSpPr>
         <p:spPr>
           <a:xfrm>
-            <a:off x="6565392" y="5376672"/>
+            <a:off x="6565392" y="4983480"/>
             <a:ext cx="457200" cy="457200"/>
           </a:xfrm>
           <a:prstGeom prst="ellipse">
@@ -6231,7 +5670,7 @@
         </p:nvSpPr>
         <p:spPr>
           <a:xfrm>
-            <a:off x="6565392" y="5376672"/>
+            <a:off x="6565392" y="4983480"/>
             <a:ext cx="457200" cy="457200"/>
           </a:xfrm>
           <a:prstGeom prst="rect">
@@ -6270,8 +5709,8 @@
         </p:nvSpPr>
         <p:spPr>
           <a:xfrm>
-            <a:off x="7223760" y="5120640"/>
-            <a:ext cx="4297680" cy="960120"/>
+            <a:off x="7223760" y="4754880"/>
+            <a:ext cx="4297680" cy="914400"/>
           </a:xfrm>
           <a:prstGeom prst="rect">
             <a:avLst/>
@@ -6295,7 +5734,7 @@
                 <a:ea typeface="Calibri" pitchFamily="34" charset="-122"/>
                 <a:cs typeface="Calibri" pitchFamily="34" charset="-120"/>
               </a:rPr>
-              <a:t>引き継ぎチェックリスト</a:t>
+              <a:t>引き継ぎ・AI保守</a:t>
             </a:r>
             <a:endParaRPr lang="en-US" sz="1600" dirty="0"/>
           </a:p>
@@ -6309,7 +5748,7 @@
         </p:nvSpPr>
         <p:spPr>
           <a:xfrm>
-            <a:off x="11430000" y="6355080"/>
+            <a:off x="11430000" y="6382512"/>
             <a:ext cx="457200" cy="274320"/>
           </a:xfrm>
           <a:prstGeom prst="rect">
@@ -6348,7 +5787,7 @@
         </p:nvSpPr>
         <p:spPr>
           <a:xfrm>
-            <a:off x="548640" y="6355080"/>
+            <a:off x="548640" y="6382512"/>
             <a:ext cx="5486400" cy="274320"/>
           </a:xfrm>
           <a:prstGeom prst="rect">
@@ -6458,7 +5897,7 @@
         </p:nvSpPr>
         <p:spPr>
           <a:xfrm>
-            <a:off x="548640" y="640080"/>
+            <a:off x="548640" y="658368"/>
             <a:ext cx="11064240" cy="640080"/>
           </a:xfrm>
           <a:prstGeom prst="rect">
@@ -6497,8 +5936,8 @@
         </p:nvSpPr>
         <p:spPr>
           <a:xfrm>
-            <a:off x="548640" y="1508760"/>
-            <a:ext cx="6583680" cy="822960"/>
+            <a:off x="548640" y="1481328"/>
+            <a:ext cx="6492240" cy="822960"/>
           </a:xfrm>
           <a:prstGeom prst="rect">
             <a:avLst/>
@@ -6525,7 +5964,7 @@
                 <a:ea typeface="Calibri" pitchFamily="34" charset="-122"/>
                 <a:cs typeface="Calibri" pitchFamily="34" charset="-120"/>
               </a:rPr>
-              <a:t>ラクネコ（受付SaaS）の代替として内製した受付管理システム。</a:t>
+              <a:t>ラクネコ（受付SaaS）の代替として内製。</a:t>
             </a:r>
             <a:pPr indent="0" marL="0">
               <a:lnSpc>
@@ -6556,12 +5995,124 @@
         </p:nvSpPr>
         <p:spPr>
           <a:xfrm>
-            <a:off x="548640" y="2468880"/>
-            <a:ext cx="3566160" cy="1600200"/>
+            <a:off x="7406640" y="1371600"/>
+            <a:ext cx="4206240" cy="914400"/>
           </a:xfrm>
           <a:prstGeom prst="roundRect">
             <a:avLst>
-              <a:gd name="adj" fmla="val 5143"/>
+              <a:gd name="adj" fmla="val 9000"/>
+            </a:avLst>
+          </a:prstGeom>
+          <a:solidFill>
+            <a:srgbClr val="1E2761"/>
+          </a:solidFill>
+          <a:ln w="12700">
+            <a:solidFill>
+              <a:srgbClr val="D9E1F2"/>
+            </a:solidFill>
+            <a:prstDash val="solid"/>
+          </a:ln>
+          <a:effectLst>
+            <a:outerShdw sx="100000" sy="100000" kx="0" ky="0" algn="bl" rotWithShape="0" blurRad="76200" dist="25400" dir="5400000">
+              <a:srgbClr val="9AA6C0">
+                <a:alpha val="28000"/>
+              </a:srgbClr>
+            </a:outerShdw>
+          </a:effectLst>
+        </p:spPr>
+      </p:sp>
+      <p:sp>
+        <p:nvSpPr>
+          <p:cNvPr id="6" name="Text 4"/>
+          <p:cNvSpPr txBox="1"/>
+          <p:nvPr/>
+        </p:nvSpPr>
+        <p:spPr>
+          <a:xfrm>
+            <a:off x="7635240" y="1481328"/>
+            <a:ext cx="3657600" cy="274320"/>
+          </a:xfrm>
+          <a:prstGeom prst="rect">
+            <a:avLst/>
+          </a:prstGeom>
+          <a:noFill/>
+          <a:ln/>
+        </p:spPr>
+        <p:txBody>
+          <a:bodyPr wrap="square" lIns="0" tIns="0" rIns="0" bIns="0" rtlCol="0" anchor="ctr"/>
+          <a:lstStyle/>
+          <a:p>
+            <a:pPr indent="0" marL="0">
+              <a:buNone/>
+            </a:pPr>
+            <a:r>
+              <a:rPr lang="en-US" sz="1100" b="1" dirty="0">
+                <a:solidFill>
+                  <a:srgbClr val="CADCFC"/>
+                </a:solidFill>
+                <a:latin typeface="Calibri" pitchFamily="34" charset="0"/>
+                <a:ea typeface="Calibri" pitchFamily="34" charset="-122"/>
+                <a:cs typeface="Calibri" pitchFamily="34" charset="-120"/>
+              </a:rPr>
+              <a:t>本番URL</a:t>
+            </a:r>
+            <a:endParaRPr lang="en-US" sz="1100" dirty="0"/>
+          </a:p>
+        </p:txBody>
+      </p:sp>
+      <p:sp>
+        <p:nvSpPr>
+          <p:cNvPr id="7" name="Text 5"/>
+          <p:cNvSpPr txBox="1"/>
+          <p:nvPr/>
+        </p:nvSpPr>
+        <p:spPr>
+          <a:xfrm>
+            <a:off x="7635240" y="1737360"/>
+            <a:ext cx="3840480" cy="457200"/>
+          </a:xfrm>
+          <a:prstGeom prst="rect">
+            <a:avLst/>
+          </a:prstGeom>
+          <a:noFill/>
+          <a:ln/>
+        </p:spPr>
+        <p:txBody>
+          <a:bodyPr wrap="square" lIns="0" tIns="0" rIns="0" bIns="0" rtlCol="0" anchor="ctr"/>
+          <a:lstStyle/>
+          <a:p>
+            <a:pPr indent="0" marL="0">
+              <a:buNone/>
+            </a:pPr>
+            <a:r>
+              <a:rPr lang="en-US" sz="1800" b="1" dirty="0">
+                <a:solidFill>
+                  <a:srgbClr val="FFFFFF"/>
+                </a:solidFill>
+                <a:latin typeface="Calibri" pitchFamily="34" charset="0"/>
+                <a:ea typeface="Calibri" pitchFamily="34" charset="-122"/>
+                <a:cs typeface="Calibri" pitchFamily="34" charset="-120"/>
+              </a:rPr>
+              <a:t>reception-eureka.com</a:t>
+            </a:r>
+            <a:endParaRPr lang="en-US" sz="1800" dirty="0"/>
+          </a:p>
+        </p:txBody>
+      </p:sp>
+      <p:sp>
+        <p:nvSpPr>
+          <p:cNvPr id="8" name="Shape 6"/>
+          <p:cNvSpPr/>
+          <p:nvPr/>
+        </p:nvSpPr>
+        <p:spPr>
+          <a:xfrm>
+            <a:off x="548640" y="2468880"/>
+            <a:ext cx="3520440" cy="1508760"/>
+          </a:xfrm>
+          <a:prstGeom prst="roundRect">
+            <a:avLst>
+              <a:gd name="adj" fmla="val 5455"/>
             </a:avLst>
           </a:prstGeom>
           <a:solidFill>
@@ -6584,14 +6135,14 @@
       </p:sp>
       <p:sp>
         <p:nvSpPr>
-          <p:cNvPr id="6" name="Text 4"/>
-          <p:cNvSpPr txBox="1"/>
-          <p:nvPr/>
-        </p:nvSpPr>
-        <p:spPr>
-          <a:xfrm>
-            <a:off x="777240" y="2651760"/>
-            <a:ext cx="3108960" cy="365760"/>
+          <p:cNvPr id="9" name="Text 7"/>
+          <p:cNvSpPr txBox="1"/>
+          <p:nvPr/>
+        </p:nvSpPr>
+        <p:spPr>
+          <a:xfrm>
+            <a:off x="777240" y="2670048"/>
+            <a:ext cx="3063240" cy="365760"/>
           </a:xfrm>
           <a:prstGeom prst="rect">
             <a:avLst/>
@@ -6623,14 +6174,14 @@
       </p:sp>
       <p:sp>
         <p:nvSpPr>
-          <p:cNvPr id="7" name="Text 5"/>
-          <p:cNvSpPr txBox="1"/>
-          <p:nvPr/>
-        </p:nvSpPr>
-        <p:spPr>
-          <a:xfrm>
-            <a:off x="777240" y="3090672"/>
-            <a:ext cx="3108960" cy="822960"/>
+          <p:cNvPr id="10" name="Text 8"/>
+          <p:cNvSpPr txBox="1"/>
+          <p:nvPr/>
+        </p:nvSpPr>
+        <p:spPr>
+          <a:xfrm>
+            <a:off x="777240" y="3127248"/>
+            <a:ext cx="3063240" cy="685800"/>
           </a:xfrm>
           <a:prstGeom prst="rect">
             <a:avLst/>
@@ -6644,7 +6195,7 @@
           <a:p>
             <a:pPr indent="0" marL="0">
               <a:lnSpc>
-                <a:spcPct val="120000"/>
+                <a:spcPct val="115000"/>
               </a:lnSpc>
               <a:buNone/>
             </a:pPr>
@@ -6657,7 +6208,7 @@
                 <a:ea typeface="Calibri" pitchFamily="34" charset="-122"/>
                 <a:cs typeface="Calibri" pitchFamily="34" charset="-120"/>
               </a:rPr>
-              <a:t>QR・名刺・音声・キーボードで受付</a:t>
+              <a:t>QR・名刺・音声・キーボード</a:t>
             </a:r>
             <a:endParaRPr lang="en-US" sz="1200" dirty="0"/>
           </a:p>
@@ -6665,18 +6216,18 @@
       </p:sp>
       <p:sp>
         <p:nvSpPr>
-          <p:cNvPr id="8" name="Shape 6"/>
+          <p:cNvPr id="11" name="Shape 9"/>
           <p:cNvSpPr/>
           <p:nvPr/>
         </p:nvSpPr>
         <p:spPr>
           <a:xfrm>
-            <a:off x="4343400" y="2468880"/>
-            <a:ext cx="3566160" cy="1600200"/>
+            <a:off x="4251960" y="2468880"/>
+            <a:ext cx="3520440" cy="1508760"/>
           </a:xfrm>
           <a:prstGeom prst="roundRect">
             <a:avLst>
-              <a:gd name="adj" fmla="val 5143"/>
+              <a:gd name="adj" fmla="val 5455"/>
             </a:avLst>
           </a:prstGeom>
           <a:solidFill>
@@ -6699,14 +6250,14 @@
       </p:sp>
       <p:sp>
         <p:nvSpPr>
-          <p:cNvPr id="9" name="Text 7"/>
-          <p:cNvSpPr txBox="1"/>
-          <p:nvPr/>
-        </p:nvSpPr>
-        <p:spPr>
-          <a:xfrm>
-            <a:off x="4572000" y="2651760"/>
-            <a:ext cx="3108960" cy="365760"/>
+          <p:cNvPr id="12" name="Text 10"/>
+          <p:cNvSpPr txBox="1"/>
+          <p:nvPr/>
+        </p:nvSpPr>
+        <p:spPr>
+          <a:xfrm>
+            <a:off x="4480560" y="2670048"/>
+            <a:ext cx="3063240" cy="365760"/>
           </a:xfrm>
           <a:prstGeom prst="rect">
             <a:avLst/>
@@ -6738,14 +6289,14 @@
       </p:sp>
       <p:sp>
         <p:nvSpPr>
-          <p:cNvPr id="10" name="Text 8"/>
-          <p:cNvSpPr txBox="1"/>
-          <p:nvPr/>
-        </p:nvSpPr>
-        <p:spPr>
-          <a:xfrm>
-            <a:off x="4572000" y="3090672"/>
-            <a:ext cx="3108960" cy="822960"/>
+          <p:cNvPr id="13" name="Text 11"/>
+          <p:cNvSpPr txBox="1"/>
+          <p:nvPr/>
+        </p:nvSpPr>
+        <p:spPr>
+          <a:xfrm>
+            <a:off x="4480560" y="3127248"/>
+            <a:ext cx="3063240" cy="685800"/>
           </a:xfrm>
           <a:prstGeom prst="rect">
             <a:avLst/>
@@ -6759,7 +6310,7 @@
           <a:p>
             <a:pPr indent="0" marL="0">
               <a:lnSpc>
-                <a:spcPct val="120000"/>
+                <a:spcPct val="115000"/>
               </a:lnSpc>
               <a:buNone/>
             </a:pPr>
@@ -6772,7 +6323,7 @@
                 <a:ea typeface="Calibri" pitchFamily="34" charset="-122"/>
                 <a:cs typeface="Calibri" pitchFamily="34" charset="-120"/>
               </a:rPr>
-              <a:t>来訪をGoogle Chatへ即通知／対応・依頼</a:t>
+              <a:t>来訪を即通知／対応・依頼</a:t>
             </a:r>
             <a:endParaRPr lang="en-US" sz="1200" dirty="0"/>
           </a:p>
@@ -6780,18 +6331,18 @@
       </p:sp>
       <p:sp>
         <p:nvSpPr>
-          <p:cNvPr id="11" name="Shape 9"/>
+          <p:cNvPr id="14" name="Shape 12"/>
           <p:cNvSpPr/>
           <p:nvPr/>
         </p:nvSpPr>
         <p:spPr>
           <a:xfrm>
-            <a:off x="8138160" y="2468880"/>
-            <a:ext cx="3566160" cy="1600200"/>
+            <a:off x="7955280" y="2468880"/>
+            <a:ext cx="3520440" cy="1508760"/>
           </a:xfrm>
           <a:prstGeom prst="roundRect">
             <a:avLst>
-              <a:gd name="adj" fmla="val 5143"/>
+              <a:gd name="adj" fmla="val 5455"/>
             </a:avLst>
           </a:prstGeom>
           <a:solidFill>
@@ -6814,14 +6365,14 @@
       </p:sp>
       <p:sp>
         <p:nvSpPr>
-          <p:cNvPr id="12" name="Text 10"/>
-          <p:cNvSpPr txBox="1"/>
-          <p:nvPr/>
-        </p:nvSpPr>
-        <p:spPr>
-          <a:xfrm>
-            <a:off x="8366760" y="2651760"/>
-            <a:ext cx="3108960" cy="365760"/>
+          <p:cNvPr id="15" name="Text 13"/>
+          <p:cNvSpPr txBox="1"/>
+          <p:nvPr/>
+        </p:nvSpPr>
+        <p:spPr>
+          <a:xfrm>
+            <a:off x="8183880" y="2670048"/>
+            <a:ext cx="3063240" cy="365760"/>
           </a:xfrm>
           <a:prstGeom prst="rect">
             <a:avLst/>
@@ -6853,14 +6404,14 @@
       </p:sp>
       <p:sp>
         <p:nvSpPr>
-          <p:cNvPr id="13" name="Text 11"/>
-          <p:cNvSpPr txBox="1"/>
-          <p:nvPr/>
-        </p:nvSpPr>
-        <p:spPr>
-          <a:xfrm>
-            <a:off x="8366760" y="3090672"/>
-            <a:ext cx="3108960" cy="822960"/>
+          <p:cNvPr id="16" name="Text 14"/>
+          <p:cNvSpPr txBox="1"/>
+          <p:nvPr/>
+        </p:nvSpPr>
+        <p:spPr>
+          <a:xfrm>
+            <a:off x="8183880" y="3127248"/>
+            <a:ext cx="3063240" cy="685800"/>
           </a:xfrm>
           <a:prstGeom prst="rect">
             <a:avLst/>
@@ -6874,7 +6425,7 @@
           <a:p>
             <a:pPr indent="0" marL="0">
               <a:lnSpc>
-                <a:spcPct val="120000"/>
+                <a:spcPct val="115000"/>
               </a:lnSpc>
               <a:buNone/>
             </a:pPr>
@@ -6887,7 +6438,7 @@
                 <a:ea typeface="Calibri" pitchFamily="34" charset="-122"/>
                 <a:cs typeface="Calibri" pitchFamily="34" charset="-120"/>
               </a:rPr>
-              <a:t>カレンダー連携で招待状/QRを自動作成</a:t>
+              <a:t>カレンダー連携で自動作成</a:t>
             </a:r>
             <a:endParaRPr lang="en-US" sz="1200" dirty="0"/>
           </a:p>
@@ -6895,18 +6446,18 @@
       </p:sp>
       <p:sp>
         <p:nvSpPr>
-          <p:cNvPr id="14" name="Shape 12"/>
+          <p:cNvPr id="17" name="Shape 15"/>
           <p:cNvSpPr/>
           <p:nvPr/>
         </p:nvSpPr>
         <p:spPr>
           <a:xfrm>
-            <a:off x="548640" y="4297680"/>
-            <a:ext cx="3566160" cy="1600200"/>
+            <a:off x="548640" y="4114800"/>
+            <a:ext cx="3520440" cy="1508760"/>
           </a:xfrm>
           <a:prstGeom prst="roundRect">
             <a:avLst>
-              <a:gd name="adj" fmla="val 5143"/>
+              <a:gd name="adj" fmla="val 5455"/>
             </a:avLst>
           </a:prstGeom>
           <a:solidFill>
@@ -6929,14 +6480,14 @@
       </p:sp>
       <p:sp>
         <p:nvSpPr>
-          <p:cNvPr id="15" name="Text 13"/>
-          <p:cNvSpPr txBox="1"/>
-          <p:nvPr/>
-        </p:nvSpPr>
-        <p:spPr>
-          <a:xfrm>
-            <a:off x="777240" y="4480560"/>
-            <a:ext cx="3108960" cy="365760"/>
+          <p:cNvPr id="18" name="Text 16"/>
+          <p:cNvSpPr txBox="1"/>
+          <p:nvPr/>
+        </p:nvSpPr>
+        <p:spPr>
+          <a:xfrm>
+            <a:off x="777240" y="4315968"/>
+            <a:ext cx="3063240" cy="365760"/>
           </a:xfrm>
           <a:prstGeom prst="rect">
             <a:avLst/>
@@ -6968,14 +6519,14 @@
       </p:sp>
       <p:sp>
         <p:nvSpPr>
-          <p:cNvPr id="16" name="Text 14"/>
-          <p:cNvSpPr txBox="1"/>
-          <p:nvPr/>
-        </p:nvSpPr>
-        <p:spPr>
-          <a:xfrm>
-            <a:off x="777240" y="4919472"/>
-            <a:ext cx="3108960" cy="822960"/>
+          <p:cNvPr id="19" name="Text 17"/>
+          <p:cNvSpPr txBox="1"/>
+          <p:nvPr/>
+        </p:nvSpPr>
+        <p:spPr>
+          <a:xfrm>
+            <a:off x="777240" y="4773168"/>
+            <a:ext cx="3063240" cy="685800"/>
           </a:xfrm>
           <a:prstGeom prst="rect">
             <a:avLst/>
@@ -6989,7 +6540,7 @@
           <a:p>
             <a:pPr indent="0" marL="0">
               <a:lnSpc>
-                <a:spcPct val="120000"/>
+                <a:spcPct val="115000"/>
               </a:lnSpc>
               <a:buNone/>
             </a:pPr>
@@ -7002,7 +6553,7 @@
                 <a:ea typeface="Calibri" pitchFamily="34" charset="-122"/>
                 <a:cs typeface="Calibri" pitchFamily="34" charset="-120"/>
               </a:rPr>
-              <a:t>リソースカレンダーから空き状況を表示</a:t>
+              <a:t>リソースカレンダーから表示</a:t>
             </a:r>
             <a:endParaRPr lang="en-US" sz="1200" dirty="0"/>
           </a:p>
@@ -7010,18 +6561,18 @@
       </p:sp>
       <p:sp>
         <p:nvSpPr>
-          <p:cNvPr id="17" name="Shape 15"/>
+          <p:cNvPr id="20" name="Shape 18"/>
           <p:cNvSpPr/>
           <p:nvPr/>
         </p:nvSpPr>
         <p:spPr>
           <a:xfrm>
-            <a:off x="4343400" y="4297680"/>
-            <a:ext cx="3566160" cy="1600200"/>
+            <a:off x="4251960" y="4114800"/>
+            <a:ext cx="3520440" cy="1508760"/>
           </a:xfrm>
           <a:prstGeom prst="roundRect">
             <a:avLst>
-              <a:gd name="adj" fmla="val 5143"/>
+              <a:gd name="adj" fmla="val 5455"/>
             </a:avLst>
           </a:prstGeom>
           <a:solidFill>
@@ -7044,14 +6595,14 @@
       </p:sp>
       <p:sp>
         <p:nvSpPr>
-          <p:cNvPr id="18" name="Text 16"/>
-          <p:cNvSpPr txBox="1"/>
-          <p:nvPr/>
-        </p:nvSpPr>
-        <p:spPr>
-          <a:xfrm>
-            <a:off x="4572000" y="4480560"/>
-            <a:ext cx="3108960" cy="365760"/>
+          <p:cNvPr id="21" name="Text 19"/>
+          <p:cNvSpPr txBox="1"/>
+          <p:nvPr/>
+        </p:nvSpPr>
+        <p:spPr>
+          <a:xfrm>
+            <a:off x="4480560" y="4315968"/>
+            <a:ext cx="3063240" cy="365760"/>
           </a:xfrm>
           <a:prstGeom prst="rect">
             <a:avLst/>
@@ -7083,14 +6634,14 @@
       </p:sp>
       <p:sp>
         <p:nvSpPr>
-          <p:cNvPr id="19" name="Text 17"/>
-          <p:cNvSpPr txBox="1"/>
-          <p:nvPr/>
-        </p:nvSpPr>
-        <p:spPr>
-          <a:xfrm>
-            <a:off x="4572000" y="4919472"/>
-            <a:ext cx="3108960" cy="822960"/>
+          <p:cNvPr id="22" name="Text 20"/>
+          <p:cNvSpPr txBox="1"/>
+          <p:nvPr/>
+        </p:nvSpPr>
+        <p:spPr>
+          <a:xfrm>
+            <a:off x="4480560" y="4773168"/>
+            <a:ext cx="3063240" cy="685800"/>
           </a:xfrm>
           <a:prstGeom prst="rect">
             <a:avLst/>
@@ -7104,7 +6655,7 @@
           <a:p>
             <a:pPr indent="0" marL="0">
               <a:lnSpc>
-                <a:spcPct val="120000"/>
+                <a:spcPct val="115000"/>
               </a:lnSpc>
               <a:buNone/>
             </a:pPr>
@@ -7117,7 +6668,7 @@
                 <a:ea typeface="Calibri" pitchFamily="34" charset="-122"/>
                 <a:cs typeface="Calibri" pitchFamily="34" charset="-120"/>
               </a:rPr>
-              <a:t>来訪履歴・監査ログ・CSV出力</a:t>
+              <a:t>履歴・監査・CSV出力</a:t>
             </a:r>
             <a:endParaRPr lang="en-US" sz="1200" dirty="0"/>
           </a:p>
@@ -7125,18 +6676,18 @@
       </p:sp>
       <p:sp>
         <p:nvSpPr>
-          <p:cNvPr id="20" name="Shape 18"/>
+          <p:cNvPr id="23" name="Shape 21"/>
           <p:cNvSpPr/>
           <p:nvPr/>
         </p:nvSpPr>
         <p:spPr>
           <a:xfrm>
-            <a:off x="8138160" y="4297680"/>
-            <a:ext cx="3566160" cy="1600200"/>
+            <a:off x="7955280" y="4114800"/>
+            <a:ext cx="3520440" cy="1508760"/>
           </a:xfrm>
           <a:prstGeom prst="roundRect">
             <a:avLst>
-              <a:gd name="adj" fmla="val 5143"/>
+              <a:gd name="adj" fmla="val 5455"/>
             </a:avLst>
           </a:prstGeom>
           <a:solidFill>
@@ -7159,14 +6710,14 @@
       </p:sp>
       <p:sp>
         <p:nvSpPr>
-          <p:cNvPr id="21" name="Text 19"/>
-          <p:cNvSpPr txBox="1"/>
-          <p:nvPr/>
-        </p:nvSpPr>
-        <p:spPr>
-          <a:xfrm>
-            <a:off x="8366760" y="4480560"/>
-            <a:ext cx="3108960" cy="365760"/>
+          <p:cNvPr id="24" name="Text 22"/>
+          <p:cNvSpPr txBox="1"/>
+          <p:nvPr/>
+        </p:nvSpPr>
+        <p:spPr>
+          <a:xfrm>
+            <a:off x="8183880" y="4315968"/>
+            <a:ext cx="3063240" cy="365760"/>
           </a:xfrm>
           <a:prstGeom prst="rect">
             <a:avLst/>
@@ -7198,14 +6749,14 @@
       </p:sp>
       <p:sp>
         <p:nvSpPr>
-          <p:cNvPr id="22" name="Text 20"/>
-          <p:cNvSpPr txBox="1"/>
-          <p:nvPr/>
-        </p:nvSpPr>
-        <p:spPr>
-          <a:xfrm>
-            <a:off x="8366760" y="4919472"/>
-            <a:ext cx="3108960" cy="822960"/>
+          <p:cNvPr id="25" name="Text 23"/>
+          <p:cNvSpPr txBox="1"/>
+          <p:nvPr/>
+        </p:nvSpPr>
+        <p:spPr>
+          <a:xfrm>
+            <a:off x="8183880" y="4773168"/>
+            <a:ext cx="3063240" cy="685800"/>
           </a:xfrm>
           <a:prstGeom prst="rect">
             <a:avLst/>
@@ -7219,7 +6770,7 @@
           <a:p>
             <a:pPr indent="0" marL="0">
               <a:lnSpc>
-                <a:spcPct val="120000"/>
+                <a:spcPct val="115000"/>
               </a:lnSpc>
               <a:buNone/>
             </a:pPr>
@@ -7232,7 +6783,7 @@
                 <a:ea typeface="Calibri" pitchFamily="34" charset="-122"/>
                 <a:cs typeface="Calibri" pitchFamily="34" charset="-120"/>
               </a:rPr>
-              <a:t>来訪状況の可視化（ラクネコに無い機能）</a:t>
+              <a:t>来訪状況を可視化</a:t>
             </a:r>
             <a:endParaRPr lang="en-US" sz="1200" dirty="0"/>
           </a:p>
@@ -7240,125 +6791,13 @@
       </p:sp>
       <p:sp>
         <p:nvSpPr>
-          <p:cNvPr id="23" name="Shape 21"/>
-          <p:cNvSpPr/>
-          <p:nvPr/>
-        </p:nvSpPr>
-        <p:spPr>
-          <a:xfrm>
-            <a:off x="7406640" y="1371600"/>
-            <a:ext cx="4206240" cy="914400"/>
-          </a:xfrm>
-          <a:prstGeom prst="roundRect">
-            <a:avLst>
-              <a:gd name="adj" fmla="val 9000"/>
-            </a:avLst>
-          </a:prstGeom>
-          <a:solidFill>
-            <a:srgbClr val="1E2761"/>
-          </a:solidFill>
-          <a:ln w="12700">
-            <a:solidFill>
-              <a:srgbClr val="D9E1F2"/>
-            </a:solidFill>
-            <a:prstDash val="solid"/>
-          </a:ln>
-          <a:effectLst>
-            <a:outerShdw sx="100000" sy="100000" kx="0" ky="0" algn="bl" rotWithShape="0" blurRad="76200" dist="25400" dir="5400000">
-              <a:srgbClr val="9AA6C0">
-                <a:alpha val="28000"/>
-              </a:srgbClr>
-            </a:outerShdw>
-          </a:effectLst>
-        </p:spPr>
-      </p:sp>
-      <p:sp>
-        <p:nvSpPr>
-          <p:cNvPr id="24" name="Text 22"/>
-          <p:cNvSpPr txBox="1"/>
-          <p:nvPr/>
-        </p:nvSpPr>
-        <p:spPr>
-          <a:xfrm>
-            <a:off x="7635240" y="1481328"/>
-            <a:ext cx="3657600" cy="274320"/>
-          </a:xfrm>
-          <a:prstGeom prst="rect">
-            <a:avLst/>
-          </a:prstGeom>
-          <a:noFill/>
-          <a:ln/>
-        </p:spPr>
-        <p:txBody>
-          <a:bodyPr wrap="square" lIns="0" tIns="0" rIns="0" bIns="0" rtlCol="0" anchor="ctr"/>
-          <a:lstStyle/>
-          <a:p>
-            <a:pPr indent="0" marL="0">
-              <a:buNone/>
-            </a:pPr>
-            <a:r>
-              <a:rPr lang="en-US" sz="1100" b="1" dirty="0">
-                <a:solidFill>
-                  <a:srgbClr val="CADCFC"/>
-                </a:solidFill>
-                <a:latin typeface="Calibri" pitchFamily="34" charset="0"/>
-                <a:ea typeface="Calibri" pitchFamily="34" charset="-122"/>
-                <a:cs typeface="Calibri" pitchFamily="34" charset="-120"/>
-              </a:rPr>
-              <a:t>本番URL</a:t>
-            </a:r>
-            <a:endParaRPr lang="en-US" sz="1100" dirty="0"/>
-          </a:p>
-        </p:txBody>
-      </p:sp>
-      <p:sp>
-        <p:nvSpPr>
-          <p:cNvPr id="25" name="Text 23"/>
-          <p:cNvSpPr txBox="1"/>
-          <p:nvPr/>
-        </p:nvSpPr>
-        <p:spPr>
-          <a:xfrm>
-            <a:off x="7635240" y="1737360"/>
-            <a:ext cx="3840480" cy="457200"/>
-          </a:xfrm>
-          <a:prstGeom prst="rect">
-            <a:avLst/>
-          </a:prstGeom>
-          <a:noFill/>
-          <a:ln/>
-        </p:spPr>
-        <p:txBody>
-          <a:bodyPr wrap="square" lIns="0" tIns="0" rIns="0" bIns="0" rtlCol="0" anchor="ctr"/>
-          <a:lstStyle/>
-          <a:p>
-            <a:pPr indent="0" marL="0">
-              <a:buNone/>
-            </a:pPr>
-            <a:r>
-              <a:rPr lang="en-US" sz="1800" b="1" dirty="0">
-                <a:solidFill>
-                  <a:srgbClr val="FFFFFF"/>
-                </a:solidFill>
-                <a:latin typeface="Calibri" pitchFamily="34" charset="0"/>
-                <a:ea typeface="Calibri" pitchFamily="34" charset="-122"/>
-                <a:cs typeface="Calibri" pitchFamily="34" charset="-120"/>
-              </a:rPr>
-              <a:t>reception-eureka.com</a:t>
-            </a:r>
-            <a:endParaRPr lang="en-US" sz="1800" dirty="0"/>
-          </a:p>
-        </p:txBody>
-      </p:sp>
-      <p:sp>
-        <p:nvSpPr>
           <p:cNvPr id="26" name="Text 24"/>
           <p:cNvSpPr txBox="1"/>
           <p:nvPr/>
         </p:nvSpPr>
         <p:spPr>
           <a:xfrm>
-            <a:off x="11430000" y="6355080"/>
+            <a:off x="11430000" y="6382512"/>
             <a:ext cx="457200" cy="274320"/>
           </a:xfrm>
           <a:prstGeom prst="rect">
@@ -7397,7 +6836,7 @@
         </p:nvSpPr>
         <p:spPr>
           <a:xfrm>
-            <a:off x="548640" y="6355080"/>
+            <a:off x="548640" y="6382512"/>
             <a:ext cx="5486400" cy="274320"/>
           </a:xfrm>
           <a:prstGeom prst="rect">
@@ -7507,7 +6946,7 @@
         </p:nvSpPr>
         <p:spPr>
           <a:xfrm>
-            <a:off x="548640" y="640080"/>
+            <a:off x="548640" y="658368"/>
             <a:ext cx="11064240" cy="640080"/>
           </a:xfrm>
           <a:prstGeom prst="rect">
@@ -7546,12 +6985,12 @@
         </p:nvSpPr>
         <p:spPr>
           <a:xfrm>
-            <a:off x="548640" y="1554480"/>
-            <a:ext cx="3566160" cy="1737360"/>
+            <a:off x="548640" y="1600200"/>
+            <a:ext cx="3520440" cy="1645920"/>
           </a:xfrm>
           <a:prstGeom prst="roundRect">
             <a:avLst>
-              <a:gd name="adj" fmla="val 4737"/>
+              <a:gd name="adj" fmla="val 5000"/>
             </a:avLst>
           </a:prstGeom>
           <a:solidFill>
@@ -7580,7 +7019,7 @@
         </p:nvSpPr>
         <p:spPr>
           <a:xfrm>
-            <a:off x="777240" y="1773936"/>
+            <a:off x="777240" y="1828800"/>
             <a:ext cx="384048" cy="384048"/>
           </a:xfrm>
           <a:prstGeom prst="ellipse">
@@ -7600,8 +7039,8 @@
         </p:nvSpPr>
         <p:spPr>
           <a:xfrm>
-            <a:off x="1325880" y="1755648"/>
-            <a:ext cx="2651760" cy="457200"/>
+            <a:off x="1298448" y="1801368"/>
+            <a:ext cx="2560320" cy="457200"/>
           </a:xfrm>
           <a:prstGeom prst="rect">
             <a:avLst/>
@@ -7639,8 +7078,8 @@
         </p:nvSpPr>
         <p:spPr>
           <a:xfrm>
-            <a:off x="777240" y="2340864"/>
-            <a:ext cx="3108960" cy="365760"/>
+            <a:off x="777240" y="2377440"/>
+            <a:ext cx="3063240" cy="320040"/>
           </a:xfrm>
           <a:prstGeom prst="rect">
             <a:avLst/>
@@ -7678,23 +7117,20 @@
         </p:nvSpPr>
         <p:spPr>
           <a:xfrm>
-            <a:off x="777240" y="2706624"/>
-            <a:ext cx="3108960" cy="502920"/>
-          </a:xfrm>
-          <a:prstGeom prst="rect">
-            <a:avLst/>
-          </a:prstGeom>
-          <a:noFill/>
-          <a:ln/>
-        </p:spPr>
-        <p:txBody>
-          <a:bodyPr wrap="square" lIns="0" tIns="0" rIns="0" bIns="0" rtlCol="0" anchor="ctr"/>
-          <a:lstStyle/>
-          <a:p>
-            <a:pPr indent="0" marL="0">
-              <a:lnSpc>
-                <a:spcPct val="115000"/>
-              </a:lnSpc>
+            <a:off x="777240" y="2715768"/>
+            <a:ext cx="3063240" cy="457200"/>
+          </a:xfrm>
+          <a:prstGeom prst="rect">
+            <a:avLst/>
+          </a:prstGeom>
+          <a:noFill/>
+          <a:ln/>
+        </p:spPr>
+        <p:txBody>
+          <a:bodyPr wrap="square" lIns="0" tIns="0" rIns="0" bIns="0" rtlCol="0" anchor="ctr"/>
+          <a:lstStyle/>
+          <a:p>
+            <a:pPr indent="0" marL="0">
               <a:buNone/>
             </a:pPr>
             <a:r>
@@ -7720,12 +7156,12 @@
         </p:nvSpPr>
         <p:spPr>
           <a:xfrm>
-            <a:off x="4343400" y="1554480"/>
-            <a:ext cx="3566160" cy="1737360"/>
+            <a:off x="4251960" y="1600200"/>
+            <a:ext cx="3520440" cy="1645920"/>
           </a:xfrm>
           <a:prstGeom prst="roundRect">
             <a:avLst>
-              <a:gd name="adj" fmla="val 4737"/>
+              <a:gd name="adj" fmla="val 5000"/>
             </a:avLst>
           </a:prstGeom>
           <a:solidFill>
@@ -7754,7 +7190,7 @@
         </p:nvSpPr>
         <p:spPr>
           <a:xfrm>
-            <a:off x="4572000" y="1773936"/>
+            <a:off x="4480560" y="1828800"/>
             <a:ext cx="384048" cy="384048"/>
           </a:xfrm>
           <a:prstGeom prst="ellipse">
@@ -7774,8 +7210,8 @@
         </p:nvSpPr>
         <p:spPr>
           <a:xfrm>
-            <a:off x="5120640" y="1755648"/>
-            <a:ext cx="2651760" cy="457200"/>
+            <a:off x="5001768" y="1801368"/>
+            <a:ext cx="2560320" cy="457200"/>
           </a:xfrm>
           <a:prstGeom prst="rect">
             <a:avLst/>
@@ -7813,8 +7249,8 @@
         </p:nvSpPr>
         <p:spPr>
           <a:xfrm>
-            <a:off x="4572000" y="2340864"/>
-            <a:ext cx="3108960" cy="365760"/>
+            <a:off x="4480560" y="2377440"/>
+            <a:ext cx="3063240" cy="320040"/>
           </a:xfrm>
           <a:prstGeom prst="rect">
             <a:avLst/>
@@ -7838,7 +7274,7 @@
                 <a:ea typeface="Calibri" pitchFamily="34" charset="-122"/>
                 <a:cs typeface="Calibri" pitchFamily="34" charset="-120"/>
               </a:rPr>
-              <a:t>Vercel Serverless Functions</a:t>
+              <a:t>Serverless Functions</a:t>
             </a:r>
             <a:endParaRPr lang="en-US" sz="1250" dirty="0"/>
           </a:p>
@@ -7852,23 +7288,20 @@
         </p:nvSpPr>
         <p:spPr>
           <a:xfrm>
-            <a:off x="4572000" y="2706624"/>
-            <a:ext cx="3108960" cy="502920"/>
-          </a:xfrm>
-          <a:prstGeom prst="rect">
-            <a:avLst/>
-          </a:prstGeom>
-          <a:noFill/>
-          <a:ln/>
-        </p:spPr>
-        <p:txBody>
-          <a:bodyPr wrap="square" lIns="0" tIns="0" rIns="0" bIns="0" rtlCol="0" anchor="ctr"/>
-          <a:lstStyle/>
-          <a:p>
-            <a:pPr indent="0" marL="0">
-              <a:lnSpc>
-                <a:spcPct val="115000"/>
-              </a:lnSpc>
+            <a:off x="4480560" y="2715768"/>
+            <a:ext cx="3063240" cy="457200"/>
+          </a:xfrm>
+          <a:prstGeom prst="rect">
+            <a:avLst/>
+          </a:prstGeom>
+          <a:noFill/>
+          <a:ln/>
+        </p:spPr>
+        <p:txBody>
+          <a:bodyPr wrap="square" lIns="0" tIns="0" rIns="0" bIns="0" rtlCol="0" anchor="ctr"/>
+          <a:lstStyle/>
+          <a:p>
+            <a:pPr indent="0" marL="0">
               <a:buNone/>
             </a:pPr>
             <a:r>
@@ -7880,7 +7313,7 @@
                 <a:ea typeface="Calibri" pitchFamily="34" charset="-122"/>
                 <a:cs typeface="Calibri" pitchFamily="34" charset="-120"/>
               </a:rPr>
-              <a:t>通知・招待・ログ・会議室同期</a:t>
+              <a:t>通知・招待・ログ・同期</a:t>
             </a:r>
             <a:endParaRPr lang="en-US" sz="1100" dirty="0"/>
           </a:p>
@@ -7894,12 +7327,12 @@
         </p:nvSpPr>
         <p:spPr>
           <a:xfrm>
-            <a:off x="8138160" y="1554480"/>
-            <a:ext cx="3566160" cy="1737360"/>
+            <a:off x="7955280" y="1600200"/>
+            <a:ext cx="3520440" cy="1645920"/>
           </a:xfrm>
           <a:prstGeom prst="roundRect">
             <a:avLst>
-              <a:gd name="adj" fmla="val 4737"/>
+              <a:gd name="adj" fmla="val 5000"/>
             </a:avLst>
           </a:prstGeom>
           <a:solidFill>
@@ -7928,7 +7361,7 @@
         </p:nvSpPr>
         <p:spPr>
           <a:xfrm>
-            <a:off x="8366760" y="1773936"/>
+            <a:off x="8183880" y="1828800"/>
             <a:ext cx="384048" cy="384048"/>
           </a:xfrm>
           <a:prstGeom prst="ellipse">
@@ -7948,8 +7381,8 @@
         </p:nvSpPr>
         <p:spPr>
           <a:xfrm>
-            <a:off x="8915400" y="1755648"/>
-            <a:ext cx="2651760" cy="457200"/>
+            <a:off x="8705088" y="1801368"/>
+            <a:ext cx="2560320" cy="457200"/>
           </a:xfrm>
           <a:prstGeom prst="rect">
             <a:avLst/>
@@ -7987,8 +7420,8 @@
         </p:nvSpPr>
         <p:spPr>
           <a:xfrm>
-            <a:off x="8366760" y="2340864"/>
-            <a:ext cx="3108960" cy="365760"/>
+            <a:off x="8183880" y="2377440"/>
+            <a:ext cx="3063240" cy="320040"/>
           </a:xfrm>
           <a:prstGeom prst="rect">
             <a:avLst/>
@@ -8026,23 +7459,20 @@
         </p:nvSpPr>
         <p:spPr>
           <a:xfrm>
-            <a:off x="8366760" y="2706624"/>
-            <a:ext cx="3108960" cy="502920"/>
-          </a:xfrm>
-          <a:prstGeom prst="rect">
-            <a:avLst/>
-          </a:prstGeom>
-          <a:noFill/>
-          <a:ln/>
-        </p:spPr>
-        <p:txBody>
-          <a:bodyPr wrap="square" lIns="0" tIns="0" rIns="0" bIns="0" rtlCol="0" anchor="ctr"/>
-          <a:lstStyle/>
-          <a:p>
-            <a:pPr indent="0" marL="0">
-              <a:lnSpc>
-                <a:spcPct val="115000"/>
-              </a:lnSpc>
+            <a:off x="8183880" y="2715768"/>
+            <a:ext cx="3063240" cy="457200"/>
+          </a:xfrm>
+          <a:prstGeom prst="rect">
+            <a:avLst/>
+          </a:prstGeom>
+          <a:noFill/>
+          <a:ln/>
+        </p:spPr>
+        <p:txBody>
+          <a:bodyPr wrap="square" lIns="0" tIns="0" rIns="0" bIns="0" rtlCol="0" anchor="ctr"/>
+          <a:lstStyle/>
+          <a:p>
+            <a:pPr indent="0" marL="0">
               <a:buNone/>
             </a:pPr>
             <a:r>
@@ -8054,7 +7484,7 @@
                 <a:ea typeface="Calibri" pitchFamily="34" charset="-122"/>
                 <a:cs typeface="Calibri" pitchFamily="34" charset="-120"/>
               </a:rPr>
-              <a:t>全データ保存・RLSで保護</a:t>
+              <a:t>全データ保存・RLS保護</a:t>
             </a:r>
             <a:endParaRPr lang="en-US" sz="1100" dirty="0"/>
           </a:p>
@@ -8068,12 +7498,12 @@
         </p:nvSpPr>
         <p:spPr>
           <a:xfrm>
-            <a:off x="548640" y="3566160"/>
-            <a:ext cx="3566160" cy="1737360"/>
+            <a:off x="548640" y="3383280"/>
+            <a:ext cx="3520440" cy="1645920"/>
           </a:xfrm>
           <a:prstGeom prst="roundRect">
             <a:avLst>
-              <a:gd name="adj" fmla="val 4737"/>
+              <a:gd name="adj" fmla="val 5000"/>
             </a:avLst>
           </a:prstGeom>
           <a:solidFill>
@@ -8102,7 +7532,7 @@
         </p:nvSpPr>
         <p:spPr>
           <a:xfrm>
-            <a:off x="777240" y="3785616"/>
+            <a:off x="777240" y="3611880"/>
             <a:ext cx="384048" cy="384048"/>
           </a:xfrm>
           <a:prstGeom prst="ellipse">
@@ -8122,8 +7552,8 @@
         </p:nvSpPr>
         <p:spPr>
           <a:xfrm>
-            <a:off x="1325880" y="3767328"/>
-            <a:ext cx="2651760" cy="457200"/>
+            <a:off x="1298448" y="3584448"/>
+            <a:ext cx="2560320" cy="457200"/>
           </a:xfrm>
           <a:prstGeom prst="rect">
             <a:avLst/>
@@ -8161,8 +7591,8 @@
         </p:nvSpPr>
         <p:spPr>
           <a:xfrm>
-            <a:off x="777240" y="4352544"/>
-            <a:ext cx="3108960" cy="365760"/>
+            <a:off x="777240" y="4160520"/>
+            <a:ext cx="3063240" cy="320040"/>
           </a:xfrm>
           <a:prstGeom prst="rect">
             <a:avLst/>
@@ -8200,23 +7630,20 @@
         </p:nvSpPr>
         <p:spPr>
           <a:xfrm>
-            <a:off x="777240" y="4718304"/>
-            <a:ext cx="3108960" cy="502920"/>
-          </a:xfrm>
-          <a:prstGeom prst="rect">
-            <a:avLst/>
-          </a:prstGeom>
-          <a:noFill/>
-          <a:ln/>
-        </p:spPr>
-        <p:txBody>
-          <a:bodyPr wrap="square" lIns="0" tIns="0" rIns="0" bIns="0" rtlCol="0" anchor="ctr"/>
-          <a:lstStyle/>
-          <a:p>
-            <a:pPr indent="0" marL="0">
-              <a:lnSpc>
-                <a:spcPct val="115000"/>
-              </a:lnSpc>
+            <a:off x="777240" y="4498848"/>
+            <a:ext cx="3063240" cy="457200"/>
+          </a:xfrm>
+          <a:prstGeom prst="rect">
+            <a:avLst/>
+          </a:prstGeom>
+          <a:noFill/>
+          <a:ln/>
+        </p:spPr>
+        <p:txBody>
+          <a:bodyPr wrap="square" lIns="0" tIns="0" rIns="0" bIns="0" rtlCol="0" anchor="ctr"/>
+          <a:lstStyle/>
+          <a:p>
+            <a:pPr indent="0" marL="0">
               <a:buNone/>
             </a:pPr>
             <a:r>
@@ -8228,7 +7655,7 @@
                 <a:ea typeface="Calibri" pitchFamily="34" charset="-122"/>
                 <a:cs typeface="Calibri" pitchFamily="34" charset="-120"/>
               </a:rPr>
-              <a:t>招待自動作成・会議室同期(15分)</a:t>
+              <a:t>招待作成・会議室同期(15分)</a:t>
             </a:r>
             <a:endParaRPr lang="en-US" sz="1100" dirty="0"/>
           </a:p>
@@ -8242,12 +7669,12 @@
         </p:nvSpPr>
         <p:spPr>
           <a:xfrm>
-            <a:off x="4343400" y="3566160"/>
-            <a:ext cx="3566160" cy="1737360"/>
+            <a:off x="4251960" y="3383280"/>
+            <a:ext cx="3520440" cy="1645920"/>
           </a:xfrm>
           <a:prstGeom prst="roundRect">
             <a:avLst>
-              <a:gd name="adj" fmla="val 4737"/>
+              <a:gd name="adj" fmla="val 5000"/>
             </a:avLst>
           </a:prstGeom>
           <a:solidFill>
@@ -8276,7 +7703,7 @@
         </p:nvSpPr>
         <p:spPr>
           <a:xfrm>
-            <a:off x="4572000" y="3785616"/>
+            <a:off x="4480560" y="3611880"/>
             <a:ext cx="384048" cy="384048"/>
           </a:xfrm>
           <a:prstGeom prst="ellipse">
@@ -8296,8 +7723,8 @@
         </p:nvSpPr>
         <p:spPr>
           <a:xfrm>
-            <a:off x="5120640" y="3767328"/>
-            <a:ext cx="2651760" cy="457200"/>
+            <a:off x="5001768" y="3584448"/>
+            <a:ext cx="2560320" cy="457200"/>
           </a:xfrm>
           <a:prstGeom prst="rect">
             <a:avLst/>
@@ -8335,8 +7762,8 @@
         </p:nvSpPr>
         <p:spPr>
           <a:xfrm>
-            <a:off x="4572000" y="4352544"/>
-            <a:ext cx="3108960" cy="365760"/>
+            <a:off x="4480560" y="4160520"/>
+            <a:ext cx="3063240" cy="320040"/>
           </a:xfrm>
           <a:prstGeom prst="rect">
             <a:avLst/>
@@ -8360,7 +7787,7 @@
                 <a:ea typeface="Calibri" pitchFamily="34" charset="-122"/>
                 <a:cs typeface="Calibri" pitchFamily="34" charset="-120"/>
               </a:rPr>
-              <a:t>Google Chat (Webhook)</a:t>
+              <a:t>Google Chat</a:t>
             </a:r>
             <a:endParaRPr lang="en-US" sz="1250" dirty="0"/>
           </a:p>
@@ -8374,23 +7801,20 @@
         </p:nvSpPr>
         <p:spPr>
           <a:xfrm>
-            <a:off x="4572000" y="4718304"/>
-            <a:ext cx="3108960" cy="502920"/>
-          </a:xfrm>
-          <a:prstGeom prst="rect">
-            <a:avLst/>
-          </a:prstGeom>
-          <a:noFill/>
-          <a:ln/>
-        </p:spPr>
-        <p:txBody>
-          <a:bodyPr wrap="square" lIns="0" tIns="0" rIns="0" bIns="0" rtlCol="0" anchor="ctr"/>
-          <a:lstStyle/>
-          <a:p>
-            <a:pPr indent="0" marL="0">
-              <a:lnSpc>
-                <a:spcPct val="115000"/>
-              </a:lnSpc>
+            <a:off x="4480560" y="4498848"/>
+            <a:ext cx="3063240" cy="457200"/>
+          </a:xfrm>
+          <a:prstGeom prst="rect">
+            <a:avLst/>
+          </a:prstGeom>
+          <a:noFill/>
+          <a:ln/>
+        </p:spPr>
+        <p:txBody>
+          <a:bodyPr wrap="square" lIns="0" tIns="0" rIns="0" bIns="0" rtlCol="0" anchor="ctr"/>
+          <a:lstStyle/>
+          <a:p>
+            <a:pPr indent="0" marL="0">
               <a:buNone/>
             </a:pPr>
             <a:r>
@@ -8402,7 +7826,7 @@
                 <a:ea typeface="Calibri" pitchFamily="34" charset="-122"/>
                 <a:cs typeface="Calibri" pitchFamily="34" charset="-120"/>
               </a:rPr>
-              <a:t>来訪通知・対応/依頼ボタン</a:t>
+              <a:t>来訪通知・対応/依頼</a:t>
             </a:r>
             <a:endParaRPr lang="en-US" sz="1100" dirty="0"/>
           </a:p>
@@ -8416,12 +7840,12 @@
         </p:nvSpPr>
         <p:spPr>
           <a:xfrm>
-            <a:off x="8138160" y="3566160"/>
-            <a:ext cx="3566160" cy="1737360"/>
+            <a:off x="7955280" y="3383280"/>
+            <a:ext cx="3520440" cy="1645920"/>
           </a:xfrm>
           <a:prstGeom prst="roundRect">
             <a:avLst>
-              <a:gd name="adj" fmla="val 4737"/>
+              <a:gd name="adj" fmla="val 5000"/>
             </a:avLst>
           </a:prstGeom>
           <a:solidFill>
@@ -8450,7 +7874,7 @@
         </p:nvSpPr>
         <p:spPr>
           <a:xfrm>
-            <a:off x="8366760" y="3785616"/>
+            <a:off x="8183880" y="3611880"/>
             <a:ext cx="384048" cy="384048"/>
           </a:xfrm>
           <a:prstGeom prst="ellipse">
@@ -8470,8 +7894,8 @@
         </p:nvSpPr>
         <p:spPr>
           <a:xfrm>
-            <a:off x="8915400" y="3767328"/>
-            <a:ext cx="2651760" cy="457200"/>
+            <a:off x="8705088" y="3584448"/>
+            <a:ext cx="2560320" cy="457200"/>
           </a:xfrm>
           <a:prstGeom prst="rect">
             <a:avLst/>
@@ -8509,8 +7933,8 @@
         </p:nvSpPr>
         <p:spPr>
           <a:xfrm>
-            <a:off x="8366760" y="4352544"/>
-            <a:ext cx="3108960" cy="365760"/>
+            <a:off x="8183880" y="4160520"/>
+            <a:ext cx="3063240" cy="320040"/>
           </a:xfrm>
           <a:prstGeom prst="rect">
             <a:avLst/>
@@ -8548,23 +7972,20 @@
         </p:nvSpPr>
         <p:spPr>
           <a:xfrm>
-            <a:off x="8366760" y="4718304"/>
-            <a:ext cx="3108960" cy="502920"/>
-          </a:xfrm>
-          <a:prstGeom prst="rect">
-            <a:avLst/>
-          </a:prstGeom>
-          <a:noFill/>
-          <a:ln/>
-        </p:spPr>
-        <p:txBody>
-          <a:bodyPr wrap="square" lIns="0" tIns="0" rIns="0" bIns="0" rtlCol="0" anchor="ctr"/>
-          <a:lstStyle/>
-          <a:p>
-            <a:pPr indent="0" marL="0">
-              <a:lnSpc>
-                <a:spcPct val="115000"/>
-              </a:lnSpc>
+            <a:off x="8183880" y="4498848"/>
+            <a:ext cx="3063240" cy="457200"/>
+          </a:xfrm>
+          <a:prstGeom prst="rect">
+            <a:avLst/>
+          </a:prstGeom>
+          <a:noFill/>
+          <a:ln/>
+        </p:spPr>
+        <p:txBody>
+          <a:bodyPr wrap="square" lIns="0" tIns="0" rIns="0" bIns="0" rtlCol="0" anchor="ctr"/>
+          <a:lstStyle/>
+          <a:p>
+            <a:pPr indent="0" marL="0">
               <a:buNone/>
             </a:pPr>
             <a:r>
@@ -8576,7 +7997,7 @@
                 <a:ea typeface="Calibri" pitchFamily="34" charset="-122"/>
                 <a:cs typeface="Calibri" pitchFamily="34" charset="-120"/>
               </a:rPr>
-              <a:t>対応者/依頼者の本人識別（Workspace限定）</a:t>
+              <a:t>対応者の本人識別</a:t>
             </a:r>
             <a:endParaRPr lang="en-US" sz="1100" dirty="0"/>
           </a:p>
@@ -8591,23 +8012,23 @@
         <p:spPr>
           <a:xfrm>
             <a:off x="548640" y="5806440"/>
-            <a:ext cx="11064240" cy="457200"/>
-          </a:xfrm>
-          <a:prstGeom prst="rect">
-            <a:avLst/>
-          </a:prstGeom>
-          <a:noFill/>
-          <a:ln/>
-        </p:spPr>
-        <p:txBody>
-          <a:bodyPr wrap="square" lIns="0" tIns="0" rIns="0" bIns="0" rtlCol="0" anchor="ctr"/>
-          <a:lstStyle/>
-          <a:p>
-            <a:pPr indent="0" marL="0">
-              <a:buNone/>
-            </a:pPr>
-            <a:r>
-              <a:rPr lang="en-US" sz="1100" i="1" dirty="0">
+            <a:ext cx="11064240" cy="365760"/>
+          </a:xfrm>
+          <a:prstGeom prst="rect">
+            <a:avLst/>
+          </a:prstGeom>
+          <a:noFill/>
+          <a:ln/>
+        </p:spPr>
+        <p:txBody>
+          <a:bodyPr wrap="square" lIns="0" tIns="0" rIns="0" bIns="0" rtlCol="0" anchor="ctr"/>
+          <a:lstStyle/>
+          <a:p>
+            <a:pPr indent="0" marL="0">
+              <a:buNone/>
+            </a:pPr>
+            <a:r>
+              <a:rPr lang="en-US" sz="1150" i="1" dirty="0">
                 <a:solidFill>
                   <a:srgbClr val="1C7293"/>
                 </a:solidFill>
@@ -8615,9 +8036,9 @@
                 <a:ea typeface="Calibri" pitchFamily="34" charset="-122"/>
                 <a:cs typeface="Calibri" pitchFamily="34" charset="-120"/>
               </a:rPr>
-              <a:t>データの流れ（例）：iPad → Supabase(reception_visits) → /api/notify → Google Chat通知 → 「対応」ボタン → /api/handle・OAuth → reception_responders</a:t>
-            </a:r>
-            <a:endParaRPr lang="en-US" sz="1100" dirty="0"/>
+              <a:t>流れ：iPad → Supabase → /api/notify → Chat通知 → 「対応」ボタン → OAuth → 対応者記録</a:t>
+            </a:r>
+            <a:endParaRPr lang="en-US" sz="1150" dirty="0"/>
           </a:p>
         </p:txBody>
       </p:sp>
@@ -8629,7 +8050,7 @@
         </p:nvSpPr>
         <p:spPr>
           <a:xfrm>
-            <a:off x="11430000" y="6355080"/>
+            <a:off x="11430000" y="6382512"/>
             <a:ext cx="457200" cy="274320"/>
           </a:xfrm>
           <a:prstGeom prst="rect">
@@ -8668,7 +8089,7 @@
         </p:nvSpPr>
         <p:spPr>
           <a:xfrm>
-            <a:off x="548640" y="6355080"/>
+            <a:off x="548640" y="6382512"/>
             <a:ext cx="5486400" cy="274320"/>
           </a:xfrm>
           <a:prstGeom prst="rect">
@@ -8778,7 +8199,7 @@
         </p:nvSpPr>
         <p:spPr>
           <a:xfrm>
-            <a:off x="548640" y="640080"/>
+            <a:off x="548640" y="658368"/>
             <a:ext cx="11064240" cy="640080"/>
           </a:xfrm>
           <a:prstGeom prst="rect">
@@ -8818,11 +8239,11 @@
         <p:spPr>
           <a:xfrm>
             <a:off x="548640" y="1554480"/>
-            <a:ext cx="5394960" cy="4297680"/>
+            <a:ext cx="5394960" cy="4206240"/>
           </a:xfrm>
           <a:prstGeom prst="roundRect">
             <a:avLst>
-              <a:gd name="adj" fmla="val 1915"/>
+              <a:gd name="adj" fmla="val 1957"/>
             </a:avLst>
           </a:prstGeom>
           <a:solidFill>
@@ -8851,7 +8272,7 @@
         </p:nvSpPr>
         <p:spPr>
           <a:xfrm>
-            <a:off x="822960" y="1737360"/>
+            <a:off x="841248" y="1737360"/>
             <a:ext cx="4846320" cy="365760"/>
           </a:xfrm>
           <a:prstGeom prst="rect">
@@ -8890,30 +8311,30 @@
         </p:nvSpPr>
         <p:spPr>
           <a:xfrm>
-            <a:off x="868680" y="2240280"/>
-            <a:ext cx="4846320" cy="3291840"/>
-          </a:xfrm>
-          <a:prstGeom prst="rect">
-            <a:avLst/>
-          </a:prstGeom>
-          <a:noFill/>
-          <a:ln/>
-        </p:spPr>
-        <p:txBody>
-          <a:bodyPr wrap="square" lIns="0" tIns="0" rIns="0" bIns="0" rtlCol="0" anchor="ctr"/>
+            <a:off x="896112" y="2240280"/>
+            <a:ext cx="4800600" cy="3383280"/>
+          </a:xfrm>
+          <a:prstGeom prst="rect">
+            <a:avLst/>
+          </a:prstGeom>
+          <a:noFill/>
+          <a:ln/>
+        </p:spPr>
+        <p:txBody>
+          <a:bodyPr wrap="square" lIns="0" tIns="0" rIns="0" bIns="0" rtlCol="0" anchor="t"/>
           <a:lstStyle/>
           <a:p>
             <a:pPr indent="0" marL="0">
               <a:lnSpc>
-                <a:spcPct val="110000"/>
+                <a:spcPct val="108000"/>
               </a:lnSpc>
               <a:spcAft>
-                <a:spcPts val="1000"/>
+                <a:spcPts val="1300"/>
               </a:spcAft>
               <a:buNone/>
             </a:pPr>
             <a:r>
-              <a:rPr lang="en-US" sz="1350" dirty="0">
+              <a:rPr lang="en-US" sz="1400" dirty="0">
                 <a:solidFill>
                   <a:srgbClr val="2A2E45"/>
                 </a:solidFill>
@@ -8921,19 +8342,19 @@
                 <a:ea typeface="Calibri" pitchFamily="34" charset="-122"/>
                 <a:cs typeface="Calibri" pitchFamily="34" charset="-120"/>
               </a:rPr>
-              <a:t>main ブランチへの push を Vercel が自動デプロイ</a:t>
+              <a:t>main へ push → Vercel が自動デプロイ</a:t>
             </a:r>
             <a:pPr indent="0" marL="0">
               <a:lnSpc>
-                <a:spcPct val="110000"/>
+                <a:spcPct val="108000"/>
               </a:lnSpc>
               <a:spcAft>
-                <a:spcPts val="1000"/>
+                <a:spcPts val="1300"/>
               </a:spcAft>
               <a:buNone/>
             </a:pPr>
             <a:r>
-              <a:rPr lang="en-US" sz="1350" dirty="0">
+              <a:rPr lang="en-US" sz="1400" dirty="0">
                 <a:solidFill>
                   <a:srgbClr val="2A2E45"/>
                 </a:solidFill>
@@ -8941,19 +8362,19 @@
                 <a:ea typeface="Calibri" pitchFamily="34" charset="-122"/>
                 <a:cs typeface="Calibri" pitchFamily="34" charset="-120"/>
               </a:rPr>
-              <a:t>= main マージがそのまま本番反映（1〜数分）</a:t>
+              <a:t>main マージ＝本番反映（1〜数分）</a:t>
             </a:r>
             <a:pPr indent="0" marL="0">
               <a:lnSpc>
-                <a:spcPct val="110000"/>
+                <a:spcPct val="108000"/>
               </a:lnSpc>
               <a:spcAft>
-                <a:spcPts val="1000"/>
+                <a:spcPts val="1300"/>
               </a:spcAft>
               <a:buNone/>
             </a:pPr>
             <a:r>
-              <a:rPr lang="en-US" sz="1350" dirty="0">
+              <a:rPr lang="en-US" sz="1400" dirty="0">
                 <a:solidFill>
                   <a:srgbClr val="2A2E45"/>
                 </a:solidFill>
@@ -8961,19 +8382,19 @@
                 <a:ea typeface="Calibri" pitchFamily="34" charset="-122"/>
                 <a:cs typeface="Calibri" pitchFamily="34" charset="-120"/>
               </a:rPr>
-              <a:t>PRごとにプレビューURLが自動生成（マージ前確認）</a:t>
+              <a:t>PRごとにプレビューURLで事前確認</a:t>
             </a:r>
             <a:pPr indent="0" marL="0">
               <a:lnSpc>
-                <a:spcPct val="110000"/>
+                <a:spcPct val="108000"/>
               </a:lnSpc>
               <a:spcAft>
-                <a:spcPts val="1000"/>
+                <a:spcPts val="1300"/>
               </a:spcAft>
               <a:buNone/>
             </a:pPr>
             <a:r>
-              <a:rPr lang="en-US" sz="1350" dirty="0">
+              <a:rPr lang="en-US" sz="1400" dirty="0">
                 <a:solidFill>
                   <a:srgbClr val="2A2E45"/>
                 </a:solidFill>
@@ -8981,19 +8402,19 @@
                 <a:ea typeface="Calibri" pitchFamily="34" charset="-122"/>
                 <a:cs typeface="Calibri" pitchFamily="34" charset="-120"/>
               </a:rPr>
-              <a:t>PRに対するCIは無し（Actionsは vexa-agent のみ）</a:t>
+              <a:t>PRのCIは無し（プレビュー目視が要）</a:t>
             </a:r>
             <a:pPr indent="0" marL="0">
               <a:lnSpc>
-                <a:spcPct val="110000"/>
+                <a:spcPct val="108000"/>
               </a:lnSpc>
               <a:spcAft>
-                <a:spcPts val="1000"/>
+                <a:spcPts val="1300"/>
               </a:spcAft>
               <a:buNone/>
             </a:pPr>
             <a:r>
-              <a:rPr lang="en-US" sz="1350" dirty="0">
+              <a:rPr lang="en-US" sz="1400" dirty="0">
                 <a:solidFill>
                   <a:srgbClr val="2A2E45"/>
                 </a:solidFill>
@@ -9001,9 +8422,9 @@
                 <a:ea typeface="Calibri" pitchFamily="34" charset="-122"/>
                 <a:cs typeface="Calibri" pitchFamily="34" charset="-120"/>
               </a:rPr>
-              <a:t>反映が古い時はスーパーリロード（Ctrl/⌘+Shift+R）</a:t>
-            </a:r>
-            <a:endParaRPr lang="en-US" sz="1350" dirty="0"/>
+              <a:t>反映が古い時は強制リロード</a:t>
+            </a:r>
+            <a:endParaRPr lang="en-US" sz="1400" dirty="0"/>
           </a:p>
         </p:txBody>
       </p:sp>
@@ -9016,11 +8437,11 @@
         <p:spPr>
           <a:xfrm>
             <a:off x="6217920" y="1554480"/>
-            <a:ext cx="5394960" cy="4297680"/>
+            <a:ext cx="5394960" cy="4206240"/>
           </a:xfrm>
           <a:prstGeom prst="roundRect">
             <a:avLst>
-              <a:gd name="adj" fmla="val 1915"/>
+              <a:gd name="adj" fmla="val 1957"/>
             </a:avLst>
           </a:prstGeom>
           <a:solidFill>
@@ -9050,7 +8471,7 @@
         <p:spPr>
           <a:xfrm>
             <a:off x="6492240" y="1737360"/>
-            <a:ext cx="4937760" cy="548640"/>
+            <a:ext cx="4937760" cy="365760"/>
           </a:xfrm>
           <a:prstGeom prst="rect">
             <a:avLst/>
@@ -9074,7 +8495,7 @@
                 <a:ea typeface="Calibri" pitchFamily="34" charset="-122"/>
                 <a:cs typeface="Calibri" pitchFamily="34" charset="-120"/>
               </a:rPr>
-              <a:t>環境変数（Vercel で管理・値はリポジトリに置かない）</a:t>
+              <a:t>環境変数（Vercelで管理・値は非公開）</a:t>
             </a:r>
             <a:endParaRPr lang="en-US" sz="1450" dirty="0"/>
           </a:p>
@@ -9088,7 +8509,7 @@
         </p:nvSpPr>
         <p:spPr>
           <a:xfrm>
-            <a:off x="6492240" y="2331720"/>
+            <a:off x="6492240" y="2286000"/>
             <a:ext cx="4937760" cy="274320"/>
           </a:xfrm>
           <a:prstGeom prst="rect">
@@ -9127,7 +8548,7 @@
         </p:nvSpPr>
         <p:spPr>
           <a:xfrm>
-            <a:off x="6492240" y="2606040"/>
+            <a:off x="6492240" y="2560320"/>
             <a:ext cx="4937760" cy="256032"/>
           </a:xfrm>
           <a:prstGeom prst="rect">
@@ -9166,7 +8587,7 @@
         </p:nvSpPr>
         <p:spPr>
           <a:xfrm>
-            <a:off x="6492240" y="2898648"/>
+            <a:off x="6492240" y="2871216"/>
             <a:ext cx="4937760" cy="274320"/>
           </a:xfrm>
           <a:prstGeom prst="rect">
@@ -9205,7 +8626,7 @@
         </p:nvSpPr>
         <p:spPr>
           <a:xfrm>
-            <a:off x="6492240" y="3172968"/>
+            <a:off x="6492240" y="3145536"/>
             <a:ext cx="4937760" cy="256032"/>
           </a:xfrm>
           <a:prstGeom prst="rect">
@@ -9230,7 +8651,7 @@
                 <a:ea typeface="Calibri" pitchFamily="34" charset="-122"/>
                 <a:cs typeface="Calibri" pitchFamily="34" charset="-120"/>
               </a:rPr>
-              <a:t>GAS↔API 認証（GASと一致必須）</a:t>
+              <a:t>GAS↔API 認証（GASと一致）</a:t>
             </a:r>
             <a:endParaRPr lang="en-US" sz="1050" dirty="0"/>
           </a:p>
@@ -9244,7 +8665,7 @@
         </p:nvSpPr>
         <p:spPr>
           <a:xfrm>
-            <a:off x="6492240" y="3465576"/>
+            <a:off x="6492240" y="3456432"/>
             <a:ext cx="4937760" cy="274320"/>
           </a:xfrm>
           <a:prstGeom prst="rect">
@@ -9283,7 +8704,7 @@
         </p:nvSpPr>
         <p:spPr>
           <a:xfrm>
-            <a:off x="6492240" y="3739896"/>
+            <a:off x="6492240" y="3730752"/>
             <a:ext cx="4937760" cy="256032"/>
           </a:xfrm>
           <a:prstGeom prst="rect">
@@ -9308,7 +8729,7 @@
                 <a:ea typeface="Calibri" pitchFamily="34" charset="-122"/>
                 <a:cs typeface="Calibri" pitchFamily="34" charset="-120"/>
               </a:rPr>
-              <a:t>Chatグループ通知（フォールバック）</a:t>
+              <a:t>Chat通知（フォールバック）</a:t>
             </a:r>
             <a:endParaRPr lang="en-US" sz="1050" dirty="0"/>
           </a:p>
@@ -9322,7 +8743,7 @@
         </p:nvSpPr>
         <p:spPr>
           <a:xfrm>
-            <a:off x="6492240" y="4032504"/>
+            <a:off x="6492240" y="4041648"/>
             <a:ext cx="4937760" cy="274320"/>
           </a:xfrm>
           <a:prstGeom prst="rect">
@@ -9361,7 +8782,7 @@
         </p:nvSpPr>
         <p:spPr>
           <a:xfrm>
-            <a:off x="6492240" y="4306824"/>
+            <a:off x="6492240" y="4315968"/>
             <a:ext cx="4937760" cy="256032"/>
           </a:xfrm>
           <a:prstGeom prst="rect">
@@ -9386,7 +8807,7 @@
                 <a:ea typeface="Calibri" pitchFamily="34" charset="-122"/>
                 <a:cs typeface="Calibri" pitchFamily="34" charset="-120"/>
               </a:rPr>
-              <a:t>対応者OAuth認証</a:t>
+              <a:t>対応者OAuth</a:t>
             </a:r>
             <a:endParaRPr lang="en-US" sz="1050" dirty="0"/>
           </a:p>
@@ -9400,7 +8821,7 @@
         </p:nvSpPr>
         <p:spPr>
           <a:xfrm>
-            <a:off x="6492240" y="4599432"/>
+            <a:off x="6492240" y="4626864"/>
             <a:ext cx="4937760" cy="274320"/>
           </a:xfrm>
           <a:prstGeom prst="rect">
@@ -9439,7 +8860,7 @@
         </p:nvSpPr>
         <p:spPr>
           <a:xfrm>
-            <a:off x="6492240" y="4873752"/>
+            <a:off x="6492240" y="4901184"/>
             <a:ext cx="4937760" cy="256032"/>
           </a:xfrm>
           <a:prstGeom prst="rect">
@@ -9464,7 +8885,7 @@
                 <a:ea typeface="Calibri" pitchFamily="34" charset="-122"/>
                 <a:cs typeface="Calibri" pitchFamily="34" charset="-120"/>
               </a:rPr>
-              <a:t>PINリセット等のメール（任意）</a:t>
+              <a:t>メール送信（任意）</a:t>
             </a:r>
             <a:endParaRPr lang="en-US" sz="1050" dirty="0"/>
           </a:p>
@@ -9478,7 +8899,7 @@
         </p:nvSpPr>
         <p:spPr>
           <a:xfrm>
-            <a:off x="6492240" y="5166360"/>
+            <a:off x="6492240" y="5212080"/>
             <a:ext cx="4937760" cy="274320"/>
           </a:xfrm>
           <a:prstGeom prst="rect">
@@ -9517,7 +8938,7 @@
         </p:nvSpPr>
         <p:spPr>
           <a:xfrm>
-            <a:off x="6492240" y="5440680"/>
+            <a:off x="6492240" y="5486400"/>
             <a:ext cx="4937760" cy="256032"/>
           </a:xfrm>
           <a:prstGeom prst="rect">
@@ -9542,7 +8963,7 @@
                 <a:ea typeface="Calibri" pitchFamily="34" charset="-122"/>
                 <a:cs typeface="Calibri" pitchFamily="34" charset="-120"/>
               </a:rPr>
-              <a:t>名刺OCR・音声解析（任意）</a:t>
+              <a:t>名刺OCR・音声（任意）</a:t>
             </a:r>
             <a:endParaRPr lang="en-US" sz="1050" dirty="0"/>
           </a:p>
@@ -9556,7 +8977,7 @@
         </p:nvSpPr>
         <p:spPr>
           <a:xfrm>
-            <a:off x="11430000" y="6355080"/>
+            <a:off x="11430000" y="6382512"/>
             <a:ext cx="457200" cy="274320"/>
           </a:xfrm>
           <a:prstGeom prst="rect">
@@ -9595,7 +9016,7 @@
         </p:nvSpPr>
         <p:spPr>
           <a:xfrm>
-            <a:off x="548640" y="6355080"/>
+            <a:off x="548640" y="6382512"/>
             <a:ext cx="5486400" cy="274320"/>
           </a:xfrm>
           <a:prstGeom prst="rect">
@@ -9705,7 +9126,7 @@
         </p:nvSpPr>
         <p:spPr>
           <a:xfrm>
-            <a:off x="548640" y="640080"/>
+            <a:off x="548640" y="658368"/>
             <a:ext cx="11064240" cy="640080"/>
           </a:xfrm>
           <a:prstGeom prst="rect">
@@ -9745,11 +9166,11 @@
         <p:spPr>
           <a:xfrm>
             <a:off x="548640" y="1554480"/>
-            <a:ext cx="5486400" cy="4297680"/>
+            <a:ext cx="5486400" cy="4206240"/>
           </a:xfrm>
           <a:prstGeom prst="roundRect">
             <a:avLst>
-              <a:gd name="adj" fmla="val 1915"/>
+              <a:gd name="adj" fmla="val 1957"/>
             </a:avLst>
           </a:prstGeom>
           <a:solidFill>
@@ -9778,7 +9199,7 @@
         </p:nvSpPr>
         <p:spPr>
           <a:xfrm>
-            <a:off x="822960" y="1737360"/>
+            <a:off x="841248" y="1737360"/>
             <a:ext cx="4937760" cy="365760"/>
           </a:xfrm>
           <a:prstGeom prst="rect">
@@ -9817,122 +9238,140 @@
         </p:nvSpPr>
         <p:spPr>
           <a:xfrm>
-            <a:off x="868680" y="2240280"/>
-            <a:ext cx="4937760" cy="3200400"/>
-          </a:xfrm>
-          <a:prstGeom prst="rect">
-            <a:avLst/>
-          </a:prstGeom>
-          <a:noFill/>
-          <a:ln/>
-        </p:spPr>
-        <p:txBody>
-          <a:bodyPr wrap="square" lIns="0" tIns="0" rIns="0" bIns="0" rtlCol="0" anchor="ctr"/>
-          <a:lstStyle/>
-          <a:p>
-            <a:pPr indent="0" marL="0">
+            <a:off x="896112" y="2240280"/>
+            <a:ext cx="4937760" cy="2926080"/>
+          </a:xfrm>
+          <a:prstGeom prst="rect">
+            <a:avLst/>
+          </a:prstGeom>
+          <a:noFill/>
+          <a:ln/>
+        </p:spPr>
+        <p:txBody>
+          <a:bodyPr wrap="square" lIns="0" tIns="0" rIns="0" bIns="0" rtlCol="0" anchor="t"/>
+          <a:lstStyle/>
+          <a:p>
+            <a:pPr indent="0" marL="0">
+              <a:lnSpc>
+                <a:spcPct val="108000"/>
+              </a:lnSpc>
               <a:spcAft>
-                <a:spcPts val="900"/>
+                <a:spcPts val="800"/>
               </a:spcAft>
               <a:buNone/>
             </a:pPr>
             <a:r>
-              <a:rPr lang="en-US" sz="1200" dirty="0">
+              <a:rPr lang="en-US" sz="1250" dirty="0">
                 <a:solidFill>
                   <a:srgbClr val="2A2E45"/>
                 </a:solidFill>
-                <a:latin typeface="Courier New" pitchFamily="34" charset="0"/>
-                <a:ea typeface="Courier New" pitchFamily="34" charset="-122"/>
-                <a:cs typeface="Courier New" pitchFamily="34" charset="-120"/>
+                <a:latin typeface="Calibri" pitchFamily="34" charset="0"/>
+                <a:ea typeface="Calibri" pitchFamily="34" charset="-122"/>
+                <a:cs typeface="Calibri" pitchFamily="34" charset="-120"/>
               </a:rPr>
               <a:t>reception_visits … 入退館記録</a:t>
             </a:r>
             <a:pPr indent="0" marL="0">
+              <a:lnSpc>
+                <a:spcPct val="108000"/>
+              </a:lnSpc>
               <a:spcAft>
-                <a:spcPts val="900"/>
+                <a:spcPts val="800"/>
               </a:spcAft>
               <a:buNone/>
             </a:pPr>
             <a:r>
-              <a:rPr lang="en-US" sz="1200" dirty="0">
+              <a:rPr lang="en-US" sz="1250" dirty="0">
                 <a:solidFill>
                   <a:srgbClr val="2A2E45"/>
                 </a:solidFill>
-                <a:latin typeface="Courier New" pitchFamily="34" charset="0"/>
-                <a:ea typeface="Courier New" pitchFamily="34" charset="-122"/>
-                <a:cs typeface="Courier New" pitchFamily="34" charset="-120"/>
+                <a:latin typeface="Calibri" pitchFamily="34" charset="0"/>
+                <a:ea typeface="Calibri" pitchFamily="34" charset="-122"/>
+                <a:cs typeface="Calibri" pitchFamily="34" charset="-120"/>
               </a:rPr>
               <a:t>reception_responders … 対応者</a:t>
             </a:r>
             <a:pPr indent="0" marL="0">
+              <a:lnSpc>
+                <a:spcPct val="108000"/>
+              </a:lnSpc>
               <a:spcAft>
-                <a:spcPts val="900"/>
+                <a:spcPts val="800"/>
               </a:spcAft>
               <a:buNone/>
             </a:pPr>
             <a:r>
-              <a:rPr lang="en-US" sz="1200" dirty="0">
+              <a:rPr lang="en-US" sz="1250" dirty="0">
                 <a:solidFill>
                   <a:srgbClr val="2A2E45"/>
                 </a:solidFill>
-                <a:latin typeface="Courier New" pitchFamily="34" charset="0"/>
-                <a:ea typeface="Courier New" pitchFamily="34" charset="-122"/>
-                <a:cs typeface="Courier New" pitchFamily="34" charset="-120"/>
+                <a:latin typeface="Calibri" pitchFamily="34" charset="0"/>
+                <a:ea typeface="Calibri" pitchFamily="34" charset="-122"/>
+                <a:cs typeface="Calibri" pitchFamily="34" charset="-120"/>
               </a:rPr>
               <a:t>reception_invitations … 招待</a:t>
             </a:r>
             <a:pPr indent="0" marL="0">
+              <a:lnSpc>
+                <a:spcPct val="108000"/>
+              </a:lnSpc>
               <a:spcAft>
-                <a:spcPts val="900"/>
+                <a:spcPts val="800"/>
               </a:spcAft>
               <a:buNone/>
             </a:pPr>
             <a:r>
-              <a:rPr lang="en-US" sz="1200" dirty="0">
+              <a:rPr lang="en-US" sz="1250" dirty="0">
                 <a:solidFill>
                   <a:srgbClr val="2A2E45"/>
                 </a:solidFill>
-                <a:latin typeface="Courier New" pitchFamily="34" charset="0"/>
-                <a:ea typeface="Courier New" pitchFamily="34" charset="-122"/>
-                <a:cs typeface="Courier New" pitchFamily="34" charset="-120"/>
-              </a:rPr>
-              <a:t>reception_rooms / reception_room_availability … 会議室</a:t>
-            </a:r>
-            <a:pPr indent="0" marL="0">
+                <a:latin typeface="Calibri" pitchFamily="34" charset="0"/>
+                <a:ea typeface="Calibri" pitchFamily="34" charset="-122"/>
+                <a:cs typeface="Calibri" pitchFamily="34" charset="-120"/>
+              </a:rPr>
+              <a:t>reception_rooms / _room_availability … 会議室</a:t>
+            </a:r>
+            <a:pPr indent="0" marL="0">
+              <a:lnSpc>
+                <a:spcPct val="108000"/>
+              </a:lnSpc>
               <a:spcAft>
-                <a:spcPts val="900"/>
+                <a:spcPts val="800"/>
               </a:spcAft>
               <a:buNone/>
             </a:pPr>
             <a:r>
-              <a:rPr lang="en-US" sz="1200" dirty="0">
+              <a:rPr lang="en-US" sz="1250" dirty="0">
                 <a:solidFill>
                   <a:srgbClr val="2A2E45"/>
                 </a:solidFill>
-                <a:latin typeface="Courier New" pitchFamily="34" charset="0"/>
-                <a:ea typeface="Courier New" pitchFamily="34" charset="-122"/>
-                <a:cs typeface="Courier New" pitchFamily="34" charset="-120"/>
-              </a:rPr>
-              <a:t>reception_settings … 各種設定（KV/JSONB）</a:t>
-            </a:r>
-            <a:pPr indent="0" marL="0">
+                <a:latin typeface="Calibri" pitchFamily="34" charset="0"/>
+                <a:ea typeface="Calibri" pitchFamily="34" charset="-122"/>
+                <a:cs typeface="Calibri" pitchFamily="34" charset="-120"/>
+              </a:rPr>
+              <a:t>reception_settings … 設定（KV）</a:t>
+            </a:r>
+            <a:pPr indent="0" marL="0">
+              <a:lnSpc>
+                <a:spcPct val="108000"/>
+              </a:lnSpc>
               <a:spcAft>
-                <a:spcPts val="900"/>
+                <a:spcPts val="800"/>
               </a:spcAft>
               <a:buNone/>
             </a:pPr>
             <a:r>
-              <a:rPr lang="en-US" sz="1200" dirty="0">
+              <a:rPr lang="en-US" sz="1250" dirty="0">
                 <a:solidFill>
                   <a:srgbClr val="2A2E45"/>
                 </a:solidFill>
-                <a:latin typeface="Courier New" pitchFamily="34" charset="0"/>
-                <a:ea typeface="Courier New" pitchFamily="34" charset="-122"/>
-                <a:cs typeface="Courier New" pitchFamily="34" charset="-120"/>
-              </a:rPr>
-              <a:t>reception_staff / buttons / audit_logs</a:t>
-            </a:r>
-            <a:endParaRPr lang="en-US" sz="1200" dirty="0"/>
+                <a:latin typeface="Calibri" pitchFamily="34" charset="0"/>
+                <a:ea typeface="Calibri" pitchFamily="34" charset="-122"/>
+                <a:cs typeface="Calibri" pitchFamily="34" charset="-120"/>
+              </a:rPr>
+              <a:t>staff / buttons / audit_logs</a:t>
+            </a:r>
+            <a:endParaRPr lang="en-US" sz="1250" dirty="0"/>
           </a:p>
         </p:txBody>
       </p:sp>
@@ -9944,8 +9383,8 @@
         </p:nvSpPr>
         <p:spPr>
           <a:xfrm>
-            <a:off x="868680" y="5394960"/>
-            <a:ext cx="4937760" cy="365760"/>
+            <a:off x="896112" y="5349240"/>
+            <a:ext cx="4937760" cy="320040"/>
           </a:xfrm>
           <a:prstGeom prst="rect">
             <a:avLst/>
@@ -9969,7 +9408,7 @@
                 <a:ea typeface="Calibri" pitchFamily="34" charset="-122"/>
                 <a:cs typeface="Calibri" pitchFamily="34" charset="-120"/>
               </a:rPr>
-              <a:t>RLS有効：ブラウザ=anon / サーバーAPI=service_role</a:t>
+              <a:t>RLS：ブラウザ=anon／サーバー=service_role</a:t>
             </a:r>
             <a:endParaRPr lang="en-US" sz="1100" dirty="0"/>
           </a:p>
@@ -9984,11 +9423,11 @@
         <p:spPr>
           <a:xfrm>
             <a:off x="6309360" y="1554480"/>
-            <a:ext cx="5303520" cy="4297680"/>
+            <a:ext cx="5303520" cy="4206240"/>
           </a:xfrm>
           <a:prstGeom prst="roundRect">
             <a:avLst>
-              <a:gd name="adj" fmla="val 1915"/>
+              <a:gd name="adj" fmla="val 1957"/>
             </a:avLst>
           </a:prstGeom>
           <a:solidFill>
@@ -10116,29 +9555,29 @@
         <p:spPr>
           <a:xfrm>
             <a:off x="6583680" y="2468880"/>
-            <a:ext cx="4754880" cy="3108960"/>
-          </a:xfrm>
-          <a:prstGeom prst="rect">
-            <a:avLst/>
-          </a:prstGeom>
-          <a:noFill/>
-          <a:ln/>
-        </p:spPr>
-        <p:txBody>
-          <a:bodyPr wrap="square" lIns="0" tIns="0" rIns="0" bIns="0" rtlCol="0" anchor="ctr"/>
+            <a:ext cx="4800600" cy="3108960"/>
+          </a:xfrm>
+          <a:prstGeom prst="rect">
+            <a:avLst/>
+          </a:prstGeom>
+          <a:noFill/>
+          <a:ln/>
+        </p:spPr>
+        <p:txBody>
+          <a:bodyPr wrap="square" lIns="0" tIns="0" rIns="0" bIns="0" rtlCol="0" anchor="t"/>
           <a:lstStyle/>
           <a:p>
             <a:pPr indent="0" marL="0">
               <a:lnSpc>
-                <a:spcPct val="120000"/>
+                <a:spcPct val="108000"/>
               </a:lnSpc>
               <a:spcAft>
-                <a:spcPts val="600"/>
+                <a:spcPts val="1000"/>
               </a:spcAft>
               <a:buNone/>
             </a:pPr>
             <a:r>
-              <a:rPr lang="en-US" sz="1250" dirty="0">
+              <a:rPr lang="en-US" sz="1300" dirty="0">
                 <a:solidFill>
                   <a:srgbClr val="2A2E45"/>
                 </a:solidFill>
@@ -10146,19 +9585,19 @@
                 <a:ea typeface="Calibri" pitchFamily="34" charset="-122"/>
                 <a:cs typeface="Calibri" pitchFamily="34" charset="-120"/>
               </a:rPr>
-              <a:t>本番Supabaseのスキーマは migrations/ より進んでいる（一部の列・テーブルは管理画面で直接適用）。</a:t>
+              <a:t>本番スキーマは migrations/ より進んでいる</a:t>
             </a:r>
             <a:pPr indent="0" marL="0">
               <a:lnSpc>
-                <a:spcPct val="120000"/>
+                <a:spcPct val="108000"/>
               </a:lnSpc>
               <a:spcAft>
-                <a:spcPts val="600"/>
+                <a:spcPts val="1000"/>
               </a:spcAft>
               <a:buNone/>
             </a:pPr>
             <a:r>
-              <a:rPr lang="en-US" sz="1250" dirty="0">
+              <a:rPr lang="en-US" sz="1300" dirty="0">
                 <a:solidFill>
                   <a:srgbClr val="2A2E45"/>
                 </a:solidFill>
@@ -10166,19 +9605,19 @@
                 <a:ea typeface="Calibri" pitchFamily="34" charset="-122"/>
                 <a:cs typeface="Calibri" pitchFamily="34" charset="-120"/>
               </a:rPr>
-              <a:t>例：reception_rooms.calendar_id、reception_room_availability、staff.notification_webhook、audit_logs.actor_name、visits.visit_purpose など。</a:t>
+              <a:t>一部の列・表は管理画面で直接適用済み</a:t>
             </a:r>
             <a:pPr indent="0" marL="0">
               <a:lnSpc>
-                <a:spcPct val="120000"/>
+                <a:spcPct val="108000"/>
               </a:lnSpc>
               <a:spcAft>
-                <a:spcPts val="600"/>
+                <a:spcPts val="1000"/>
               </a:spcAft>
               <a:buNone/>
             </a:pPr>
             <a:r>
-              <a:rPr lang="en-US" sz="1250" dirty="0">
+              <a:rPr lang="en-US" sz="1300" dirty="0">
                 <a:solidFill>
                   <a:srgbClr val="2A2E45"/>
                 </a:solidFill>
@@ -10186,19 +9625,19 @@
                 <a:ea typeface="Calibri" pitchFamily="34" charset="-122"/>
                 <a:cs typeface="Calibri" pitchFamily="34" charset="-120"/>
               </a:rPr>
-              <a:t> </a:t>
+              <a:t>例: calendar_id / room_availability / actor_name / visit_purpose 等</a:t>
             </a:r>
             <a:pPr indent="0" marL="0">
               <a:lnSpc>
-                <a:spcPct val="120000"/>
+                <a:spcPct val="108000"/>
               </a:lnSpc>
               <a:spcAft>
-                <a:spcPts val="600"/>
+                <a:spcPts val="1000"/>
               </a:spcAft>
               <a:buNone/>
             </a:pPr>
             <a:r>
-              <a:rPr lang="en-US" sz="1250" dirty="0">
+              <a:rPr lang="en-US" sz="1300" dirty="0">
                 <a:solidFill>
                   <a:srgbClr val="2A2E45"/>
                 </a:solidFill>
@@ -10206,9 +9645,29 @@
                 <a:ea typeface="Calibri" pitchFamily="34" charset="-122"/>
                 <a:cs typeface="Calibri" pitchFamily="34" charset="-120"/>
               </a:rPr>
-              <a:t>→ 現行本番スキーマが「正」。migrationだけからの再構築は不可。移設時は本番ダンプを使う。</a:t>
-            </a:r>
-            <a:endParaRPr lang="en-US" sz="1250" dirty="0"/>
+              <a:t>→ 本番が「正」。migrationだけでは再構築不可</a:t>
+            </a:r>
+            <a:pPr indent="0" marL="0">
+              <a:lnSpc>
+                <a:spcPct val="108000"/>
+              </a:lnSpc>
+              <a:spcAft>
+                <a:spcPts val="1000"/>
+              </a:spcAft>
+              <a:buNone/>
+            </a:pPr>
+            <a:r>
+              <a:rPr lang="en-US" sz="1300" dirty="0">
+                <a:solidFill>
+                  <a:srgbClr val="2A2E45"/>
+                </a:solidFill>
+                <a:latin typeface="Calibri" pitchFamily="34" charset="0"/>
+                <a:ea typeface="Calibri" pitchFamily="34" charset="-122"/>
+                <a:cs typeface="Calibri" pitchFamily="34" charset="-120"/>
+              </a:rPr>
+              <a:t>→ 移設・復旧は本番ダンプから</a:t>
+            </a:r>
+            <a:endParaRPr lang="en-US" sz="1300" dirty="0"/>
           </a:p>
         </p:txBody>
       </p:sp>
@@ -10220,7 +9679,7 @@
         </p:nvSpPr>
         <p:spPr>
           <a:xfrm>
-            <a:off x="11430000" y="6355080"/>
+            <a:off x="11430000" y="6382512"/>
             <a:ext cx="457200" cy="274320"/>
           </a:xfrm>
           <a:prstGeom prst="rect">
@@ -10259,7 +9718,7 @@
         </p:nvSpPr>
         <p:spPr>
           <a:xfrm>
-            <a:off x="548640" y="6355080"/>
+            <a:off x="548640" y="6382512"/>
             <a:ext cx="5486400" cy="274320"/>
           </a:xfrm>
           <a:prstGeom prst="rect">
@@ -10369,7 +9828,7 @@
         </p:nvSpPr>
         <p:spPr>
           <a:xfrm>
-            <a:off x="548640" y="640080"/>
+            <a:off x="548640" y="658368"/>
             <a:ext cx="11064240" cy="640080"/>
           </a:xfrm>
           <a:prstGeom prst="rect">
@@ -10409,11 +9868,11 @@
         <p:spPr>
           <a:xfrm>
             <a:off x="548640" y="1554480"/>
-            <a:ext cx="5486400" cy="4297680"/>
+            <a:ext cx="5486400" cy="4206240"/>
           </a:xfrm>
           <a:prstGeom prst="roundRect">
             <a:avLst>
-              <a:gd name="adj" fmla="val 1915"/>
+              <a:gd name="adj" fmla="val 1957"/>
             </a:avLst>
           </a:prstGeom>
           <a:solidFill>
@@ -10442,7 +9901,7 @@
         </p:nvSpPr>
         <p:spPr>
           <a:xfrm>
-            <a:off x="822960" y="1737360"/>
+            <a:off x="841248" y="1737360"/>
             <a:ext cx="4937760" cy="365760"/>
           </a:xfrm>
           <a:prstGeom prst="rect">
@@ -10467,7 +9926,7 @@
                 <a:ea typeface="Calibri" pitchFamily="34" charset="-122"/>
                 <a:cs typeface="Calibri" pitchFamily="34" charset="-120"/>
               </a:rPr>
-              <a:t>主な関数（script.google.com）</a:t>
+              <a:t>主な関数</a:t>
             </a:r>
             <a:endParaRPr lang="en-US" sz="1500" dirty="0"/>
           </a:p>
@@ -10481,7 +9940,7 @@
         </p:nvSpPr>
         <p:spPr>
           <a:xfrm>
-            <a:off x="868680" y="2240280"/>
+            <a:off x="896112" y="2240280"/>
             <a:ext cx="4937760" cy="274320"/>
           </a:xfrm>
           <a:prstGeom prst="rect">
@@ -10520,7 +9979,7 @@
         </p:nvSpPr>
         <p:spPr>
           <a:xfrm>
-            <a:off x="868680" y="2514600"/>
+            <a:off x="896112" y="2514600"/>
             <a:ext cx="4937760" cy="274320"/>
           </a:xfrm>
           <a:prstGeom prst="rect">
@@ -10545,7 +10004,7 @@
                 <a:ea typeface="Calibri" pitchFamily="34" charset="-122"/>
                 <a:cs typeface="Calibri" pitchFamily="34" charset="-120"/>
               </a:rPr>
-              <a:t>社外ゲスト招待→招待状+QRメール（各自設定）</a:t>
+              <a:t>招待状+QRメール（各自設定）</a:t>
             </a:r>
             <a:endParaRPr lang="en-US" sz="1050" dirty="0"/>
           </a:p>
@@ -10559,7 +10018,7 @@
         </p:nvSpPr>
         <p:spPr>
           <a:xfrm>
-            <a:off x="868680" y="2926080"/>
+            <a:off x="896112" y="2926080"/>
             <a:ext cx="4937760" cy="274320"/>
           </a:xfrm>
           <a:prstGeom prst="rect">
@@ -10598,7 +10057,7 @@
         </p:nvSpPr>
         <p:spPr>
           <a:xfrm>
-            <a:off x="868680" y="3200400"/>
+            <a:off x="896112" y="3200400"/>
             <a:ext cx="4937760" cy="274320"/>
           </a:xfrm>
           <a:prstGeom prst="rect">
@@ -10623,7 +10082,7 @@
                 <a:ea typeface="Calibri" pitchFamily="34" charset="-122"/>
                 <a:cs typeface="Calibri" pitchFamily="34" charset="-120"/>
               </a:rPr>
-              <a:t>会議室空き状況を15分ごと同期（1名でOK）</a:t>
+              <a:t>会議室空き15分同期（1名でOK）</a:t>
             </a:r>
             <a:endParaRPr lang="en-US" sz="1050" dirty="0"/>
           </a:p>
@@ -10637,7 +10096,7 @@
         </p:nvSpPr>
         <p:spPr>
           <a:xfrm>
-            <a:off x="868680" y="3611880"/>
+            <a:off x="896112" y="3611880"/>
             <a:ext cx="4937760" cy="274320"/>
           </a:xfrm>
           <a:prstGeom prst="rect">
@@ -10676,7 +10135,7 @@
         </p:nvSpPr>
         <p:spPr>
           <a:xfrm>
-            <a:off x="868680" y="3886200"/>
+            <a:off x="896112" y="3886200"/>
             <a:ext cx="4937760" cy="274320"/>
           </a:xfrm>
           <a:prstGeom prst="rect">
@@ -10701,7 +10160,7 @@
                 <a:ea typeface="Calibri" pitchFamily="34" charset="-122"/>
                 <a:cs typeface="Calibri" pitchFamily="34" charset="-120"/>
               </a:rPr>
-              <a:t>会議室マスタ初回同期（手動1回）</a:t>
+              <a:t>会議室マスタ初回同期（手動）</a:t>
             </a:r>
             <a:endParaRPr lang="en-US" sz="1050" dirty="0"/>
           </a:p>
@@ -10715,7 +10174,7 @@
         </p:nvSpPr>
         <p:spPr>
           <a:xfrm>
-            <a:off x="868680" y="4297680"/>
+            <a:off x="896112" y="4297680"/>
             <a:ext cx="4937760" cy="274320"/>
           </a:xfrm>
           <a:prstGeom prst="rect">
@@ -10754,7 +10213,7 @@
         </p:nvSpPr>
         <p:spPr>
           <a:xfrm>
-            <a:off x="868680" y="4572000"/>
+            <a:off x="896112" y="4572000"/>
             <a:ext cx="4937760" cy="274320"/>
           </a:xfrm>
           <a:prstGeom prst="rect">
@@ -10779,7 +10238,7 @@
                 <a:ea typeface="Calibri" pitchFamily="34" charset="-122"/>
                 <a:cs typeface="Calibri" pitchFamily="34" charset="-120"/>
               </a:rPr>
-              <a:t>トリガー一括登録（手動1回）</a:t>
+              <a:t>トリガー一括登録（手動）</a:t>
             </a:r>
             <a:endParaRPr lang="en-US" sz="1050" dirty="0"/>
           </a:p>
@@ -10793,7 +10252,7 @@
         </p:nvSpPr>
         <p:spPr>
           <a:xfrm>
-            <a:off x="868680" y="4983480"/>
+            <a:off x="896112" y="4983480"/>
             <a:ext cx="4937760" cy="274320"/>
           </a:xfrm>
           <a:prstGeom prst="rect">
@@ -10832,7 +10291,7 @@
         </p:nvSpPr>
         <p:spPr>
           <a:xfrm>
-            <a:off x="868680" y="5257800"/>
+            <a:off x="896112" y="5257800"/>
             <a:ext cx="4937760" cy="274320"/>
           </a:xfrm>
           <a:prstGeom prst="rect">
@@ -10857,7 +10316,7 @@
                 <a:ea typeface="Calibri" pitchFamily="34" charset="-122"/>
                 <a:cs typeface="Calibri" pitchFamily="34" charset="-120"/>
               </a:rPr>
-              <a:t>INVITATION_SECRET 保存（手動1回）</a:t>
+              <a:t>SECRET保存（手動）</a:t>
             </a:r>
             <a:endParaRPr lang="en-US" sz="1050" dirty="0"/>
           </a:p>
@@ -10872,11 +10331,11 @@
         <p:spPr>
           <a:xfrm>
             <a:off x="6309360" y="1554480"/>
-            <a:ext cx="5303520" cy="4297680"/>
+            <a:ext cx="5303520" cy="4206240"/>
           </a:xfrm>
           <a:prstGeom prst="roundRect">
             <a:avLst>
-              <a:gd name="adj" fmla="val 1915"/>
+              <a:gd name="adj" fmla="val 1957"/>
             </a:avLst>
           </a:prstGeom>
           <a:solidFill>
@@ -10930,7 +10389,7 @@
                 <a:ea typeface="Calibri" pitchFamily="34" charset="-122"/>
                 <a:cs typeface="Calibri" pitchFamily="34" charset="-120"/>
               </a:rPr>
-              <a:t>運用上の依存・注意</a:t>
+              <a:t>運用の注意（依存）</a:t>
             </a:r>
             <a:endParaRPr lang="en-US" sz="1500" dirty="0"/>
           </a:p>
@@ -10944,30 +10403,30 @@
         </p:nvSpPr>
         <p:spPr>
           <a:xfrm>
-            <a:off x="6629400" y="2286000"/>
-            <a:ext cx="4754880" cy="3474720"/>
-          </a:xfrm>
-          <a:prstGeom prst="rect">
-            <a:avLst/>
-          </a:prstGeom>
-          <a:noFill/>
-          <a:ln/>
-        </p:spPr>
-        <p:txBody>
-          <a:bodyPr wrap="square" lIns="0" tIns="0" rIns="0" bIns="0" rtlCol="0" anchor="ctr"/>
+            <a:off x="6583680" y="2286000"/>
+            <a:ext cx="4800600" cy="3291840"/>
+          </a:xfrm>
+          <a:prstGeom prst="rect">
+            <a:avLst/>
+          </a:prstGeom>
+          <a:noFill/>
+          <a:ln/>
+        </p:spPr>
+        <p:txBody>
+          <a:bodyPr wrap="square" lIns="0" tIns="0" rIns="0" bIns="0" rtlCol="0" anchor="t"/>
           <a:lstStyle/>
           <a:p>
             <a:pPr indent="0" marL="0">
               <a:lnSpc>
-                <a:spcPct val="115000"/>
+                <a:spcPct val="108000"/>
               </a:lnSpc>
               <a:spcAft>
-                <a:spcPts val="1100"/>
+                <a:spcPts val="900"/>
               </a:spcAft>
               <a:buNone/>
             </a:pPr>
             <a:r>
-              <a:rPr lang="en-US" sz="1250" dirty="0">
+              <a:rPr lang="en-US" sz="1300" dirty="0">
                 <a:solidFill>
                   <a:srgbClr val="2A2E45"/>
                 </a:solidFill>
@@ -10975,19 +10434,19 @@
                 <a:ea typeface="Calibri" pitchFamily="34" charset="-122"/>
                 <a:cs typeface="Calibri" pitchFamily="34" charset="-120"/>
               </a:rPr>
-              <a:t>RECEPTION_URL は直URL（*.vercel.app）を使う。独自ドメインはリダイレクトでPOSTが405になる。</a:t>
+              <a:t>RECEPTION_URL は直URL（*.vercel.app）</a:t>
             </a:r>
             <a:pPr indent="0" marL="0">
               <a:lnSpc>
-                <a:spcPct val="115000"/>
+                <a:spcPct val="108000"/>
               </a:lnSpc>
               <a:spcAft>
-                <a:spcPts val="1100"/>
+                <a:spcPts val="900"/>
               </a:spcAft>
               <a:buNone/>
             </a:pPr>
             <a:r>
-              <a:rPr lang="en-US" sz="1250" dirty="0">
+              <a:rPr lang="en-US" sz="1300" dirty="0">
                 <a:solidFill>
                   <a:srgbClr val="2A2E45"/>
                 </a:solidFill>
@@ -10995,19 +10454,19 @@
                 <a:ea typeface="Calibri" pitchFamily="34" charset="-122"/>
                 <a:cs typeface="Calibri" pitchFamily="34" charset="-120"/>
               </a:rPr>
-              <a:t>syncRoomAvailability は設定者1名のアカウントで動作。退職・権限変更で停止 → 別担当で再設定。</a:t>
+              <a:t>独自ドメインはリダイレクトで405</a:t>
             </a:r>
             <a:pPr indent="0" marL="0">
               <a:lnSpc>
-                <a:spcPct val="115000"/>
+                <a:spcPct val="108000"/>
               </a:lnSpc>
               <a:spcAft>
-                <a:spcPts val="1100"/>
+                <a:spcPts val="900"/>
               </a:spcAft>
               <a:buNone/>
             </a:pPr>
             <a:r>
-              <a:rPr lang="en-US" sz="1250" dirty="0">
+              <a:rPr lang="en-US" sz="1300" dirty="0">
                 <a:solidFill>
                   <a:srgbClr val="2A2E45"/>
                 </a:solidFill>
@@ -11015,19 +10474,19 @@
                 <a:ea typeface="Calibri" pitchFamily="34" charset="-122"/>
                 <a:cs typeface="Calibri" pitchFamily="34" charset="-120"/>
               </a:rPr>
-              <a:t>INVITATION_SECRET は Vercel と GAS で一致必須。</a:t>
+              <a:t>同期は設定者1名のアカウント依存</a:t>
             </a:r>
             <a:pPr indent="0" marL="0">
               <a:lnSpc>
-                <a:spcPct val="115000"/>
+                <a:spcPct val="108000"/>
               </a:lnSpc>
               <a:spcAft>
-                <a:spcPts val="1100"/>
+                <a:spcPts val="900"/>
               </a:spcAft>
               <a:buNone/>
             </a:pPr>
             <a:r>
-              <a:rPr lang="en-US" sz="1250" dirty="0">
+              <a:rPr lang="en-US" sz="1300" dirty="0">
                 <a:solidFill>
                   <a:srgbClr val="2A2E45"/>
                 </a:solidFill>
@@ -11035,9 +10494,49 @@
                 <a:ea typeface="Calibri" pitchFamily="34" charset="-122"/>
                 <a:cs typeface="Calibri" pitchFamily="34" charset="-120"/>
               </a:rPr>
-              <a:t>連続失敗でGoogleがトリガーを自動無効化 → setupTrigger 再実行で復活。</a:t>
-            </a:r>
-            <a:endParaRPr lang="en-US" sz="1250" dirty="0"/>
+              <a:t>退職・権限変更で停止 → 別担当で再設定</a:t>
+            </a:r>
+            <a:pPr indent="0" marL="0">
+              <a:lnSpc>
+                <a:spcPct val="108000"/>
+              </a:lnSpc>
+              <a:spcAft>
+                <a:spcPts val="900"/>
+              </a:spcAft>
+              <a:buNone/>
+            </a:pPr>
+            <a:r>
+              <a:rPr lang="en-US" sz="1300" dirty="0">
+                <a:solidFill>
+                  <a:srgbClr val="2A2E45"/>
+                </a:solidFill>
+                <a:latin typeface="Calibri" pitchFamily="34" charset="0"/>
+                <a:ea typeface="Calibri" pitchFamily="34" charset="-122"/>
+                <a:cs typeface="Calibri" pitchFamily="34" charset="-120"/>
+              </a:rPr>
+              <a:t>SECRET は Vercel と GAS で一致</a:t>
+            </a:r>
+            <a:pPr indent="0" marL="0">
+              <a:lnSpc>
+                <a:spcPct val="108000"/>
+              </a:lnSpc>
+              <a:spcAft>
+                <a:spcPts val="900"/>
+              </a:spcAft>
+              <a:buNone/>
+            </a:pPr>
+            <a:r>
+              <a:rPr lang="en-US" sz="1300" dirty="0">
+                <a:solidFill>
+                  <a:srgbClr val="2A2E45"/>
+                </a:solidFill>
+                <a:latin typeface="Calibri" pitchFamily="34" charset="0"/>
+                <a:ea typeface="Calibri" pitchFamily="34" charset="-122"/>
+                <a:cs typeface="Calibri" pitchFamily="34" charset="-120"/>
+              </a:rPr>
+              <a:t>失敗続きで自動停止 → setupTrigger 再実行</a:t>
+            </a:r>
+            <a:endParaRPr lang="en-US" sz="1300" dirty="0"/>
           </a:p>
         </p:txBody>
       </p:sp>
@@ -11049,7 +10548,7 @@
         </p:nvSpPr>
         <p:spPr>
           <a:xfrm>
-            <a:off x="11430000" y="6355080"/>
+            <a:off x="11430000" y="6382512"/>
             <a:ext cx="457200" cy="274320"/>
           </a:xfrm>
           <a:prstGeom prst="rect">
@@ -11088,7 +10587,7 @@
         </p:nvSpPr>
         <p:spPr>
           <a:xfrm>
-            <a:off x="548640" y="6355080"/>
+            <a:off x="548640" y="6382512"/>
             <a:ext cx="5486400" cy="274320"/>
           </a:xfrm>
           <a:prstGeom prst="rect">
@@ -11198,7 +10697,7 @@
         </p:nvSpPr>
         <p:spPr>
           <a:xfrm>
-            <a:off x="548640" y="640080"/>
+            <a:off x="548640" y="658368"/>
             <a:ext cx="11064240" cy="640080"/>
           </a:xfrm>
           <a:prstGeom prst="rect">
@@ -11237,8 +10736,8 @@
         </p:nvSpPr>
         <p:spPr>
           <a:xfrm>
-            <a:off x="548640" y="1463040"/>
-            <a:ext cx="11064240" cy="365760"/>
+            <a:off x="548640" y="1444752"/>
+            <a:ext cx="11064240" cy="320040"/>
           </a:xfrm>
           <a:prstGeom prst="rect">
             <a:avLst/>
@@ -11262,7 +10761,7 @@
                 <a:ea typeface="Calibri" pitchFamily="34" charset="-122"/>
                 <a:cs typeface="Calibri" pitchFamily="34" charset="-120"/>
               </a:rPr>
-              <a:t>会議室が「同期データなし」→ Apps Script「実行数」で syncRoomAvailability を確認</a:t>
+              <a:t>会議室が「同期データなし」→ Apps Scriptの「実行数」で確認</a:t>
             </a:r>
             <a:endParaRPr lang="en-US" sz="1400" dirty="0"/>
           </a:p>
@@ -11276,12 +10775,12 @@
         </p:nvSpPr>
         <p:spPr>
           <a:xfrm>
-            <a:off x="548640" y="1965960"/>
-            <a:ext cx="2697480" cy="1554480"/>
+            <a:off x="548640" y="1874520"/>
+            <a:ext cx="2697480" cy="1691640"/>
           </a:xfrm>
           <a:prstGeom prst="roundRect">
             <a:avLst>
-              <a:gd name="adj" fmla="val 5294"/>
+              <a:gd name="adj" fmla="val 4865"/>
             </a:avLst>
           </a:prstGeom>
           <a:solidFill>
@@ -11310,24 +10809,24 @@
         </p:nvSpPr>
         <p:spPr>
           <a:xfrm>
-            <a:off x="731520" y="2167128"/>
-            <a:ext cx="2331720" cy="457200"/>
-          </a:xfrm>
-          <a:prstGeom prst="rect">
-            <a:avLst/>
-          </a:prstGeom>
-          <a:noFill/>
-          <a:ln/>
-        </p:spPr>
-        <p:txBody>
-          <a:bodyPr wrap="square" lIns="0" tIns="0" rIns="0" bIns="0" rtlCol="0" anchor="ctr"/>
-          <a:lstStyle/>
-          <a:p>
-            <a:pPr indent="0" marL="0">
-              <a:buNone/>
-            </a:pPr>
-            <a:r>
-              <a:rPr lang="en-US" sz="1700" b="1" dirty="0">
+            <a:off x="731520" y="2029968"/>
+            <a:ext cx="2331720" cy="411480"/>
+          </a:xfrm>
+          <a:prstGeom prst="rect">
+            <a:avLst/>
+          </a:prstGeom>
+          <a:noFill/>
+          <a:ln/>
+        </p:spPr>
+        <p:txBody>
+          <a:bodyPr wrap="square" lIns="0" tIns="0" rIns="0" bIns="0" rtlCol="0" anchor="ctr"/>
+          <a:lstStyle/>
+          <a:p>
+            <a:pPr indent="0" marL="0">
+              <a:buNone/>
+            </a:pPr>
+            <a:r>
+              <a:rPr lang="en-US" sz="1800" b="1" dirty="0">
                 <a:solidFill>
                   <a:srgbClr val="1E2761"/>
                 </a:solidFill>
@@ -11337,7 +10836,7 @@
               </a:rPr>
               <a:t>実行が無い</a:t>
             </a:r>
-            <a:endParaRPr lang="en-US" sz="1700" dirty="0"/>
+            <a:endParaRPr lang="en-US" sz="1800" dirty="0"/>
           </a:p>
         </p:txBody>
       </p:sp>
@@ -11349,8 +10848,47 @@
         </p:nvSpPr>
         <p:spPr>
           <a:xfrm>
-            <a:off x="731520" y="2679192"/>
-            <a:ext cx="2331720" cy="731520"/>
+            <a:off x="731520" y="2487168"/>
+            <a:ext cx="2331720" cy="365760"/>
+          </a:xfrm>
+          <a:prstGeom prst="rect">
+            <a:avLst/>
+          </a:prstGeom>
+          <a:noFill/>
+          <a:ln/>
+        </p:spPr>
+        <p:txBody>
+          <a:bodyPr wrap="square" lIns="0" tIns="0" rIns="0" bIns="0" rtlCol="0" anchor="ctr"/>
+          <a:lstStyle/>
+          <a:p>
+            <a:pPr indent="0" marL="0">
+              <a:buNone/>
+            </a:pPr>
+            <a:r>
+              <a:rPr lang="en-US" sz="1200" b="1" dirty="0">
+                <a:solidFill>
+                  <a:srgbClr val="2A2E45"/>
+                </a:solidFill>
+                <a:latin typeface="Calibri" pitchFamily="34" charset="0"/>
+                <a:ea typeface="Calibri" pitchFamily="34" charset="-122"/>
+                <a:cs typeface="Calibri" pitchFamily="34" charset="-120"/>
+              </a:rPr>
+              <a:t>トリガー停止</a:t>
+            </a:r>
+            <a:endParaRPr lang="en-US" sz="1200" dirty="0"/>
+          </a:p>
+        </p:txBody>
+      </p:sp>
+      <p:sp>
+        <p:nvSpPr>
+          <p:cNvPr id="8" name="Text 6"/>
+          <p:cNvSpPr txBox="1"/>
+          <p:nvPr/>
+        </p:nvSpPr>
+        <p:spPr>
+          <a:xfrm>
+            <a:off x="731520" y="2852928"/>
+            <a:ext cx="2331720" cy="548640"/>
           </a:xfrm>
           <a:prstGeom prst="rect">
             <a:avLst/>
@@ -11364,20 +10902,20 @@
           <a:p>
             <a:pPr indent="0" marL="0">
               <a:lnSpc>
-                <a:spcPct val="115000"/>
+                <a:spcPct val="110000"/>
               </a:lnSpc>
               <a:buNone/>
             </a:pPr>
             <a:r>
               <a:rPr lang="en-US" sz="1150" dirty="0">
                 <a:solidFill>
-                  <a:srgbClr val="2A2E45"/>
-                </a:solidFill>
-                <a:latin typeface="Calibri" pitchFamily="34" charset="0"/>
-                <a:ea typeface="Calibri" pitchFamily="34" charset="-122"/>
-                <a:cs typeface="Calibri" pitchFamily="34" charset="-120"/>
-              </a:rPr>
-              <a:t>トリガー停止 → setupTrigger 再実行</a:t>
+                  <a:srgbClr val="6B7280"/>
+                </a:solidFill>
+                <a:latin typeface="Calibri" pitchFamily="34" charset="0"/>
+                <a:ea typeface="Calibri" pitchFamily="34" charset="-122"/>
+                <a:cs typeface="Calibri" pitchFamily="34" charset="-120"/>
+              </a:rPr>
+              <a:t>→ setupTrigger 再実行</a:t>
             </a:r>
             <a:endParaRPr lang="en-US" sz="1150" dirty="0"/>
           </a:p>
@@ -11385,18 +10923,18 @@
       </p:sp>
       <p:sp>
         <p:nvSpPr>
-          <p:cNvPr id="8" name="Shape 6"/>
+          <p:cNvPr id="9" name="Shape 7"/>
           <p:cNvSpPr/>
           <p:nvPr/>
         </p:nvSpPr>
         <p:spPr>
           <a:xfrm>
-            <a:off x="3410712" y="1965960"/>
-            <a:ext cx="2697480" cy="1554480"/>
+            <a:off x="3410712" y="1874520"/>
+            <a:ext cx="2697480" cy="1691640"/>
           </a:xfrm>
           <a:prstGeom prst="roundRect">
             <a:avLst>
-              <a:gd name="adj" fmla="val 5294"/>
+              <a:gd name="adj" fmla="val 4865"/>
             </a:avLst>
           </a:prstGeom>
           <a:solidFill>
@@ -11419,30 +10957,30 @@
       </p:sp>
       <p:sp>
         <p:nvSpPr>
-          <p:cNvPr id="9" name="Text 7"/>
-          <p:cNvSpPr txBox="1"/>
-          <p:nvPr/>
-        </p:nvSpPr>
-        <p:spPr>
-          <a:xfrm>
-            <a:off x="3593592" y="2167128"/>
-            <a:ext cx="2331720" cy="457200"/>
-          </a:xfrm>
-          <a:prstGeom prst="rect">
-            <a:avLst/>
-          </a:prstGeom>
-          <a:noFill/>
-          <a:ln/>
-        </p:spPr>
-        <p:txBody>
-          <a:bodyPr wrap="square" lIns="0" tIns="0" rIns="0" bIns="0" rtlCol="0" anchor="ctr"/>
-          <a:lstStyle/>
-          <a:p>
-            <a:pPr indent="0" marL="0">
-              <a:buNone/>
-            </a:pPr>
-            <a:r>
-              <a:rPr lang="en-US" sz="1700" b="1" dirty="0">
+          <p:cNvPr id="10" name="Text 8"/>
+          <p:cNvSpPr txBox="1"/>
+          <p:nvPr/>
+        </p:nvSpPr>
+        <p:spPr>
+          <a:xfrm>
+            <a:off x="3593592" y="2029968"/>
+            <a:ext cx="2331720" cy="411480"/>
+          </a:xfrm>
+          <a:prstGeom prst="rect">
+            <a:avLst/>
+          </a:prstGeom>
+          <a:noFill/>
+          <a:ln/>
+        </p:spPr>
+        <p:txBody>
+          <a:bodyPr wrap="square" lIns="0" tIns="0" rIns="0" bIns="0" rtlCol="0" anchor="ctr"/>
+          <a:lstStyle/>
+          <a:p>
+            <a:pPr indent="0" marL="0">
+              <a:buNone/>
+            </a:pPr>
+            <a:r>
+              <a:rPr lang="en-US" sz="1800" b="1" dirty="0">
                 <a:solidFill>
                   <a:srgbClr val="B23A48"/>
                 </a:solidFill>
@@ -11452,20 +10990,59 @@
               </a:rPr>
               <a:t>405</a:t>
             </a:r>
-            <a:endParaRPr lang="en-US" sz="1700" dirty="0"/>
-          </a:p>
-        </p:txBody>
-      </p:sp>
-      <p:sp>
-        <p:nvSpPr>
-          <p:cNvPr id="10" name="Text 8"/>
-          <p:cNvSpPr txBox="1"/>
-          <p:nvPr/>
-        </p:nvSpPr>
-        <p:spPr>
-          <a:xfrm>
-            <a:off x="3593592" y="2679192"/>
-            <a:ext cx="2331720" cy="731520"/>
+            <a:endParaRPr lang="en-US" sz="1800" dirty="0"/>
+          </a:p>
+        </p:txBody>
+      </p:sp>
+      <p:sp>
+        <p:nvSpPr>
+          <p:cNvPr id="11" name="Text 9"/>
+          <p:cNvSpPr txBox="1"/>
+          <p:nvPr/>
+        </p:nvSpPr>
+        <p:spPr>
+          <a:xfrm>
+            <a:off x="3593592" y="2487168"/>
+            <a:ext cx="2331720" cy="365760"/>
+          </a:xfrm>
+          <a:prstGeom prst="rect">
+            <a:avLst/>
+          </a:prstGeom>
+          <a:noFill/>
+          <a:ln/>
+        </p:spPr>
+        <p:txBody>
+          <a:bodyPr wrap="square" lIns="0" tIns="0" rIns="0" bIns="0" rtlCol="0" anchor="ctr"/>
+          <a:lstStyle/>
+          <a:p>
+            <a:pPr indent="0" marL="0">
+              <a:buNone/>
+            </a:pPr>
+            <a:r>
+              <a:rPr lang="en-US" sz="1200" b="1" dirty="0">
+                <a:solidFill>
+                  <a:srgbClr val="2A2E45"/>
+                </a:solidFill>
+                <a:latin typeface="Calibri" pitchFamily="34" charset="0"/>
+                <a:ea typeface="Calibri" pitchFamily="34" charset="-122"/>
+                <a:cs typeface="Calibri" pitchFamily="34" charset="-120"/>
+              </a:rPr>
+              <a:t>URLが独自ドメイン</a:t>
+            </a:r>
+            <a:endParaRPr lang="en-US" sz="1200" dirty="0"/>
+          </a:p>
+        </p:txBody>
+      </p:sp>
+      <p:sp>
+        <p:nvSpPr>
+          <p:cNvPr id="12" name="Text 10"/>
+          <p:cNvSpPr txBox="1"/>
+          <p:nvPr/>
+        </p:nvSpPr>
+        <p:spPr>
+          <a:xfrm>
+            <a:off x="3593592" y="2852928"/>
+            <a:ext cx="2331720" cy="548640"/>
           </a:xfrm>
           <a:prstGeom prst="rect">
             <a:avLst/>
@@ -11479,20 +11056,20 @@
           <a:p>
             <a:pPr indent="0" marL="0">
               <a:lnSpc>
-                <a:spcPct val="115000"/>
+                <a:spcPct val="110000"/>
               </a:lnSpc>
               <a:buNone/>
             </a:pPr>
             <a:r>
               <a:rPr lang="en-US" sz="1150" dirty="0">
                 <a:solidFill>
-                  <a:srgbClr val="2A2E45"/>
-                </a:solidFill>
-                <a:latin typeface="Calibri" pitchFamily="34" charset="0"/>
-                <a:ea typeface="Calibri" pitchFamily="34" charset="-122"/>
-                <a:cs typeface="Calibri" pitchFamily="34" charset="-120"/>
-              </a:rPr>
-              <a:t>RECEPTION_URL が独自ドメイン → 直URLに変更</a:t>
+                  <a:srgbClr val="6B7280"/>
+                </a:solidFill>
+                <a:latin typeface="Calibri" pitchFamily="34" charset="0"/>
+                <a:ea typeface="Calibri" pitchFamily="34" charset="-122"/>
+                <a:cs typeface="Calibri" pitchFamily="34" charset="-120"/>
+              </a:rPr>
+              <a:t>→ 直URLに変更</a:t>
             </a:r>
             <a:endParaRPr lang="en-US" sz="1150" dirty="0"/>
           </a:p>
@@ -11500,18 +11077,18 @@
       </p:sp>
       <p:sp>
         <p:nvSpPr>
-          <p:cNvPr id="11" name="Shape 9"/>
+          <p:cNvPr id="13" name="Shape 11"/>
           <p:cNvSpPr/>
           <p:nvPr/>
         </p:nvSpPr>
         <p:spPr>
           <a:xfrm>
-            <a:off x="6272784" y="1965960"/>
-            <a:ext cx="2697480" cy="1554480"/>
+            <a:off x="6272784" y="1874520"/>
+            <a:ext cx="2697480" cy="1691640"/>
           </a:xfrm>
           <a:prstGeom prst="roundRect">
             <a:avLst>
-              <a:gd name="adj" fmla="val 5294"/>
+              <a:gd name="adj" fmla="val 4865"/>
             </a:avLst>
           </a:prstGeom>
           <a:solidFill>
@@ -11534,30 +11111,30 @@
       </p:sp>
       <p:sp>
         <p:nvSpPr>
-          <p:cNvPr id="12" name="Text 10"/>
-          <p:cNvSpPr txBox="1"/>
-          <p:nvPr/>
-        </p:nvSpPr>
-        <p:spPr>
-          <a:xfrm>
-            <a:off x="6455664" y="2167128"/>
-            <a:ext cx="2331720" cy="457200"/>
-          </a:xfrm>
-          <a:prstGeom prst="rect">
-            <a:avLst/>
-          </a:prstGeom>
-          <a:noFill/>
-          <a:ln/>
-        </p:spPr>
-        <p:txBody>
-          <a:bodyPr wrap="square" lIns="0" tIns="0" rIns="0" bIns="0" rtlCol="0" anchor="ctr"/>
-          <a:lstStyle/>
-          <a:p>
-            <a:pPr indent="0" marL="0">
-              <a:buNone/>
-            </a:pPr>
-            <a:r>
-              <a:rPr lang="en-US" sz="1700" b="1" dirty="0">
+          <p:cNvPr id="14" name="Text 12"/>
+          <p:cNvSpPr txBox="1"/>
+          <p:nvPr/>
+        </p:nvSpPr>
+        <p:spPr>
+          <a:xfrm>
+            <a:off x="6455664" y="2029968"/>
+            <a:ext cx="2331720" cy="411480"/>
+          </a:xfrm>
+          <a:prstGeom prst="rect">
+            <a:avLst/>
+          </a:prstGeom>
+          <a:noFill/>
+          <a:ln/>
+        </p:spPr>
+        <p:txBody>
+          <a:bodyPr wrap="square" lIns="0" tIns="0" rIns="0" bIns="0" rtlCol="0" anchor="ctr"/>
+          <a:lstStyle/>
+          <a:p>
+            <a:pPr indent="0" marL="0">
+              <a:buNone/>
+            </a:pPr>
+            <a:r>
+              <a:rPr lang="en-US" sz="1800" b="1" dirty="0">
                 <a:solidFill>
                   <a:srgbClr val="C8860D"/>
                 </a:solidFill>
@@ -11567,20 +11144,59 @@
               </a:rPr>
               <a:t>401</a:t>
             </a:r>
-            <a:endParaRPr lang="en-US" sz="1700" dirty="0"/>
-          </a:p>
-        </p:txBody>
-      </p:sp>
-      <p:sp>
-        <p:nvSpPr>
-          <p:cNvPr id="13" name="Text 11"/>
-          <p:cNvSpPr txBox="1"/>
-          <p:nvPr/>
-        </p:nvSpPr>
-        <p:spPr>
-          <a:xfrm>
-            <a:off x="6455664" y="2679192"/>
-            <a:ext cx="2331720" cy="731520"/>
+            <a:endParaRPr lang="en-US" sz="1800" dirty="0"/>
+          </a:p>
+        </p:txBody>
+      </p:sp>
+      <p:sp>
+        <p:nvSpPr>
+          <p:cNvPr id="15" name="Text 13"/>
+          <p:cNvSpPr txBox="1"/>
+          <p:nvPr/>
+        </p:nvSpPr>
+        <p:spPr>
+          <a:xfrm>
+            <a:off x="6455664" y="2487168"/>
+            <a:ext cx="2331720" cy="365760"/>
+          </a:xfrm>
+          <a:prstGeom prst="rect">
+            <a:avLst/>
+          </a:prstGeom>
+          <a:noFill/>
+          <a:ln/>
+        </p:spPr>
+        <p:txBody>
+          <a:bodyPr wrap="square" lIns="0" tIns="0" rIns="0" bIns="0" rtlCol="0" anchor="ctr"/>
+          <a:lstStyle/>
+          <a:p>
+            <a:pPr indent="0" marL="0">
+              <a:buNone/>
+            </a:pPr>
+            <a:r>
+              <a:rPr lang="en-US" sz="1200" b="1" dirty="0">
+                <a:solidFill>
+                  <a:srgbClr val="2A2E45"/>
+                </a:solidFill>
+                <a:latin typeface="Calibri" pitchFamily="34" charset="0"/>
+                <a:ea typeface="Calibri" pitchFamily="34" charset="-122"/>
+                <a:cs typeface="Calibri" pitchFamily="34" charset="-120"/>
+              </a:rPr>
+              <a:t>SECRET不一致</a:t>
+            </a:r>
+            <a:endParaRPr lang="en-US" sz="1200" dirty="0"/>
+          </a:p>
+        </p:txBody>
+      </p:sp>
+      <p:sp>
+        <p:nvSpPr>
+          <p:cNvPr id="16" name="Text 14"/>
+          <p:cNvSpPr txBox="1"/>
+          <p:nvPr/>
+        </p:nvSpPr>
+        <p:spPr>
+          <a:xfrm>
+            <a:off x="6455664" y="2852928"/>
+            <a:ext cx="2331720" cy="548640"/>
           </a:xfrm>
           <a:prstGeom prst="rect">
             <a:avLst/>
@@ -11594,20 +11210,20 @@
           <a:p>
             <a:pPr indent="0" marL="0">
               <a:lnSpc>
-                <a:spcPct val="115000"/>
+                <a:spcPct val="110000"/>
               </a:lnSpc>
               <a:buNone/>
             </a:pPr>
             <a:r>
               <a:rPr lang="en-US" sz="1150" dirty="0">
                 <a:solidFill>
-                  <a:srgbClr val="2A2E45"/>
-                </a:solidFill>
-                <a:latin typeface="Calibri" pitchFamily="34" charset="0"/>
-                <a:ea typeface="Calibri" pitchFamily="34" charset="-122"/>
-                <a:cs typeface="Calibri" pitchFamily="34" charset="-120"/>
-              </a:rPr>
-              <a:t>INVITATION_SECRET 不一致 → setSecretOnce で一致</a:t>
+                  <a:srgbClr val="6B7280"/>
+                </a:solidFill>
+                <a:latin typeface="Calibri" pitchFamily="34" charset="0"/>
+                <a:ea typeface="Calibri" pitchFamily="34" charset="-122"/>
+                <a:cs typeface="Calibri" pitchFamily="34" charset="-120"/>
+              </a:rPr>
+              <a:t>→ 値を一致させる</a:t>
             </a:r>
             <a:endParaRPr lang="en-US" sz="1150" dirty="0"/>
           </a:p>
@@ -11615,18 +11231,18 @@
       </p:sp>
       <p:sp>
         <p:nvSpPr>
-          <p:cNvPr id="14" name="Shape 12"/>
+          <p:cNvPr id="17" name="Shape 15"/>
           <p:cNvSpPr/>
           <p:nvPr/>
         </p:nvSpPr>
         <p:spPr>
           <a:xfrm>
-            <a:off x="9134856" y="1965960"/>
-            <a:ext cx="2697480" cy="1554480"/>
+            <a:off x="9134856" y="1874520"/>
+            <a:ext cx="2697480" cy="1691640"/>
           </a:xfrm>
           <a:prstGeom prst="roundRect">
             <a:avLst>
-              <a:gd name="adj" fmla="val 5294"/>
+              <a:gd name="adj" fmla="val 4865"/>
             </a:avLst>
           </a:prstGeom>
           <a:solidFill>
@@ -11649,30 +11265,30 @@
       </p:sp>
       <p:sp>
         <p:nvSpPr>
-          <p:cNvPr id="15" name="Text 13"/>
-          <p:cNvSpPr txBox="1"/>
-          <p:nvPr/>
-        </p:nvSpPr>
-        <p:spPr>
-          <a:xfrm>
-            <a:off x="9317736" y="2167128"/>
-            <a:ext cx="2331720" cy="457200"/>
-          </a:xfrm>
-          <a:prstGeom prst="rect">
-            <a:avLst/>
-          </a:prstGeom>
-          <a:noFill/>
-          <a:ln/>
-        </p:spPr>
-        <p:txBody>
-          <a:bodyPr wrap="square" lIns="0" tIns="0" rIns="0" bIns="0" rtlCol="0" anchor="ctr"/>
-          <a:lstStyle/>
-          <a:p>
-            <a:pPr indent="0" marL="0">
-              <a:buNone/>
-            </a:pPr>
-            <a:r>
-              <a:rPr lang="en-US" sz="1700" b="1" dirty="0">
+          <p:cNvPr id="18" name="Text 16"/>
+          <p:cNvSpPr txBox="1"/>
+          <p:nvPr/>
+        </p:nvSpPr>
+        <p:spPr>
+          <a:xfrm>
+            <a:off x="9317736" y="2029968"/>
+            <a:ext cx="2331720" cy="411480"/>
+          </a:xfrm>
+          <a:prstGeom prst="rect">
+            <a:avLst/>
+          </a:prstGeom>
+          <a:noFill/>
+          <a:ln/>
+        </p:spPr>
+        <p:txBody>
+          <a:bodyPr wrap="square" lIns="0" tIns="0" rIns="0" bIns="0" rtlCol="0" anchor="ctr"/>
+          <a:lstStyle/>
+          <a:p>
+            <a:pPr indent="0" marL="0">
+              <a:buNone/>
+            </a:pPr>
+            <a:r>
+              <a:rPr lang="en-US" sz="1800" b="1" dirty="0">
                 <a:solidFill>
                   <a:srgbClr val="1C7293"/>
                 </a:solidFill>
@@ -11682,20 +11298,59 @@
               </a:rPr>
               <a:t>500</a:t>
             </a:r>
-            <a:endParaRPr lang="en-US" sz="1700" dirty="0"/>
-          </a:p>
-        </p:txBody>
-      </p:sp>
-      <p:sp>
-        <p:nvSpPr>
-          <p:cNvPr id="16" name="Text 14"/>
-          <p:cNvSpPr txBox="1"/>
-          <p:nvPr/>
-        </p:nvSpPr>
-        <p:spPr>
-          <a:xfrm>
-            <a:off x="9317736" y="2679192"/>
-            <a:ext cx="2331720" cy="731520"/>
+            <a:endParaRPr lang="en-US" sz="1800" dirty="0"/>
+          </a:p>
+        </p:txBody>
+      </p:sp>
+      <p:sp>
+        <p:nvSpPr>
+          <p:cNvPr id="19" name="Text 17"/>
+          <p:cNvSpPr txBox="1"/>
+          <p:nvPr/>
+        </p:nvSpPr>
+        <p:spPr>
+          <a:xfrm>
+            <a:off x="9317736" y="2487168"/>
+            <a:ext cx="2331720" cy="365760"/>
+          </a:xfrm>
+          <a:prstGeom prst="rect">
+            <a:avLst/>
+          </a:prstGeom>
+          <a:noFill/>
+          <a:ln/>
+        </p:spPr>
+        <p:txBody>
+          <a:bodyPr wrap="square" lIns="0" tIns="0" rIns="0" bIns="0" rtlCol="0" anchor="ctr"/>
+          <a:lstStyle/>
+          <a:p>
+            <a:pPr indent="0" marL="0">
+              <a:buNone/>
+            </a:pPr>
+            <a:r>
+              <a:rPr lang="en-US" sz="1200" b="1" dirty="0">
+                <a:solidFill>
+                  <a:srgbClr val="2A2E45"/>
+                </a:solidFill>
+                <a:latin typeface="Calibri" pitchFamily="34" charset="0"/>
+                <a:ea typeface="Calibri" pitchFamily="34" charset="-122"/>
+                <a:cs typeface="Calibri" pitchFamily="34" charset="-120"/>
+              </a:rPr>
+              <a:t>API/DB側</a:t>
+            </a:r>
+            <a:endParaRPr lang="en-US" sz="1200" dirty="0"/>
+          </a:p>
+        </p:txBody>
+      </p:sp>
+      <p:sp>
+        <p:nvSpPr>
+          <p:cNvPr id="20" name="Text 18"/>
+          <p:cNvSpPr txBox="1"/>
+          <p:nvPr/>
+        </p:nvSpPr>
+        <p:spPr>
+          <a:xfrm>
+            <a:off x="9317736" y="2852928"/>
+            <a:ext cx="2331720" cy="548640"/>
           </a:xfrm>
           <a:prstGeom prst="rect">
             <a:avLst/>
@@ -11709,20 +11364,20 @@
           <a:p>
             <a:pPr indent="0" marL="0">
               <a:lnSpc>
-                <a:spcPct val="115000"/>
+                <a:spcPct val="110000"/>
               </a:lnSpc>
               <a:buNone/>
             </a:pPr>
             <a:r>
               <a:rPr lang="en-US" sz="1150" dirty="0">
                 <a:solidFill>
-                  <a:srgbClr val="2A2E45"/>
-                </a:solidFill>
-                <a:latin typeface="Calibri" pitchFamily="34" charset="0"/>
-                <a:ea typeface="Calibri" pitchFamily="34" charset="-122"/>
-                <a:cs typeface="Calibri" pitchFamily="34" charset="-120"/>
-              </a:rPr>
-              <a:t>API/DB側 → スキーマ確認（開発担当へ）</a:t>
+                  <a:srgbClr val="6B7280"/>
+                </a:solidFill>
+                <a:latin typeface="Calibri" pitchFamily="34" charset="0"/>
+                <a:ea typeface="Calibri" pitchFamily="34" charset="-122"/>
+                <a:cs typeface="Calibri" pitchFamily="34" charset="-120"/>
+              </a:rPr>
+              <a:t>→ スキーマ確認</a:t>
             </a:r>
             <a:endParaRPr lang="en-US" sz="1150" dirty="0"/>
           </a:p>
@@ -11730,18 +11385,18 @@
       </p:sp>
       <p:sp>
         <p:nvSpPr>
-          <p:cNvPr id="17" name="Shape 15"/>
+          <p:cNvPr id="21" name="Shape 19"/>
           <p:cNvSpPr/>
           <p:nvPr/>
         </p:nvSpPr>
         <p:spPr>
           <a:xfrm>
-            <a:off x="548640" y="3794760"/>
-            <a:ext cx="11064240" cy="2057400"/>
+            <a:off x="548640" y="3840480"/>
+            <a:ext cx="11064240" cy="2011680"/>
           </a:xfrm>
           <a:prstGeom prst="roundRect">
             <a:avLst>
-              <a:gd name="adj" fmla="val 4000"/>
+              <a:gd name="adj" fmla="val 4091"/>
             </a:avLst>
           </a:prstGeom>
           <a:solidFill>
@@ -11764,13 +11419,13 @@
       </p:sp>
       <p:sp>
         <p:nvSpPr>
-          <p:cNvPr id="18" name="Text 16"/>
-          <p:cNvSpPr txBox="1"/>
-          <p:nvPr/>
-        </p:nvSpPr>
-        <p:spPr>
-          <a:xfrm>
-            <a:off x="822960" y="3950208"/>
+          <p:cNvPr id="22" name="Text 20"/>
+          <p:cNvSpPr txBox="1"/>
+          <p:nvPr/>
+        </p:nvSpPr>
+        <p:spPr>
+          <a:xfrm>
+            <a:off x="841248" y="3977640"/>
             <a:ext cx="10058400" cy="320040"/>
           </a:xfrm>
           <a:prstGeom prst="rect">
@@ -11803,36 +11458,36 @@
       </p:sp>
       <p:sp>
         <p:nvSpPr>
-          <p:cNvPr id="19" name="Text 17"/>
-          <p:cNvSpPr txBox="1"/>
-          <p:nvPr/>
-        </p:nvSpPr>
-        <p:spPr>
-          <a:xfrm>
-            <a:off x="868680" y="4315968"/>
-            <a:ext cx="10515600" cy="1463040"/>
-          </a:xfrm>
-          <a:prstGeom prst="rect">
-            <a:avLst/>
-          </a:prstGeom>
-          <a:noFill/>
-          <a:ln/>
-        </p:spPr>
-        <p:txBody>
-          <a:bodyPr wrap="square" lIns="0" tIns="0" rIns="0" bIns="0" rtlCol="0" anchor="ctr"/>
+          <p:cNvPr id="23" name="Text 21"/>
+          <p:cNvSpPr txBox="1"/>
+          <p:nvPr/>
+        </p:nvSpPr>
+        <p:spPr>
+          <a:xfrm>
+            <a:off x="896112" y="4343400"/>
+            <a:ext cx="10515600" cy="1417320"/>
+          </a:xfrm>
+          <a:prstGeom prst="rect">
+            <a:avLst/>
+          </a:prstGeom>
+          <a:noFill/>
+          <a:ln/>
+        </p:spPr>
+        <p:txBody>
+          <a:bodyPr wrap="square" lIns="0" tIns="0" rIns="0" bIns="0" rtlCol="0" anchor="t"/>
           <a:lstStyle/>
           <a:p>
             <a:pPr indent="0" marL="0">
               <a:lnSpc>
-                <a:spcPct val="110000"/>
+                <a:spcPct val="108000"/>
               </a:lnSpc>
               <a:spcAft>
-                <a:spcPts val="600"/>
+                <a:spcPts val="500"/>
               </a:spcAft>
               <a:buNone/>
             </a:pPr>
             <a:r>
-              <a:rPr lang="en-US" sz="1150" dirty="0">
+              <a:rPr lang="en-US" sz="1200" dirty="0">
                 <a:solidFill>
                   <a:srgbClr val="2A2E45"/>
                 </a:solidFill>
@@ -11840,19 +11495,19 @@
                 <a:ea typeface="Calibri" pitchFamily="34" charset="-122"/>
                 <a:cs typeface="Calibri" pitchFamily="34" charset="-120"/>
               </a:rPr>
-              <a:t>Chat通知が来ない … reception_settings.google_chat_webhook（未設定時は環境変数にフォールバック）／個別DMは staff.notification_webhook</a:t>
+              <a:t>Chat通知が来ない … 設定のWebhook／個別DMはstaffのnotification_webhook</a:t>
             </a:r>
             <a:pPr indent="0" marL="0">
               <a:lnSpc>
-                <a:spcPct val="110000"/>
+                <a:spcPct val="108000"/>
               </a:lnSpc>
               <a:spcAft>
-                <a:spcPts val="600"/>
+                <a:spcPts val="500"/>
               </a:spcAft>
               <a:buNone/>
             </a:pPr>
             <a:r>
-              <a:rPr lang="en-US" sz="1150" dirty="0">
+              <a:rPr lang="en-US" sz="1200" dirty="0">
                 <a:solidFill>
                   <a:srgbClr val="2A2E45"/>
                 </a:solidFill>
@@ -11860,19 +11515,19 @@
                 <a:ea typeface="Calibri" pitchFamily="34" charset="-122"/>
                 <a:cs typeface="Calibri" pitchFamily="34" charset="-120"/>
               </a:rPr>
-              <a:t>管理画面PINを忘れた … 管理画面のPINリセット（admin_email 宛にメール、要 RESEND_API_KEY）</a:t>
+              <a:t>PIN忘れ … 管理画面でPINリセット（要 RESEND_API_KEY）</a:t>
             </a:r>
             <a:pPr indent="0" marL="0">
               <a:lnSpc>
-                <a:spcPct val="110000"/>
+                <a:spcPct val="108000"/>
               </a:lnSpc>
               <a:spcAft>
-                <a:spcPts val="600"/>
+                <a:spcPts val="500"/>
               </a:spcAft>
               <a:buNone/>
             </a:pPr>
             <a:r>
-              <a:rPr lang="en-US" sz="1150" dirty="0">
+              <a:rPr lang="en-US" sz="1200" dirty="0">
                 <a:solidFill>
                   <a:srgbClr val="2A2E45"/>
                 </a:solidFill>
@@ -11880,19 +11535,19 @@
                 <a:ea typeface="Calibri" pitchFamily="34" charset="-122"/>
                 <a:cs typeface="Calibri" pitchFamily="34" charset="-120"/>
               </a:rPr>
-              <a:t>招待QRが期限切れ … 来訪日が過去日だと無効（仕様）。過去日での作成は不可</a:t>
+              <a:t>QR期限切れ … 来訪日が過去日は無効（仕様）</a:t>
             </a:r>
             <a:pPr indent="0" marL="0">
               <a:lnSpc>
-                <a:spcPct val="110000"/>
+                <a:spcPct val="108000"/>
               </a:lnSpc>
               <a:spcAft>
-                <a:spcPts val="600"/>
+                <a:spcPts val="500"/>
               </a:spcAft>
               <a:buNone/>
             </a:pPr>
             <a:r>
-              <a:rPr lang="en-US" sz="1150" dirty="0">
+              <a:rPr lang="en-US" sz="1200" dirty="0">
                 <a:solidFill>
                   <a:srgbClr val="2A2E45"/>
                 </a:solidFill>
@@ -11900,21 +11555,21 @@
                 <a:ea typeface="Calibri" pitchFamily="34" charset="-122"/>
                 <a:cs typeface="Calibri" pitchFamily="34" charset="-120"/>
               </a:rPr>
-              <a:t>対応者OAuthエラー … CLIENT_ID/SECRET・リダイレクトURI・Workspaceドメイン制限を確認</a:t>
-            </a:r>
-            <a:endParaRPr lang="en-US" sz="1150" dirty="0"/>
-          </a:p>
-        </p:txBody>
-      </p:sp>
-      <p:sp>
-        <p:nvSpPr>
-          <p:cNvPr id="20" name="Text 18"/>
-          <p:cNvSpPr txBox="1"/>
-          <p:nvPr/>
-        </p:nvSpPr>
-        <p:spPr>
-          <a:xfrm>
-            <a:off x="11430000" y="6355080"/>
+              <a:t>OAuthエラー … CLIENT_ID/SECRET・リダイレクトURI・ドメイン制限を確認</a:t>
+            </a:r>
+            <a:endParaRPr lang="en-US" sz="1200" dirty="0"/>
+          </a:p>
+        </p:txBody>
+      </p:sp>
+      <p:sp>
+        <p:nvSpPr>
+          <p:cNvPr id="24" name="Text 22"/>
+          <p:cNvSpPr txBox="1"/>
+          <p:nvPr/>
+        </p:nvSpPr>
+        <p:spPr>
+          <a:xfrm>
+            <a:off x="11430000" y="6382512"/>
             <a:ext cx="457200" cy="274320"/>
           </a:xfrm>
           <a:prstGeom prst="rect">
@@ -11947,13 +11602,13 @@
       </p:sp>
       <p:sp>
         <p:nvSpPr>
-          <p:cNvPr id="21" name="Text 19"/>
-          <p:cNvSpPr txBox="1"/>
-          <p:nvPr/>
-        </p:nvSpPr>
-        <p:spPr>
-          <a:xfrm>
-            <a:off x="548640" y="6355080"/>
+          <p:cNvPr id="25" name="Text 23"/>
+          <p:cNvSpPr txBox="1"/>
+          <p:nvPr/>
+        </p:nvSpPr>
+        <p:spPr>
+          <a:xfrm>
+            <a:off x="548640" y="6382512"/>
             <a:ext cx="5486400" cy="274320"/>
           </a:xfrm>
           <a:prstGeom prst="rect">
@@ -12063,7 +11718,7 @@
         </p:nvSpPr>
         <p:spPr>
           <a:xfrm>
-            <a:off x="548640" y="640080"/>
+            <a:off x="548640" y="658368"/>
             <a:ext cx="11064240" cy="640080"/>
           </a:xfrm>
           <a:prstGeom prst="rect">
@@ -12088,7 +11743,7 @@
                 <a:ea typeface="Cambria" pitchFamily="34" charset="-122"/>
                 <a:cs typeface="Cambria" pitchFamily="34" charset="-120"/>
               </a:rPr>
-              <a:t>受け入れテスト結果（ラクネコ比較）</a:t>
+              <a:t>受け入れテスト結果</a:t>
             </a:r>
             <a:endParaRPr lang="en-US" sz="3000" dirty="0"/>
           </a:p>
@@ -12103,7 +11758,7 @@
         <p:spPr>
           <a:xfrm>
             <a:off x="548640" y="1554480"/>
-            <a:ext cx="3383280" cy="4297680"/>
+            <a:ext cx="3383280" cy="4206240"/>
           </a:xfrm>
           <a:prstGeom prst="roundRect">
             <a:avLst>
@@ -12136,7 +11791,7 @@
         </p:nvSpPr>
         <p:spPr>
           <a:xfrm>
-            <a:off x="777240" y="2194560"/>
+            <a:off x="777240" y="2148840"/>
             <a:ext cx="2926080" cy="365760"/>
           </a:xfrm>
           <a:prstGeom prst="rect">
@@ -12175,7 +11830,7 @@
         </p:nvSpPr>
         <p:spPr>
           <a:xfrm>
-            <a:off x="777240" y="2560320"/>
+            <a:off x="777240" y="2514600"/>
             <a:ext cx="2926080" cy="914400"/>
           </a:xfrm>
           <a:prstGeom prst="rect">
@@ -12192,7 +11847,7 @@
               <a:buNone/>
             </a:pPr>
             <a:r>
-              <a:rPr lang="en-US" sz="5400" b="1" dirty="0">
+              <a:rPr lang="en-US" sz="5200" b="1" dirty="0">
                 <a:solidFill>
                   <a:srgbClr val="FFFFFF"/>
                 </a:solidFill>
@@ -12202,7 +11857,7 @@
               </a:rPr>
               <a:t>完了</a:t>
             </a:r>
-            <a:endParaRPr lang="en-US" sz="5400" dirty="0"/>
+            <a:endParaRPr lang="en-US" sz="5200" dirty="0"/>
           </a:p>
         </p:txBody>
       </p:sp>
@@ -12214,7 +11869,7 @@
         </p:nvSpPr>
         <p:spPr>
           <a:xfrm>
-            <a:off x="777240" y="3657600"/>
+            <a:off x="777240" y="3611880"/>
             <a:ext cx="2926080" cy="1097280"/>
           </a:xfrm>
           <a:prstGeom prst="rect">
@@ -12242,7 +11897,7 @@
                 <a:ea typeface="Calibri" pitchFamily="34" charset="-122"/>
                 <a:cs typeface="Calibri" pitchFamily="34" charset="-120"/>
               </a:rPr>
-              <a:t>要修正3件すべて対応済み／残差異はOK・許容</a:t>
+              <a:t>要修正3件 対応済み／残りはOK・許容</a:t>
             </a:r>
             <a:endParaRPr lang="en-US" sz="1200" dirty="0"/>
           </a:p>
@@ -12349,7 +12004,7 @@
         </p:nvSpPr>
         <p:spPr>
           <a:xfrm>
-            <a:off x="5074920" y="1682496"/>
+            <a:off x="5074920" y="1700784"/>
             <a:ext cx="6400800" cy="365760"/>
           </a:xfrm>
           <a:prstGeom prst="rect">
@@ -12388,7 +12043,7 @@
         </p:nvSpPr>
         <p:spPr>
           <a:xfrm>
-            <a:off x="5074920" y="2057400"/>
+            <a:off x="5074920" y="2066544"/>
             <a:ext cx="6400800" cy="365760"/>
           </a:xfrm>
           <a:prstGeom prst="rect">
@@ -12413,7 +12068,7 @@
                 <a:ea typeface="Calibri" pitchFamily="34" charset="-122"/>
                 <a:cs typeface="Calibri" pitchFamily="34" charset="-120"/>
               </a:rPr>
-              <a:t>入退館記録に開始日〜終了日の指定を追加</a:t>
+              <a:t>開始日〜終了日で絞込み</a:t>
             </a:r>
             <a:endParaRPr lang="en-US" sz="1150" dirty="0"/>
           </a:p>
@@ -12520,7 +12175,7 @@
         </p:nvSpPr>
         <p:spPr>
           <a:xfrm>
-            <a:off x="5074920" y="2779776"/>
+            <a:off x="5074920" y="2798064"/>
             <a:ext cx="6400800" cy="365760"/>
           </a:xfrm>
           <a:prstGeom prst="rect">
@@ -12559,7 +12214,7 @@
         </p:nvSpPr>
         <p:spPr>
           <a:xfrm>
-            <a:off x="5074920" y="3154680"/>
+            <a:off x="5074920" y="3163824"/>
             <a:ext cx="6400800" cy="365760"/>
           </a:xfrm>
           <a:prstGeom prst="rect">
@@ -12584,7 +12239,7 @@
                 <a:ea typeface="Calibri" pitchFamily="34" charset="-122"/>
                 <a:cs typeface="Calibri" pitchFamily="34" charset="-120"/>
               </a:rPr>
-              <a:t>管理画面で設定 → 待ち受け画面に表示</a:t>
+              <a:t>待ち受け画面に表示</a:t>
             </a:r>
             <a:endParaRPr lang="en-US" sz="1150" dirty="0"/>
           </a:p>
@@ -12691,7 +12346,7 @@
         </p:nvSpPr>
         <p:spPr>
           <a:xfrm>
-            <a:off x="5074920" y="3877056"/>
+            <a:off x="5074920" y="3895344"/>
             <a:ext cx="6400800" cy="365760"/>
           </a:xfrm>
           <a:prstGeom prst="rect">
@@ -12730,7 +12385,7 @@
         </p:nvSpPr>
         <p:spPr>
           <a:xfrm>
-            <a:off x="5074920" y="4251960"/>
+            <a:off x="5074920" y="4261104"/>
             <a:ext cx="6400800" cy="365760"/>
           </a:xfrm>
           <a:prstGeom prst="rect">
@@ -12755,7 +12410,7 @@
                 <a:ea typeface="Calibri" pitchFamily="34" charset="-122"/>
                 <a:cs typeface="Calibri" pitchFamily="34" charset="-120"/>
               </a:rPr>
-              <a:t>入退館記録に列追加（CSV反映）</a:t>
+              <a:t>入退館記録に列追加</a:t>
             </a:r>
             <a:endParaRPr lang="en-US" sz="1150" dirty="0"/>
           </a:p>
@@ -12770,22 +12425,19 @@
         <p:spPr>
           <a:xfrm>
             <a:off x="4206240" y="5029200"/>
-            <a:ext cx="7406640" cy="640080"/>
-          </a:xfrm>
-          <a:prstGeom prst="rect">
-            <a:avLst/>
-          </a:prstGeom>
-          <a:noFill/>
-          <a:ln/>
-        </p:spPr>
-        <p:txBody>
-          <a:bodyPr wrap="square" lIns="0" tIns="0" rIns="0" bIns="0" rtlCol="0" anchor="ctr"/>
-          <a:lstStyle/>
-          <a:p>
-            <a:pPr indent="0" marL="0">
-              <a:lnSpc>
-                <a:spcPct val="120000"/>
-              </a:lnSpc>
+            <a:ext cx="7406640" cy="548640"/>
+          </a:xfrm>
+          <a:prstGeom prst="rect">
+            <a:avLst/>
+          </a:prstGeom>
+          <a:noFill/>
+          <a:ln/>
+        </p:spPr>
+        <p:txBody>
+          <a:bodyPr wrap="square" lIns="0" tIns="0" rIns="0" bIns="0" rtlCol="0" anchor="ctr"/>
+          <a:lstStyle/>
+          <a:p>
+            <a:pPr indent="0" marL="0">
               <a:buNone/>
             </a:pPr>
             <a:r>
@@ -12797,7 +12449,7 @@
                 <a:ea typeface="Calibri" pitchFamily="34" charset="-122"/>
                 <a:cs typeface="Calibri" pitchFamily="34" charset="-120"/>
               </a:rPr>
-              <a:t>ゴール：ラクネコと同一仕様ではなく、現在の受付業務が新システムで問題なく行えること。</a:t>
+              <a:t>ゴール：ラクネコと同一仕様ではなく、現在の受付業務が問題なく行えること。</a:t>
             </a:r>
             <a:endParaRPr lang="en-US" sz="1200" dirty="0"/>
           </a:p>
@@ -12811,7 +12463,7 @@
         </p:nvSpPr>
         <p:spPr>
           <a:xfrm>
-            <a:off x="11430000" y="6355080"/>
+            <a:off x="11430000" y="6382512"/>
             <a:ext cx="457200" cy="274320"/>
           </a:xfrm>
           <a:prstGeom prst="rect">
@@ -12850,7 +12502,7 @@
         </p:nvSpPr>
         <p:spPr>
           <a:xfrm>
-            <a:off x="548640" y="6355080"/>
+            <a:off x="548640" y="6382512"/>
             <a:ext cx="5486400" cy="274320"/>
           </a:xfrm>
           <a:prstGeom prst="rect">

--- a/docs/受付システム_保守引き継ぎ.pptx
+++ b/docs/受付システム_保守引き継ぎ.pptx
@@ -2069,6 +2069,9 @@
               </a:rPr>
               <a:t>対象：管理本部／情報システム部</a:t>
             </a:r>
+            <a:endParaRPr lang="en-US" sz="1400" dirty="0"/>
+          </a:p>
+          <a:p>
             <a:pPr indent="0" marL="0">
               <a:lnSpc>
                 <a:spcPct val="130000"/>
@@ -2372,14 +2375,15 @@
           <a:bodyPr wrap="square" lIns="0" tIns="0" rIns="0" bIns="0" rtlCol="0" anchor="t"/>
           <a:lstStyle/>
           <a:p>
-            <a:pPr indent="0" marL="0">
+            <a:pPr marL="342900" indent="-342900">
               <a:lnSpc>
-                <a:spcPct val="108000"/>
+                <a:spcPct val="110000"/>
               </a:lnSpc>
               <a:spcAft>
                 <a:spcPts val="800"/>
               </a:spcAft>
-              <a:buNone/>
+              <a:buSzPct val="100000"/>
+              <a:buChar char="•"/>
             </a:pPr>
             <a:r>
               <a:rPr lang="en-US" sz="1300" dirty="0">
@@ -2392,14 +2396,18 @@
               </a:rPr>
               <a:t>GitHub リポジトリ権限</a:t>
             </a:r>
-            <a:pPr indent="0" marL="0">
+            <a:endParaRPr lang="en-US" sz="1300" dirty="0"/>
+          </a:p>
+          <a:p>
+            <a:pPr marL="342900" indent="-342900">
               <a:lnSpc>
-                <a:spcPct val="108000"/>
+                <a:spcPct val="110000"/>
               </a:lnSpc>
               <a:spcAft>
                 <a:spcPts val="800"/>
               </a:spcAft>
-              <a:buNone/>
+              <a:buSzPct val="100000"/>
+              <a:buChar char="•"/>
             </a:pPr>
             <a:r>
               <a:rPr lang="en-US" sz="1300" dirty="0">
@@ -2412,14 +2420,18 @@
               </a:rPr>
               <a:t>Vercel（デプロイ・環境変数）</a:t>
             </a:r>
-            <a:pPr indent="0" marL="0">
+            <a:endParaRPr lang="en-US" sz="1300" dirty="0"/>
+          </a:p>
+          <a:p>
+            <a:pPr marL="342900" indent="-342900">
               <a:lnSpc>
-                <a:spcPct val="108000"/>
+                <a:spcPct val="110000"/>
               </a:lnSpc>
               <a:spcAft>
                 <a:spcPts val="800"/>
               </a:spcAft>
-              <a:buNone/>
+              <a:buSzPct val="100000"/>
+              <a:buChar char="•"/>
             </a:pPr>
             <a:r>
               <a:rPr lang="en-US" sz="1300" dirty="0">
@@ -2432,14 +2444,18 @@
               </a:rPr>
               <a:t>Supabase（DB・バックアップ）</a:t>
             </a:r>
-            <a:pPr indent="0" marL="0">
+            <a:endParaRPr lang="en-US" sz="1300" dirty="0"/>
+          </a:p>
+          <a:p>
+            <a:pPr marL="342900" indent="-342900">
               <a:lnSpc>
-                <a:spcPct val="108000"/>
+                <a:spcPct val="110000"/>
               </a:lnSpc>
               <a:spcAft>
                 <a:spcPts val="800"/>
               </a:spcAft>
-              <a:buNone/>
+              <a:buSzPct val="100000"/>
+              <a:buChar char="•"/>
             </a:pPr>
             <a:r>
               <a:rPr lang="en-US" sz="1300" dirty="0">
@@ -2452,14 +2468,18 @@
               </a:rPr>
               <a:t>Google Apps Script（トリガー実行者）</a:t>
             </a:r>
-            <a:pPr indent="0" marL="0">
+            <a:endParaRPr lang="en-US" sz="1300" dirty="0"/>
+          </a:p>
+          <a:p>
+            <a:pPr marL="342900" indent="-342900">
               <a:lnSpc>
-                <a:spcPct val="108000"/>
+                <a:spcPct val="110000"/>
               </a:lnSpc>
               <a:spcAft>
                 <a:spcPts val="800"/>
               </a:spcAft>
-              <a:buNone/>
+              <a:buSzPct val="100000"/>
+              <a:buChar char="•"/>
             </a:pPr>
             <a:r>
               <a:rPr lang="en-US" sz="1300" dirty="0">
@@ -2472,14 +2492,18 @@
               </a:rPr>
               <a:t>Google Chat / OAuth 管理権限</a:t>
             </a:r>
-            <a:pPr indent="0" marL="0">
+            <a:endParaRPr lang="en-US" sz="1300" dirty="0"/>
+          </a:p>
+          <a:p>
+            <a:pPr marL="342900" indent="-342900">
               <a:lnSpc>
-                <a:spcPct val="108000"/>
+                <a:spcPct val="110000"/>
               </a:lnSpc>
               <a:spcAft>
                 <a:spcPts val="800"/>
               </a:spcAft>
-              <a:buNone/>
+              <a:buSzPct val="100000"/>
+              <a:buChar char="•"/>
             </a:pPr>
             <a:r>
               <a:rPr lang="en-US" sz="1300" dirty="0">
@@ -2492,14 +2516,18 @@
               </a:rPr>
               <a:t>独自ドメイン DNS/Vercel 設定</a:t>
             </a:r>
-            <a:pPr indent="0" marL="0">
+            <a:endParaRPr lang="en-US" sz="1300" dirty="0"/>
+          </a:p>
+          <a:p>
+            <a:pPr marL="342900" indent="-342900">
               <a:lnSpc>
-                <a:spcPct val="108000"/>
+                <a:spcPct val="110000"/>
               </a:lnSpc>
               <a:spcAft>
                 <a:spcPts val="800"/>
               </a:spcAft>
-              <a:buNone/>
+              <a:buSzPct val="100000"/>
+              <a:buChar char="•"/>
             </a:pPr>
             <a:r>
               <a:rPr lang="en-US" sz="1300" dirty="0">
@@ -2610,14 +2638,15 @@
           <a:bodyPr wrap="square" lIns="0" tIns="0" rIns="0" bIns="0" rtlCol="0" anchor="t"/>
           <a:lstStyle/>
           <a:p>
-            <a:pPr indent="0" marL="0">
+            <a:pPr marL="342900" indent="-342900">
               <a:lnSpc>
-                <a:spcPct val="108000"/>
+                <a:spcPct val="110000"/>
               </a:lnSpc>
               <a:spcAft>
                 <a:spcPts val="800"/>
               </a:spcAft>
-              <a:buNone/>
+              <a:buSzPct val="100000"/>
+              <a:buChar char="•"/>
             </a:pPr>
             <a:r>
               <a:rPr lang="en-US" sz="1300" dirty="0">
@@ -2630,14 +2659,18 @@
               </a:rPr>
               <a:t>各自が好みのAIエージェントでOK</a:t>
             </a:r>
-            <a:pPr indent="0" marL="0">
+            <a:endParaRPr lang="en-US" sz="1300" dirty="0"/>
+          </a:p>
+          <a:p>
+            <a:pPr marL="342900" indent="-342900">
               <a:lnSpc>
-                <a:spcPct val="108000"/>
+                <a:spcPct val="110000"/>
               </a:lnSpc>
               <a:spcAft>
                 <a:spcPts val="800"/>
               </a:spcAft>
-              <a:buNone/>
+              <a:buSzPct val="100000"/>
+              <a:buChar char="•"/>
             </a:pPr>
             <a:r>
               <a:rPr lang="en-US" sz="1300" dirty="0">
@@ -2650,14 +2683,18 @@
               </a:rPr>
               <a:t>作業前に docs/ を読ませる（前提共有）</a:t>
             </a:r>
-            <a:pPr indent="0" marL="0">
+            <a:endParaRPr lang="en-US" sz="1300" dirty="0"/>
+          </a:p>
+          <a:p>
+            <a:pPr marL="342900" indent="-342900">
               <a:lnSpc>
-                <a:spcPct val="108000"/>
+                <a:spcPct val="110000"/>
               </a:lnSpc>
               <a:spcAft>
                 <a:spcPts val="800"/>
               </a:spcAft>
-              <a:buNone/>
+              <a:buSzPct val="100000"/>
+              <a:buChar char="•"/>
             </a:pPr>
             <a:r>
               <a:rPr lang="en-US" sz="1300" dirty="0">
@@ -2670,14 +2707,18 @@
               </a:rPr>
               <a:t>変更は ブランチ→PR→プレビュー確認→マージ</a:t>
             </a:r>
-            <a:pPr indent="0" marL="0">
+            <a:endParaRPr lang="en-US" sz="1300" dirty="0"/>
+          </a:p>
+          <a:p>
+            <a:pPr marL="342900" indent="-342900">
               <a:lnSpc>
-                <a:spcPct val="108000"/>
+                <a:spcPct val="110000"/>
               </a:lnSpc>
               <a:spcAft>
                 <a:spcPts val="800"/>
               </a:spcAft>
-              <a:buNone/>
+              <a:buSzPct val="100000"/>
+              <a:buChar char="•"/>
             </a:pPr>
             <a:r>
               <a:rPr lang="en-US" sz="1300" dirty="0">
@@ -2690,14 +2731,18 @@
               </a:rPr>
               <a:t>秘密情報（キー値）は書かせない</a:t>
             </a:r>
-            <a:pPr indent="0" marL="0">
+            <a:endParaRPr lang="en-US" sz="1300" dirty="0"/>
+          </a:p>
+          <a:p>
+            <a:pPr marL="342900" indent="-342900">
               <a:lnSpc>
-                <a:spcPct val="108000"/>
+                <a:spcPct val="110000"/>
               </a:lnSpc>
               <a:spcAft>
                 <a:spcPts val="800"/>
               </a:spcAft>
-              <a:buNone/>
+              <a:buSzPct val="100000"/>
+              <a:buChar char="•"/>
             </a:pPr>
             <a:r>
               <a:rPr lang="en-US" sz="1300" dirty="0">
@@ -2710,17 +2755,21 @@
               </a:rPr>
               <a:t>スキーマ変更は migration 化（drift防止）</a:t>
             </a:r>
-            <a:pPr indent="0" marL="0">
+            <a:endParaRPr lang="en-US" sz="1300" dirty="0"/>
+          </a:p>
+          <a:p>
+            <a:pPr marL="342900" indent="-342900">
               <a:lnSpc>
-                <a:spcPct val="108000"/>
+                <a:spcPct val="110000"/>
               </a:lnSpc>
               <a:spcAft>
                 <a:spcPts val="800"/>
               </a:spcAft>
-              <a:buNone/>
-            </a:pPr>
-            <a:r>
-              <a:rPr lang="en-US" sz="1300" dirty="0">
+              <a:buSzPct val="100000"/>
+              <a:buChar char="•"/>
+            </a:pPr>
+            <a:r>
+              <a:rPr lang="en-US" sz="1300" b="1" dirty="0">
                 <a:solidFill>
                   <a:srgbClr val="2A2E45"/>
                 </a:solidFill>
@@ -5966,6 +6015,9 @@
               </a:rPr>
               <a:t>ラクネコ（受付SaaS）の代替として内製。</a:t>
             </a:r>
+            <a:endParaRPr lang="en-US" sz="1500" dirty="0"/>
+          </a:p>
+          <a:p>
             <a:pPr indent="0" marL="0">
               <a:lnSpc>
                 <a:spcPct val="130000"/>
@@ -8324,14 +8376,15 @@
           <a:bodyPr wrap="square" lIns="0" tIns="0" rIns="0" bIns="0" rtlCol="0" anchor="t"/>
           <a:lstStyle/>
           <a:p>
-            <a:pPr indent="0" marL="0">
+            <a:pPr marL="342900" indent="-342900">
               <a:lnSpc>
-                <a:spcPct val="108000"/>
+                <a:spcPct val="110000"/>
               </a:lnSpc>
               <a:spcAft>
                 <a:spcPts val="1300"/>
               </a:spcAft>
-              <a:buNone/>
+              <a:buSzPct val="100000"/>
+              <a:buChar char="•"/>
             </a:pPr>
             <a:r>
               <a:rPr lang="en-US" sz="1400" dirty="0">
@@ -8344,14 +8397,18 @@
               </a:rPr>
               <a:t>main へ push → Vercel が自動デプロイ</a:t>
             </a:r>
-            <a:pPr indent="0" marL="0">
+            <a:endParaRPr lang="en-US" sz="1400" dirty="0"/>
+          </a:p>
+          <a:p>
+            <a:pPr marL="342900" indent="-342900">
               <a:lnSpc>
-                <a:spcPct val="108000"/>
+                <a:spcPct val="110000"/>
               </a:lnSpc>
               <a:spcAft>
                 <a:spcPts val="1300"/>
               </a:spcAft>
-              <a:buNone/>
+              <a:buSzPct val="100000"/>
+              <a:buChar char="•"/>
             </a:pPr>
             <a:r>
               <a:rPr lang="en-US" sz="1400" dirty="0">
@@ -8364,14 +8421,18 @@
               </a:rPr>
               <a:t>main マージ＝本番反映（1〜数分）</a:t>
             </a:r>
-            <a:pPr indent="0" marL="0">
+            <a:endParaRPr lang="en-US" sz="1400" dirty="0"/>
+          </a:p>
+          <a:p>
+            <a:pPr marL="342900" indent="-342900">
               <a:lnSpc>
-                <a:spcPct val="108000"/>
+                <a:spcPct val="110000"/>
               </a:lnSpc>
               <a:spcAft>
                 <a:spcPts val="1300"/>
               </a:spcAft>
-              <a:buNone/>
+              <a:buSzPct val="100000"/>
+              <a:buChar char="•"/>
             </a:pPr>
             <a:r>
               <a:rPr lang="en-US" sz="1400" dirty="0">
@@ -8384,14 +8445,18 @@
               </a:rPr>
               <a:t>PRごとにプレビューURLで事前確認</a:t>
             </a:r>
-            <a:pPr indent="0" marL="0">
+            <a:endParaRPr lang="en-US" sz="1400" dirty="0"/>
+          </a:p>
+          <a:p>
+            <a:pPr marL="342900" indent="-342900">
               <a:lnSpc>
-                <a:spcPct val="108000"/>
+                <a:spcPct val="110000"/>
               </a:lnSpc>
               <a:spcAft>
                 <a:spcPts val="1300"/>
               </a:spcAft>
-              <a:buNone/>
+              <a:buSzPct val="100000"/>
+              <a:buChar char="•"/>
             </a:pPr>
             <a:r>
               <a:rPr lang="en-US" sz="1400" dirty="0">
@@ -8404,14 +8469,18 @@
               </a:rPr>
               <a:t>PRのCIは無し（プレビュー目視が要）</a:t>
             </a:r>
-            <a:pPr indent="0" marL="0">
+            <a:endParaRPr lang="en-US" sz="1400" dirty="0"/>
+          </a:p>
+          <a:p>
+            <a:pPr marL="342900" indent="-342900">
               <a:lnSpc>
-                <a:spcPct val="108000"/>
+                <a:spcPct val="110000"/>
               </a:lnSpc>
               <a:spcAft>
                 <a:spcPts val="1300"/>
               </a:spcAft>
-              <a:buNone/>
+              <a:buSzPct val="100000"/>
+              <a:buChar char="•"/>
             </a:pPr>
             <a:r>
               <a:rPr lang="en-US" sz="1400" dirty="0">
@@ -9251,14 +9320,15 @@
           <a:bodyPr wrap="square" lIns="0" tIns="0" rIns="0" bIns="0" rtlCol="0" anchor="t"/>
           <a:lstStyle/>
           <a:p>
-            <a:pPr indent="0" marL="0">
+            <a:pPr marL="342900" indent="-342900">
               <a:lnSpc>
-                <a:spcPct val="108000"/>
+                <a:spcPct val="110000"/>
               </a:lnSpc>
               <a:spcAft>
                 <a:spcPts val="800"/>
               </a:spcAft>
-              <a:buNone/>
+              <a:buSzPct val="100000"/>
+              <a:buChar char="•"/>
             </a:pPr>
             <a:r>
               <a:rPr lang="en-US" sz="1250" dirty="0">
@@ -9271,14 +9341,18 @@
               </a:rPr>
               <a:t>reception_visits … 入退館記録</a:t>
             </a:r>
-            <a:pPr indent="0" marL="0">
+            <a:endParaRPr lang="en-US" sz="1250" dirty="0"/>
+          </a:p>
+          <a:p>
+            <a:pPr marL="342900" indent="-342900">
               <a:lnSpc>
-                <a:spcPct val="108000"/>
+                <a:spcPct val="110000"/>
               </a:lnSpc>
               <a:spcAft>
                 <a:spcPts val="800"/>
               </a:spcAft>
-              <a:buNone/>
+              <a:buSzPct val="100000"/>
+              <a:buChar char="•"/>
             </a:pPr>
             <a:r>
               <a:rPr lang="en-US" sz="1250" dirty="0">
@@ -9291,14 +9365,18 @@
               </a:rPr>
               <a:t>reception_responders … 対応者</a:t>
             </a:r>
-            <a:pPr indent="0" marL="0">
+            <a:endParaRPr lang="en-US" sz="1250" dirty="0"/>
+          </a:p>
+          <a:p>
+            <a:pPr marL="342900" indent="-342900">
               <a:lnSpc>
-                <a:spcPct val="108000"/>
+                <a:spcPct val="110000"/>
               </a:lnSpc>
               <a:spcAft>
                 <a:spcPts val="800"/>
               </a:spcAft>
-              <a:buNone/>
+              <a:buSzPct val="100000"/>
+              <a:buChar char="•"/>
             </a:pPr>
             <a:r>
               <a:rPr lang="en-US" sz="1250" dirty="0">
@@ -9311,14 +9389,18 @@
               </a:rPr>
               <a:t>reception_invitations … 招待</a:t>
             </a:r>
-            <a:pPr indent="0" marL="0">
+            <a:endParaRPr lang="en-US" sz="1250" dirty="0"/>
+          </a:p>
+          <a:p>
+            <a:pPr marL="342900" indent="-342900">
               <a:lnSpc>
-                <a:spcPct val="108000"/>
+                <a:spcPct val="110000"/>
               </a:lnSpc>
               <a:spcAft>
                 <a:spcPts val="800"/>
               </a:spcAft>
-              <a:buNone/>
+              <a:buSzPct val="100000"/>
+              <a:buChar char="•"/>
             </a:pPr>
             <a:r>
               <a:rPr lang="en-US" sz="1250" dirty="0">
@@ -9331,14 +9413,18 @@
               </a:rPr>
               <a:t>reception_rooms / _room_availability … 会議室</a:t>
             </a:r>
-            <a:pPr indent="0" marL="0">
+            <a:endParaRPr lang="en-US" sz="1250" dirty="0"/>
+          </a:p>
+          <a:p>
+            <a:pPr marL="342900" indent="-342900">
               <a:lnSpc>
-                <a:spcPct val="108000"/>
+                <a:spcPct val="110000"/>
               </a:lnSpc>
               <a:spcAft>
                 <a:spcPts val="800"/>
               </a:spcAft>
-              <a:buNone/>
+              <a:buSzPct val="100000"/>
+              <a:buChar char="•"/>
             </a:pPr>
             <a:r>
               <a:rPr lang="en-US" sz="1250" dirty="0">
@@ -9351,14 +9437,18 @@
               </a:rPr>
               <a:t>reception_settings … 設定（KV）</a:t>
             </a:r>
-            <a:pPr indent="0" marL="0">
+            <a:endParaRPr lang="en-US" sz="1250" dirty="0"/>
+          </a:p>
+          <a:p>
+            <a:pPr marL="342900" indent="-342900">
               <a:lnSpc>
-                <a:spcPct val="108000"/>
+                <a:spcPct val="110000"/>
               </a:lnSpc>
               <a:spcAft>
                 <a:spcPts val="800"/>
               </a:spcAft>
-              <a:buNone/>
+              <a:buSzPct val="100000"/>
+              <a:buChar char="•"/>
             </a:pPr>
             <a:r>
               <a:rPr lang="en-US" sz="1250" dirty="0">
@@ -9567,14 +9657,15 @@
           <a:bodyPr wrap="square" lIns="0" tIns="0" rIns="0" bIns="0" rtlCol="0" anchor="t"/>
           <a:lstStyle/>
           <a:p>
-            <a:pPr indent="0" marL="0">
+            <a:pPr marL="342900" indent="-342900">
               <a:lnSpc>
-                <a:spcPct val="108000"/>
+                <a:spcPct val="110000"/>
               </a:lnSpc>
               <a:spcAft>
                 <a:spcPts val="1000"/>
               </a:spcAft>
-              <a:buNone/>
+              <a:buSzPct val="100000"/>
+              <a:buChar char="•"/>
             </a:pPr>
             <a:r>
               <a:rPr lang="en-US" sz="1300" dirty="0">
@@ -9587,14 +9678,18 @@
               </a:rPr>
               <a:t>本番スキーマは migrations/ より進んでいる</a:t>
             </a:r>
-            <a:pPr indent="0" marL="0">
+            <a:endParaRPr lang="en-US" sz="1300" dirty="0"/>
+          </a:p>
+          <a:p>
+            <a:pPr marL="342900" indent="-342900">
               <a:lnSpc>
-                <a:spcPct val="108000"/>
+                <a:spcPct val="110000"/>
               </a:lnSpc>
               <a:spcAft>
                 <a:spcPts val="1000"/>
               </a:spcAft>
-              <a:buNone/>
+              <a:buSzPct val="100000"/>
+              <a:buChar char="•"/>
             </a:pPr>
             <a:r>
               <a:rPr lang="en-US" sz="1300" dirty="0">
@@ -9607,14 +9702,18 @@
               </a:rPr>
               <a:t>一部の列・表は管理画面で直接適用済み</a:t>
             </a:r>
-            <a:pPr indent="0" marL="0">
+            <a:endParaRPr lang="en-US" sz="1300" dirty="0"/>
+          </a:p>
+          <a:p>
+            <a:pPr marL="342900" indent="-342900">
               <a:lnSpc>
-                <a:spcPct val="108000"/>
+                <a:spcPct val="110000"/>
               </a:lnSpc>
               <a:spcAft>
                 <a:spcPts val="1000"/>
               </a:spcAft>
-              <a:buNone/>
+              <a:buSzPct val="100000"/>
+              <a:buChar char="•"/>
             </a:pPr>
             <a:r>
               <a:rPr lang="en-US" sz="1300" dirty="0">
@@ -9627,17 +9726,21 @@
               </a:rPr>
               <a:t>例: calendar_id / room_availability / actor_name / visit_purpose 等</a:t>
             </a:r>
-            <a:pPr indent="0" marL="0">
+            <a:endParaRPr lang="en-US" sz="1300" dirty="0"/>
+          </a:p>
+          <a:p>
+            <a:pPr marL="342900" indent="-342900">
               <a:lnSpc>
-                <a:spcPct val="108000"/>
+                <a:spcPct val="110000"/>
               </a:lnSpc>
               <a:spcAft>
                 <a:spcPts val="1000"/>
               </a:spcAft>
-              <a:buNone/>
-            </a:pPr>
-            <a:r>
-              <a:rPr lang="en-US" sz="1300" dirty="0">
+              <a:buSzPct val="100000"/>
+              <a:buChar char="•"/>
+            </a:pPr>
+            <a:r>
+              <a:rPr lang="en-US" sz="1300" b="1" dirty="0">
                 <a:solidFill>
                   <a:srgbClr val="2A2E45"/>
                 </a:solidFill>
@@ -9647,17 +9750,21 @@
               </a:rPr>
               <a:t>→ 本番が「正」。migrationだけでは再構築不可</a:t>
             </a:r>
-            <a:pPr indent="0" marL="0">
+            <a:endParaRPr lang="en-US" sz="1300" dirty="0"/>
+          </a:p>
+          <a:p>
+            <a:pPr marL="342900" indent="-342900">
               <a:lnSpc>
-                <a:spcPct val="108000"/>
+                <a:spcPct val="110000"/>
               </a:lnSpc>
               <a:spcAft>
                 <a:spcPts val="1000"/>
               </a:spcAft>
-              <a:buNone/>
-            </a:pPr>
-            <a:r>
-              <a:rPr lang="en-US" sz="1300" dirty="0">
+              <a:buSzPct val="100000"/>
+              <a:buChar char="•"/>
+            </a:pPr>
+            <a:r>
+              <a:rPr lang="en-US" sz="1300" b="1" dirty="0">
                 <a:solidFill>
                   <a:srgbClr val="2A2E45"/>
                 </a:solidFill>
@@ -10416,17 +10523,18 @@
           <a:bodyPr wrap="square" lIns="0" tIns="0" rIns="0" bIns="0" rtlCol="0" anchor="t"/>
           <a:lstStyle/>
           <a:p>
-            <a:pPr indent="0" marL="0">
+            <a:pPr marL="342900" indent="-342900">
               <a:lnSpc>
-                <a:spcPct val="108000"/>
+                <a:spcPct val="110000"/>
               </a:lnSpc>
               <a:spcAft>
                 <a:spcPts val="900"/>
               </a:spcAft>
-              <a:buNone/>
-            </a:pPr>
-            <a:r>
-              <a:rPr lang="en-US" sz="1300" dirty="0">
+              <a:buSzPct val="100000"/>
+              <a:buChar char="•"/>
+            </a:pPr>
+            <a:r>
+              <a:rPr lang="en-US" sz="1300" b="1" dirty="0">
                 <a:solidFill>
                   <a:srgbClr val="2A2E45"/>
                 </a:solidFill>
@@ -10436,14 +10544,18 @@
               </a:rPr>
               <a:t>RECEPTION_URL は直URL（*.vercel.app）</a:t>
             </a:r>
-            <a:pPr indent="0" marL="0">
+            <a:endParaRPr lang="en-US" sz="1300" dirty="0"/>
+          </a:p>
+          <a:p>
+            <a:pPr marL="342900" indent="-342900">
               <a:lnSpc>
-                <a:spcPct val="108000"/>
+                <a:spcPct val="110000"/>
               </a:lnSpc>
               <a:spcAft>
                 <a:spcPts val="900"/>
               </a:spcAft>
-              <a:buNone/>
+              <a:buSzPct val="100000"/>
+              <a:buChar char="•"/>
             </a:pPr>
             <a:r>
               <a:rPr lang="en-US" sz="1300" dirty="0">
@@ -10456,17 +10568,21 @@
               </a:rPr>
               <a:t>独自ドメインはリダイレクトで405</a:t>
             </a:r>
-            <a:pPr indent="0" marL="0">
+            <a:endParaRPr lang="en-US" sz="1300" dirty="0"/>
+          </a:p>
+          <a:p>
+            <a:pPr marL="342900" indent="-342900">
               <a:lnSpc>
-                <a:spcPct val="108000"/>
+                <a:spcPct val="110000"/>
               </a:lnSpc>
               <a:spcAft>
                 <a:spcPts val="900"/>
               </a:spcAft>
-              <a:buNone/>
-            </a:pPr>
-            <a:r>
-              <a:rPr lang="en-US" sz="1300" dirty="0">
+              <a:buSzPct val="100000"/>
+              <a:buChar char="•"/>
+            </a:pPr>
+            <a:r>
+              <a:rPr lang="en-US" sz="1300" b="1" dirty="0">
                 <a:solidFill>
                   <a:srgbClr val="2A2E45"/>
                 </a:solidFill>
@@ -10476,14 +10592,18 @@
               </a:rPr>
               <a:t>同期は設定者1名のアカウント依存</a:t>
             </a:r>
-            <a:pPr indent="0" marL="0">
+            <a:endParaRPr lang="en-US" sz="1300" dirty="0"/>
+          </a:p>
+          <a:p>
+            <a:pPr marL="342900" indent="-342900">
               <a:lnSpc>
-                <a:spcPct val="108000"/>
+                <a:spcPct val="110000"/>
               </a:lnSpc>
               <a:spcAft>
                 <a:spcPts val="900"/>
               </a:spcAft>
-              <a:buNone/>
+              <a:buSzPct val="100000"/>
+              <a:buChar char="•"/>
             </a:pPr>
             <a:r>
               <a:rPr lang="en-US" sz="1300" dirty="0">
@@ -10496,14 +10616,18 @@
               </a:rPr>
               <a:t>退職・権限変更で停止 → 別担当で再設定</a:t>
             </a:r>
-            <a:pPr indent="0" marL="0">
+            <a:endParaRPr lang="en-US" sz="1300" dirty="0"/>
+          </a:p>
+          <a:p>
+            <a:pPr marL="342900" indent="-342900">
               <a:lnSpc>
-                <a:spcPct val="108000"/>
+                <a:spcPct val="110000"/>
               </a:lnSpc>
               <a:spcAft>
                 <a:spcPts val="900"/>
               </a:spcAft>
-              <a:buNone/>
+              <a:buSzPct val="100000"/>
+              <a:buChar char="•"/>
             </a:pPr>
             <a:r>
               <a:rPr lang="en-US" sz="1300" dirty="0">
@@ -10516,14 +10640,18 @@
               </a:rPr>
               <a:t>SECRET は Vercel と GAS で一致</a:t>
             </a:r>
-            <a:pPr indent="0" marL="0">
+            <a:endParaRPr lang="en-US" sz="1300" dirty="0"/>
+          </a:p>
+          <a:p>
+            <a:pPr marL="342900" indent="-342900">
               <a:lnSpc>
-                <a:spcPct val="108000"/>
+                <a:spcPct val="110000"/>
               </a:lnSpc>
               <a:spcAft>
                 <a:spcPts val="900"/>
               </a:spcAft>
-              <a:buNone/>
+              <a:buSzPct val="100000"/>
+              <a:buChar char="•"/>
             </a:pPr>
             <a:r>
               <a:rPr lang="en-US" sz="1300" dirty="0">
@@ -11477,14 +11605,15 @@
           <a:bodyPr wrap="square" lIns="0" tIns="0" rIns="0" bIns="0" rtlCol="0" anchor="t"/>
           <a:lstStyle/>
           <a:p>
-            <a:pPr indent="0" marL="0">
+            <a:pPr marL="342900" indent="-342900">
               <a:lnSpc>
-                <a:spcPct val="108000"/>
+                <a:spcPct val="110000"/>
               </a:lnSpc>
               <a:spcAft>
                 <a:spcPts val="500"/>
               </a:spcAft>
-              <a:buNone/>
+              <a:buSzPct val="100000"/>
+              <a:buChar char="•"/>
             </a:pPr>
             <a:r>
               <a:rPr lang="en-US" sz="1200" dirty="0">
@@ -11497,14 +11626,18 @@
               </a:rPr>
               <a:t>Chat通知が来ない … 設定のWebhook／個別DMはstaffのnotification_webhook</a:t>
             </a:r>
-            <a:pPr indent="0" marL="0">
+            <a:endParaRPr lang="en-US" sz="1200" dirty="0"/>
+          </a:p>
+          <a:p>
+            <a:pPr marL="342900" indent="-342900">
               <a:lnSpc>
-                <a:spcPct val="108000"/>
+                <a:spcPct val="110000"/>
               </a:lnSpc>
               <a:spcAft>
                 <a:spcPts val="500"/>
               </a:spcAft>
-              <a:buNone/>
+              <a:buSzPct val="100000"/>
+              <a:buChar char="•"/>
             </a:pPr>
             <a:r>
               <a:rPr lang="en-US" sz="1200" dirty="0">
@@ -11517,14 +11650,18 @@
               </a:rPr>
               <a:t>PIN忘れ … 管理画面でPINリセット（要 RESEND_API_KEY）</a:t>
             </a:r>
-            <a:pPr indent="0" marL="0">
+            <a:endParaRPr lang="en-US" sz="1200" dirty="0"/>
+          </a:p>
+          <a:p>
+            <a:pPr marL="342900" indent="-342900">
               <a:lnSpc>
-                <a:spcPct val="108000"/>
+                <a:spcPct val="110000"/>
               </a:lnSpc>
               <a:spcAft>
                 <a:spcPts val="500"/>
               </a:spcAft>
-              <a:buNone/>
+              <a:buSzPct val="100000"/>
+              <a:buChar char="•"/>
             </a:pPr>
             <a:r>
               <a:rPr lang="en-US" sz="1200" dirty="0">
@@ -11537,14 +11674,18 @@
               </a:rPr>
               <a:t>QR期限切れ … 来訪日が過去日は無効（仕様）</a:t>
             </a:r>
-            <a:pPr indent="0" marL="0">
+            <a:endParaRPr lang="en-US" sz="1200" dirty="0"/>
+          </a:p>
+          <a:p>
+            <a:pPr marL="342900" indent="-342900">
               <a:lnSpc>
-                <a:spcPct val="108000"/>
+                <a:spcPct val="110000"/>
               </a:lnSpc>
               <a:spcAft>
                 <a:spcPts val="500"/>
               </a:spcAft>
-              <a:buNone/>
+              <a:buSzPct val="100000"/>
+              <a:buChar char="•"/>
             </a:pPr>
             <a:r>
               <a:rPr lang="en-US" sz="1200" dirty="0">
